--- a/docs/Defensa_ShopMart_Olist.pptx
+++ b/docs/Defensa_ShopMart_Olist.pptx
@@ -3128,6 +3128,516 @@
 
 <file path=ppt/slides/slide10.xml><?xml version="1.0" encoding="utf-8"?>
 <p:sld xmlns:a="http://schemas.openxmlformats.org/drawingml/2006/main" xmlns:r="http://schemas.openxmlformats.org/officeDocument/2006/relationships" xmlns:p="http://schemas.openxmlformats.org/presentationml/2006/main">
+  <p:cSld name="Slide 8">
+    <p:spTree>
+      <p:nvGrpSpPr>
+        <p:cNvPr id="1" name=""/>
+        <p:cNvGrpSpPr/>
+        <p:nvPr/>
+      </p:nvGrpSpPr>
+      <p:grpSpPr>
+        <a:xfrm>
+          <a:off x="0" y="0"/>
+          <a:ext cx="0" cy="0"/>
+          <a:chOff x="0" y="0"/>
+          <a:chExt cx="0" cy="0"/>
+        </a:xfrm>
+      </p:grpSpPr>
+      <p:sp>
+        <p:nvSpPr>
+          <p:cNvPr id="2" name="Text 0"/>
+          <p:cNvSpPr/>
+          <p:nvPr/>
+        </p:nvSpPr>
+        <p:spPr>
+          <a:xfrm>
+            <a:off x="609600" y="609600"/>
+            <a:ext cx="8083296" cy="411361"/>
+          </a:xfrm>
+          <a:prstGeom prst="rect">
+            <a:avLst/>
+          </a:prstGeom>
+          <a:noFill/>
+          <a:ln/>
+        </p:spPr>
+        <p:txBody>
+          <a:bodyPr wrap="square" lIns="0" tIns="0" rIns="0" bIns="0" rtlCol="0" anchor="t"/>
+          <a:lstStyle/>
+          <a:p>
+            <a:pPr>
+              <a:lnSpc>
+                <a:spcPts val="3240"/>
+              </a:lnSpc>
+            </a:pPr>
+            <a:r>
+              <a:rPr lang="en-US" sz="3600" b="1" dirty="0">
+                <a:solidFill>
+                  <a:srgbClr val="EC6A16"/>
+                </a:solidFill>
+                <a:latin typeface="Calibri"/>
+                <a:ea typeface="Calibri"/>
+                <a:cs typeface="Calibri"/>
+              </a:rPr>
+              <a:t>Features y Baseline</a:t>
+            </a:r>
+          </a:p>
+        </p:txBody>
+      </p:sp>
+      <p:sp>
+        <p:nvSpPr>
+          <p:cNvPr id="3" name="Text 1"/>
+          <p:cNvSpPr/>
+          <p:nvPr/>
+        </p:nvSpPr>
+        <p:spPr>
+          <a:xfrm>
+            <a:off x="609600" y="1252728"/>
+            <a:ext cx="8083296" cy="239911"/>
+          </a:xfrm>
+          <a:prstGeom prst="rect">
+            <a:avLst/>
+          </a:prstGeom>
+          <a:noFill/>
+          <a:ln/>
+        </p:spPr>
+        <p:txBody>
+          <a:bodyPr wrap="square" lIns="0" tIns="0" rIns="0" bIns="0" rtlCol="0" anchor="t"/>
+          <a:lstStyle/>
+          <a:p>
+            <a:pPr marL="0" indent="0">
+              <a:lnSpc>
+                <a:spcPts val="1890"/>
+              </a:lnSpc>
+              <a:buNone/>
+            </a:pPr>
+            <a:r>
+              <a:rPr lang="en-US" sz="1350" dirty="0">
+                <a:solidFill>
+                  <a:srgbClr val="475569"/>
+                </a:solidFill>
+                <a:latin typeface="Arial" pitchFamily="34" charset="0"/>
+                <a:ea typeface="Arial" pitchFamily="34" charset="-122"/>
+                <a:cs typeface="Arial" pitchFamily="34" charset="-120"/>
+              </a:rPr>
+              <a:t>Transformaciones / Selección / Desbalance:</a:t>
+            </a:r>
+            <a:endParaRPr lang="en-US" sz="1350" dirty="0"/>
+          </a:p>
+        </p:txBody>
+      </p:sp>
+      <p:sp>
+        <p:nvSpPr>
+          <p:cNvPr id="4" name="Text 2"/>
+          <p:cNvSpPr/>
+          <p:nvPr/>
+        </p:nvSpPr>
+        <p:spPr>
+          <a:xfrm>
+            <a:off x="609600" y="1645920"/>
+            <a:ext cx="8083296" cy="393192"/>
+          </a:xfrm>
+          <a:prstGeom prst="rect">
+            <a:avLst/>
+          </a:prstGeom>
+          <a:noFill/>
+          <a:ln/>
+        </p:spPr>
+        <p:txBody>
+          <a:bodyPr wrap="square" lIns="0" tIns="0" rIns="0" bIns="0" rtlCol="0" anchor="t"/>
+          <a:lstStyle/>
+          <a:p>
+            <a:pPr marL="0" indent="0">
+              <a:lnSpc>
+                <a:spcPts val="1680"/>
+              </a:lnSpc>
+              <a:buNone/>
+            </a:pPr>
+            <a:endParaRPr lang="en-US" sz="1200" dirty="0"/>
+            <a:r>
+              <a:rPr lang="en-US" sz="1200" dirty="0">
+                <a:solidFill>
+                  <a:srgbClr val="475569"/>
+                </a:solidFill>
+                <a:latin typeface="Arial" pitchFamily="34" charset="0"/>
+                <a:ea typeface="Arial" pitchFamily="34" charset="-122"/>
+                <a:cs typeface="Arial" pitchFamily="34" charset="-120"/>
+              </a:rPr>
+              <a:t>23 features derivadas del primer pedido (valor, pago, entrega, categoría, estacionalidad), ensambladas en un pipeline de one-hot + imputación + escalado ajustado solo en train.</a:t>
+            </a:r>
+          </a:p>
+        </p:txBody>
+      </p:sp>
+      <p:sp>
+        <p:nvSpPr>
+          <p:cNvPr id="5" name="Text 3"/>
+          <p:cNvSpPr/>
+          <p:nvPr/>
+        </p:nvSpPr>
+        <p:spPr>
+          <a:xfrm>
+            <a:off x="609600" y="2267712"/>
+            <a:ext cx="8083296" cy="239911"/>
+          </a:xfrm>
+          <a:prstGeom prst="rect">
+            <a:avLst/>
+          </a:prstGeom>
+          <a:noFill/>
+          <a:ln/>
+        </p:spPr>
+        <p:txBody>
+          <a:bodyPr wrap="square" lIns="0" tIns="0" rIns="0" bIns="0" rtlCol="0" anchor="t"/>
+          <a:lstStyle/>
+          <a:p>
+            <a:pPr marL="0" indent="0">
+              <a:lnSpc>
+                <a:spcPts val="1890"/>
+              </a:lnSpc>
+              <a:buNone/>
+            </a:pPr>
+            <a:r>
+              <a:rPr lang="en-US" sz="1350" dirty="0">
+                <a:solidFill>
+                  <a:srgbClr val="475569"/>
+                </a:solidFill>
+                <a:latin typeface="Arial" pitchFamily="34" charset="0"/>
+                <a:ea typeface="Arial" pitchFamily="34" charset="-122"/>
+                <a:cs typeface="Arial" pitchFamily="34" charset="-120"/>
+              </a:rPr>
+              <a:t>Baseline:</a:t>
+            </a:r>
+            <a:endParaRPr lang="en-US" sz="1350" dirty="0"/>
+          </a:p>
+        </p:txBody>
+      </p:sp>
+      <p:sp>
+        <p:nvSpPr>
+          <p:cNvPr id="6" name="Text 4"/>
+          <p:cNvSpPr/>
+          <p:nvPr/>
+        </p:nvSpPr>
+        <p:spPr>
+          <a:xfrm>
+            <a:off x="609600" y="2660904"/>
+            <a:ext cx="8083296" cy="393192"/>
+          </a:xfrm>
+          <a:prstGeom prst="rect">
+            <a:avLst/>
+          </a:prstGeom>
+          <a:noFill/>
+          <a:ln/>
+        </p:spPr>
+        <p:txBody>
+          <a:bodyPr wrap="square" lIns="0" tIns="0" rIns="0" bIns="0" rtlCol="0" anchor="t"/>
+          <a:lstStyle/>
+          <a:p>
+            <a:pPr marL="0" indent="0">
+              <a:lnSpc>
+                <a:spcPts val="1680"/>
+              </a:lnSpc>
+              <a:buNone/>
+            </a:pPr>
+            <a:endParaRPr lang="en-US" sz="1200" dirty="0"/>
+            <a:r>
+              <a:rPr lang="en-US" sz="1200" dirty="0">
+                <a:solidFill>
+                  <a:srgbClr val="475569"/>
+                </a:solidFill>
+                <a:latin typeface="Arial" pitchFamily="34" charset="0"/>
+                <a:ea typeface="Arial" pitchFamily="34" charset="-122"/>
+                <a:cs typeface="Arial" pitchFamily="34" charset="-120"/>
+              </a:rPr>
+              <a:t>El DummyClassifier reproduce la tasa base sin usar ninguna señal (PR-AUC = 0.033) — es el piso que cualquier modelo real debe superar para justificar su complejidad.</a:t>
+            </a:r>
+          </a:p>
+        </p:txBody>
+      </p:sp>
+    </p:spTree>
+  </p:cSld>
+  <p:clrMapOvr>
+    <a:masterClrMapping/>
+  </p:clrMapOvr>
+</p:sld>
+</file>
+
+<file path=ppt/slides/slide11.xml><?xml version="1.0" encoding="utf-8"?>
+<p:sld xmlns:a="http://schemas.openxmlformats.org/drawingml/2006/main" xmlns:r="http://schemas.openxmlformats.org/officeDocument/2006/relationships" xmlns:p="http://schemas.openxmlformats.org/presentationml/2006/main">
+  <p:cSld name="Slide 9">
+    <p:spTree>
+      <p:nvGrpSpPr>
+        <p:cNvPr id="1" name=""/>
+        <p:cNvGrpSpPr/>
+        <p:nvPr/>
+      </p:nvGrpSpPr>
+      <p:grpSpPr>
+        <a:xfrm>
+          <a:off x="0" y="0"/>
+          <a:ext cx="0" cy="0"/>
+          <a:chOff x="0" y="0"/>
+          <a:chExt cx="0" cy="0"/>
+        </a:xfrm>
+      </p:grpSpPr>
+      <p:sp>
+        <p:nvSpPr>
+          <p:cNvPr id="2" name="Text 0"/>
+          <p:cNvSpPr/>
+          <p:nvPr/>
+        </p:nvSpPr>
+        <p:spPr>
+          <a:xfrm>
+            <a:off x="609600" y="609600"/>
+            <a:ext cx="8083296" cy="411361"/>
+          </a:xfrm>
+          <a:prstGeom prst="rect">
+            <a:avLst/>
+          </a:prstGeom>
+          <a:noFill/>
+          <a:ln/>
+        </p:spPr>
+        <p:txBody>
+          <a:bodyPr wrap="square" lIns="0" tIns="0" rIns="0" bIns="0" rtlCol="0" anchor="t"/>
+          <a:lstStyle/>
+          <a:p>
+            <a:pPr indent="0">
+              <a:lnSpc>
+                <a:spcPts val="3240"/>
+              </a:lnSpc>
+              <a:buNone/>
+            </a:pPr>
+            <a:r>
+              <a:rPr lang="en-US" sz="3600" b="1" dirty="0">
+                <a:solidFill>
+                  <a:srgbClr val="EC6A16"/>
+                </a:solidFill>
+                <a:latin typeface="Calibri"/>
+                <a:ea typeface="Calibri"/>
+                <a:cs typeface="Calibri"/>
+              </a:rPr>
+              <a:t>3. Modelos: Candidatos y Selección</a:t>
+            </a:r>
+          </a:p>
+        </p:txBody>
+      </p:sp>
+      <p:sp>
+        <p:nvSpPr>
+          <p:cNvPr id="3" name="Text 1"/>
+          <p:cNvSpPr/>
+          <p:nvPr/>
+        </p:nvSpPr>
+        <p:spPr>
+          <a:xfrm>
+            <a:off x="609600" y="1252728"/>
+            <a:ext cx="8083296" cy="239911"/>
+          </a:xfrm>
+          <a:prstGeom prst="rect">
+            <a:avLst/>
+          </a:prstGeom>
+          <a:noFill/>
+          <a:ln/>
+        </p:spPr>
+        <p:txBody>
+          <a:bodyPr wrap="square" lIns="0" tIns="0" rIns="0" bIns="0" rtlCol="0" anchor="t"/>
+          <a:lstStyle/>
+          <a:p>
+            <a:pPr marL="0" indent="0">
+              <a:lnSpc>
+                <a:spcPts val="1890"/>
+              </a:lnSpc>
+              <a:buNone/>
+            </a:pPr>
+            <a:r>
+              <a:rPr lang="en-US" sz="1350" dirty="0">
+                <a:solidFill>
+                  <a:srgbClr val="475569"/>
+                </a:solidFill>
+                <a:latin typeface="Arial" pitchFamily="34" charset="0"/>
+                <a:ea typeface="Arial" pitchFamily="34" charset="-122"/>
+                <a:cs typeface="Arial" pitchFamily="34" charset="-120"/>
+              </a:rPr>
+              <a:t>Evaluados:</a:t>
+            </a:r>
+            <a:endParaRPr lang="en-US" sz="1350" dirty="0"/>
+          </a:p>
+        </p:txBody>
+      </p:sp>
+      <p:sp>
+        <p:nvSpPr>
+          <p:cNvPr id="4" name="Text 2"/>
+          <p:cNvSpPr/>
+          <p:nvPr/>
+        </p:nvSpPr>
+        <p:spPr>
+          <a:xfrm>
+            <a:off x="914400" y="1645920"/>
+            <a:ext cx="7620000" cy="1618488"/>
+          </a:xfrm>
+          <a:prstGeom prst="rect">
+            <a:avLst/>
+          </a:prstGeom>
+          <a:noFill/>
+          <a:ln/>
+        </p:spPr>
+        <p:txBody>
+          <a:bodyPr wrap="square" lIns="0" tIns="0" rIns="0" bIns="0" rtlCol="0" anchor="t"/>
+          <a:lstStyle/>
+          <a:p>
+            <a:pPr marL="342900" indent="-342900">
+              <a:lnSpc>
+                <a:spcPts val="2160"/>
+              </a:lnSpc>
+              <a:buSzPct val="100000"/>
+              <a:buChar char="•"/>
+            </a:pPr>
+            <a:endParaRPr lang="en-US" sz="1200" dirty="0"/>
+            <a:r>
+              <a:rPr lang="en-US" sz="1200" b="1" dirty="0">
+                <a:solidFill>
+                  <a:srgbClr val="475569"/>
+                </a:solidFill>
+                <a:latin typeface="Arial" pitchFamily="34" charset="0"/>
+                <a:ea typeface="Arial" pitchFamily="34" charset="-122"/>
+                <a:cs typeface="Arial" pitchFamily="34" charset="-120"/>
+              </a:rPr>
+              <a:t>DummyClassifier: baseline sin usar ninguna señal — el piso de referencia, no un candidato real.</a:t>
+            </a:r>
+          </a:p>
+          <a:p>
+            <a:pPr marL="342900" indent="-342900">
+              <a:lnSpc>
+                <a:spcPts val="2160"/>
+              </a:lnSpc>
+              <a:buSzPct val="100000"/>
+              <a:buChar char="•"/>
+            </a:pPr>
+            <a:endParaRPr lang="en-US" sz="1200" dirty="0"/>
+            <a:r>
+              <a:rPr lang="en-US" sz="1200" b="1" dirty="0">
+                <a:solidFill>
+                  <a:srgbClr val="475569"/>
+                </a:solidFill>
+                <a:latin typeface="Arial" pitchFamily="34" charset="0"/>
+                <a:ea typeface="Arial" pitchFamily="34" charset="-122"/>
+                <a:cs typeface="Arial" pitchFamily="34" charset="-120"/>
+              </a:rPr>
+              <a:t>LogisticRegression: interpretable y auditable (PR-AUC CV=0.047); no captura interacciones no lineales.</a:t>
+            </a:r>
+          </a:p>
+          <a:p>
+            <a:pPr marL="342900" indent="-342900">
+              <a:lnSpc>
+                <a:spcPts val="2160"/>
+              </a:lnSpc>
+              <a:buSzPct val="100000"/>
+              <a:buChar char="•"/>
+            </a:pPr>
+            <a:endParaRPr lang="en-US" sz="1200" dirty="0"/>
+            <a:r>
+              <a:rPr lang="en-US" sz="1200" b="1" dirty="0">
+                <a:solidFill>
+                  <a:srgbClr val="475569"/>
+                </a:solidFill>
+                <a:latin typeface="Arial" pitchFamily="34" charset="0"/>
+                <a:ea typeface="Arial" pitchFamily="34" charset="-122"/>
+                <a:cs typeface="Arial" pitchFamily="34" charset="-120"/>
+              </a:rPr>
+              <a:t>HistGradientBoosting: mayor margen de mejora vía tuning; sin tuning empata con la regresión logística (0.046).</a:t>
+            </a:r>
+          </a:p>
+        </p:txBody>
+      </p:sp>
+      <p:sp>
+        <p:nvSpPr>
+          <p:cNvPr id="5" name="Text 3"/>
+          <p:cNvSpPr/>
+          <p:nvPr/>
+        </p:nvSpPr>
+        <p:spPr>
+          <a:xfrm>
+            <a:off x="609600" y="3493008"/>
+            <a:ext cx="8083296" cy="239911"/>
+          </a:xfrm>
+          <a:prstGeom prst="rect">
+            <a:avLst/>
+          </a:prstGeom>
+          <a:noFill/>
+          <a:ln/>
+        </p:spPr>
+        <p:txBody>
+          <a:bodyPr wrap="square" lIns="0" tIns="0" rIns="0" bIns="0" rtlCol="0" anchor="t"/>
+          <a:lstStyle/>
+          <a:p>
+            <a:pPr marL="0" indent="0">
+              <a:lnSpc>
+                <a:spcPts val="1890"/>
+              </a:lnSpc>
+              <a:buNone/>
+            </a:pPr>
+            <a:r>
+              <a:rPr lang="en-US" sz="1350" dirty="0">
+                <a:solidFill>
+                  <a:srgbClr val="475569"/>
+                </a:solidFill>
+                <a:latin typeface="Arial" pitchFamily="34" charset="0"/>
+                <a:ea typeface="Arial" pitchFamily="34" charset="-122"/>
+                <a:cs typeface="Arial" pitchFamily="34" charset="-120"/>
+              </a:rPr>
+              <a:t>Modelo final y justificación:</a:t>
+            </a:r>
+            <a:endParaRPr lang="en-US" sz="1350" dirty="0"/>
+          </a:p>
+        </p:txBody>
+      </p:sp>
+      <p:sp>
+        <p:nvSpPr>
+          <p:cNvPr id="6" name="Text 4"/>
+          <p:cNvSpPr/>
+          <p:nvPr/>
+        </p:nvSpPr>
+        <p:spPr>
+          <a:xfrm>
+            <a:off x="609600" y="3886200"/>
+            <a:ext cx="8083296" cy="576072"/>
+          </a:xfrm>
+          <a:prstGeom prst="rect">
+            <a:avLst/>
+          </a:prstGeom>
+          <a:noFill/>
+          <a:ln/>
+        </p:spPr>
+        <p:txBody>
+          <a:bodyPr wrap="square" lIns="0" tIns="0" rIns="0" bIns="0" rtlCol="0" anchor="t"/>
+          <a:lstStyle/>
+          <a:p>
+            <a:pPr marL="0" indent="0">
+              <a:lnSpc>
+                <a:spcPts val="1680"/>
+              </a:lnSpc>
+              <a:buNone/>
+            </a:pPr>
+            <a:endParaRPr lang="en-US" sz="1200" dirty="0"/>
+            <a:r>
+              <a:rPr lang="en-US" sz="1200" dirty="0">
+                <a:solidFill>
+                  <a:srgbClr val="475569"/>
+                </a:solidFill>
+                <a:latin typeface="Arial" pitchFamily="34" charset="0"/>
+                <a:ea typeface="Arial" pitchFamily="34" charset="-122"/>
+                <a:cs typeface="Arial" pitchFamily="34" charset="-120"/>
+              </a:rPr>
+              <a:t>Se eligió HistGradientBoostingClassifier optimizado: empató con la regresión logística en la comparación inicial, pero tenía más margen de mejora vía tuning y podía capturar interacciones que un modelo lineal no explota.</a:t>
+            </a:r>
+          </a:p>
+        </p:txBody>
+      </p:sp>
+    </p:spTree>
+  </p:cSld>
+  <p:clrMapOvr>
+    <a:masterClrMapping/>
+  </p:clrMapOvr>
+</p:sld>
+</file>
+
+<file path=ppt/slides/slide12.xml><?xml version="1.0" encoding="utf-8"?>
+<p:sld xmlns:a="http://schemas.openxmlformats.org/drawingml/2006/main" xmlns:r="http://schemas.openxmlformats.org/officeDocument/2006/relationships" xmlns:p="http://schemas.openxmlformats.org/presentationml/2006/main">
   <p:cSld name="Slide 10">
     <p:spTree>
       <p:nvGrpSpPr>
@@ -3318,7 +3828,7 @@
 </p:sld>
 </file>
 
-<file path=ppt/slides/slide11.xml><?xml version="1.0" encoding="utf-8"?>
+<file path=ppt/slides/slide13.xml><?xml version="1.0" encoding="utf-8"?>
 <p:sld xmlns:a="http://schemas.openxmlformats.org/drawingml/2006/main" xmlns:r="http://schemas.openxmlformats.org/officeDocument/2006/relationships" xmlns:p="http://schemas.openxmlformats.org/presentationml/2006/main">
   <p:cSld name="Slide 11">
     <p:spTree>
@@ -3625,6 +4135,51 @@
           </a:p>
         </p:txBody>
       </p:sp>
+      <p:sp>
+        <p:nvSpPr>
+          <p:cNvPr id="9" name="TextBox 8"/>
+          <p:cNvSpPr txBox="1"/>
+          <p:nvPr/>
+        </p:nvSpPr>
+        <p:spPr>
+          <a:xfrm>
+            <a:off x="609600" y="4233088"/>
+            <a:ext cx="8083296" cy="860412"/>
+          </a:xfrm>
+          <a:prstGeom prst="rect">
+            <a:avLst/>
+          </a:prstGeom>
+          <a:noFill/>
+        </p:spPr>
+        <p:txBody>
+          <a:bodyPr wrap="square">
+            <a:spAutoFit/>
+          </a:bodyPr>
+          <a:lstStyle/>
+          <a:p>
+            <a:r>
+              <a:rPr sz="1200" b="0">
+                <a:solidFill>
+                  <a:srgbClr val="475569"/>
+                </a:solidFill>
+                <a:latin typeface="Arial"/>
+              </a:rPr>
+              <a:t>¿ROC-AUC 0.63? El modelo ordena mejor que una moneda: en el 63% de los pares (un cliente que sí recompró vs. uno que no), le da mayor score al que sí volvió a comprar (0.50 = azar).</a:t>
+            </a:r>
+          </a:p>
+          <a:p>
+            <a:r>
+              <a:rPr sz="1200" b="0">
+                <a:solidFill>
+                  <a:srgbClr val="475569"/>
+                </a:solidFill>
+                <a:latin typeface="Arial"/>
+              </a:rPr>
+              <a:t>¿Brier score 0.0317? Probabilidades razonablemente calibradas, pero un valor bajo es esperable con solo ~3.3% de recompra — se lee junto al PR-AUC y el lift, no de forma aislada.</a:t>
+            </a:r>
+          </a:p>
+        </p:txBody>
+      </p:sp>
     </p:spTree>
   </p:cSld>
   <p:clrMapOvr>
@@ -3633,7 +4188,1126 @@
 </p:sld>
 </file>
 
-<file path=ppt/slides/slide12.xml><?xml version="1.0" encoding="utf-8"?>
+<file path=ppt/slides/slide14.xml><?xml version="1.0" encoding="utf-8"?>
+<p:sld xmlns:a="http://schemas.openxmlformats.org/drawingml/2006/main" xmlns:r="http://schemas.openxmlformats.org/officeDocument/2006/relationships" xmlns:p="http://schemas.openxmlformats.org/presentationml/2006/main">
+  <p:cSld name="Slide 4">
+    <p:spTree>
+      <p:nvGrpSpPr>
+        <p:cNvPr id="1" name=""/>
+        <p:cNvGrpSpPr/>
+        <p:nvPr/>
+      </p:nvGrpSpPr>
+      <p:grpSpPr>
+        <a:xfrm>
+          <a:off x="0" y="0"/>
+          <a:ext cx="0" cy="0"/>
+          <a:chOff x="0" y="0"/>
+          <a:chExt cx="0" cy="0"/>
+        </a:xfrm>
+      </p:grpSpPr>
+      <p:sp>
+        <p:nvSpPr>
+          <p:cNvPr id="2" name="Text 0"/>
+          <p:cNvSpPr/>
+          <p:nvPr/>
+        </p:nvSpPr>
+        <p:spPr>
+          <a:xfrm>
+            <a:off x="609600" y="1249561"/>
+            <a:ext cx="7924800" cy="1249561"/>
+          </a:xfrm>
+          <a:prstGeom prst="rect">
+            <a:avLst/>
+          </a:prstGeom>
+          <a:solidFill>
+            <a:srgbClr val="F1F5F9"/>
+          </a:solidFill>
+          <a:ln/>
+          <a:effectLst>
+            <a:outerShdw blurRad="152400" dist="76200" dir="5400000" algn="bl" rotWithShape="0">
+              <a:srgbClr val="000000">
+                <a:alpha val="8000"/>
+              </a:srgbClr>
+            </a:outerShdw>
+          </a:effectLst>
+        </p:spPr>
+        <p:txBody>
+          <a:bodyPr wrap="none" lIns="0" tIns="0" rIns="0" bIns="0" rtlCol="0" anchor="ctr">
+            <a:normAutofit/>
+          </a:bodyPr>
+          <a:lstStyle/>
+          <a:p>
+            <a:pPr marL="0" indent="0">
+              <a:buNone/>
+            </a:pPr>
+            <a:endParaRPr lang="en-US" dirty="0"/>
+          </a:p>
+        </p:txBody>
+      </p:sp>
+      <p:sp>
+        <p:nvSpPr>
+          <p:cNvPr id="3" name="Text 1"/>
+          <p:cNvSpPr/>
+          <p:nvPr/>
+        </p:nvSpPr>
+        <p:spPr>
+          <a:xfrm>
+            <a:off x="609600" y="3284339"/>
+            <a:ext cx="7924800" cy="1249561"/>
+          </a:xfrm>
+          <a:prstGeom prst="rect">
+            <a:avLst/>
+          </a:prstGeom>
+          <a:solidFill>
+            <a:srgbClr val="F1F5F9"/>
+          </a:solidFill>
+          <a:ln/>
+          <a:effectLst>
+            <a:outerShdw blurRad="152400" dist="76200" dir="5400000" algn="bl" rotWithShape="0">
+              <a:srgbClr val="000000">
+                <a:alpha val="8000"/>
+              </a:srgbClr>
+            </a:outerShdw>
+          </a:effectLst>
+        </p:spPr>
+        <p:txBody>
+          <a:bodyPr wrap="none" lIns="0" tIns="0" rIns="0" bIns="0" rtlCol="0" anchor="ctr">
+            <a:normAutofit/>
+          </a:bodyPr>
+          <a:lstStyle/>
+          <a:p>
+            <a:pPr marL="0" indent="0">
+              <a:buNone/>
+            </a:pPr>
+            <a:endParaRPr lang="en-US" dirty="0"/>
+          </a:p>
+        </p:txBody>
+      </p:sp>
+      <p:sp>
+        <p:nvSpPr>
+          <p:cNvPr id="4" name="Text 2"/>
+          <p:cNvSpPr/>
+          <p:nvPr/>
+        </p:nvSpPr>
+        <p:spPr>
+          <a:xfrm>
+            <a:off x="609600" y="609600"/>
+            <a:ext cx="8083296" cy="411361"/>
+          </a:xfrm>
+          <a:prstGeom prst="rect">
+            <a:avLst/>
+          </a:prstGeom>
+          <a:noFill/>
+          <a:ln/>
+        </p:spPr>
+        <p:txBody>
+          <a:bodyPr wrap="square" lIns="0" tIns="0" rIns="0" bIns="0" rtlCol="0" anchor="t"/>
+          <a:lstStyle/>
+          <a:p>
+            <a:pPr>
+              <a:lnSpc>
+                <a:spcPts val="3240"/>
+              </a:lnSpc>
+            </a:pPr>
+            <a:r>
+              <a:rPr lang="en-US" sz="3600" b="1" dirty="0">
+                <a:solidFill>
+                  <a:srgbClr val="EC6A16"/>
+                </a:solidFill>
+                <a:latin typeface="Calibri"/>
+                <a:ea typeface="Calibri"/>
+                <a:cs typeface="Calibri"/>
+              </a:rPr>
+              <a:t>Resultados: Impacto de Negocio</a:t>
+            </a:r>
+          </a:p>
+        </p:txBody>
+      </p:sp>
+      <p:sp>
+        <p:nvSpPr>
+          <p:cNvPr id="5" name="Text 3"/>
+          <p:cNvSpPr/>
+          <p:nvPr/>
+        </p:nvSpPr>
+        <p:spPr>
+          <a:xfrm>
+            <a:off x="914400" y="1554361"/>
+            <a:ext cx="7461504" cy="274290"/>
+          </a:xfrm>
+          <a:prstGeom prst="rect">
+            <a:avLst/>
+          </a:prstGeom>
+          <a:noFill/>
+          <a:ln/>
+        </p:spPr>
+        <p:txBody>
+          <a:bodyPr wrap="square" lIns="0" tIns="0" rIns="0" bIns="0" rtlCol="0" anchor="t"/>
+          <a:lstStyle/>
+          <a:p>
+            <a:pPr marL="0" indent="0">
+              <a:lnSpc>
+                <a:spcPts val="2160"/>
+              </a:lnSpc>
+              <a:buNone/>
+            </a:pPr>
+            <a:endParaRPr lang="en-US" sz="1800" dirty="0"/>
+            <a:r>
+              <a:rPr lang="en-US" sz="1800" b="1" dirty="0">
+                <a:solidFill>
+                  <a:srgbClr val="0284C7"/>
+                </a:solidFill>
+                <a:latin typeface="Arial" pitchFamily="34" charset="0"/>
+                <a:ea typeface="Arial" pitchFamily="34" charset="-122"/>
+                <a:cs typeface="Arial" pitchFamily="34" charset="-120"/>
+              </a:rPr>
+              <a:t>El score como herramienta de priorización</a:t>
+            </a:r>
+          </a:p>
+        </p:txBody>
+      </p:sp>
+      <p:sp>
+        <p:nvSpPr>
+          <p:cNvPr id="6" name="Text 4"/>
+          <p:cNvSpPr/>
+          <p:nvPr/>
+        </p:nvSpPr>
+        <p:spPr>
+          <a:xfrm>
+            <a:off x="914400" y="1981051"/>
+            <a:ext cx="7461504" cy="213271"/>
+          </a:xfrm>
+          <a:prstGeom prst="rect">
+            <a:avLst/>
+          </a:prstGeom>
+          <a:noFill/>
+          <a:ln/>
+        </p:spPr>
+        <p:txBody>
+          <a:bodyPr wrap="square" lIns="0" tIns="0" rIns="0" bIns="0" rtlCol="0" anchor="t"/>
+          <a:lstStyle/>
+          <a:p>
+            <a:pPr marL="0" indent="0">
+              <a:lnSpc>
+                <a:spcPts val="1680"/>
+              </a:lnSpc>
+              <a:buNone/>
+            </a:pPr>
+            <a:endParaRPr lang="en-US" sz="1200" dirty="0"/>
+            <a:r>
+              <a:rPr lang="en-US" sz="1200" dirty="0">
+                <a:solidFill>
+                  <a:srgbClr val="475569"/>
+                </a:solidFill>
+                <a:latin typeface="Arial" pitchFamily="34" charset="0"/>
+                <a:ea typeface="Arial" pitchFamily="34" charset="-122"/>
+                <a:cs typeface="Arial" pitchFamily="34" charset="-120"/>
+              </a:rPr>
+              <a:t>En vez de contactar a todos los clientes por igual, marketing puede ordenar la base por score de recompra y enfocar el presupuesto en el extremo superior.</a:t>
+            </a:r>
+          </a:p>
+        </p:txBody>
+      </p:sp>
+      <p:sp>
+        <p:nvSpPr>
+          <p:cNvPr id="7" name="Text 5"/>
+          <p:cNvSpPr/>
+          <p:nvPr/>
+        </p:nvSpPr>
+        <p:spPr>
+          <a:xfrm>
+            <a:off x="914400" y="3589139"/>
+            <a:ext cx="7461504" cy="274290"/>
+          </a:xfrm>
+          <a:prstGeom prst="rect">
+            <a:avLst/>
+          </a:prstGeom>
+          <a:noFill/>
+          <a:ln/>
+        </p:spPr>
+        <p:txBody>
+          <a:bodyPr wrap="square" lIns="0" tIns="0" rIns="0" bIns="0" rtlCol="0" anchor="t"/>
+          <a:lstStyle/>
+          <a:p>
+            <a:pPr marL="0" indent="0">
+              <a:lnSpc>
+                <a:spcPts val="2160"/>
+              </a:lnSpc>
+              <a:buNone/>
+            </a:pPr>
+            <a:endParaRPr lang="en-US" sz="1800" dirty="0"/>
+            <a:r>
+              <a:rPr lang="en-US" sz="1800" b="1" dirty="0">
+                <a:solidFill>
+                  <a:srgbClr val="0284C7"/>
+                </a:solidFill>
+                <a:latin typeface="Arial" pitchFamily="34" charset="0"/>
+                <a:ea typeface="Arial" pitchFamily="34" charset="-122"/>
+                <a:cs typeface="Arial" pitchFamily="34" charset="-120"/>
+              </a:rPr>
+              <a:t>Lift de 2.27x en el decil superior</a:t>
+            </a:r>
+          </a:p>
+        </p:txBody>
+      </p:sp>
+      <p:sp>
+        <p:nvSpPr>
+          <p:cNvPr id="8" name="Text 6"/>
+          <p:cNvSpPr/>
+          <p:nvPr/>
+        </p:nvSpPr>
+        <p:spPr>
+          <a:xfrm>
+            <a:off x="914400" y="4015829"/>
+            <a:ext cx="7461504" cy="213271"/>
+          </a:xfrm>
+          <a:prstGeom prst="rect">
+            <a:avLst/>
+          </a:prstGeom>
+          <a:noFill/>
+          <a:ln/>
+        </p:spPr>
+        <p:txBody>
+          <a:bodyPr wrap="square" lIns="0" tIns="0" rIns="0" bIns="0" rtlCol="0" anchor="t"/>
+          <a:lstStyle/>
+          <a:p>
+            <a:pPr marL="0" indent="0">
+              <a:lnSpc>
+                <a:spcPts val="1680"/>
+              </a:lnSpc>
+              <a:buNone/>
+            </a:pPr>
+            <a:endParaRPr lang="en-US" sz="1200" dirty="0"/>
+            <a:r>
+              <a:rPr lang="en-US" sz="1200" dirty="0">
+                <a:solidFill>
+                  <a:srgbClr val="475569"/>
+                </a:solidFill>
+                <a:latin typeface="Arial" pitchFamily="34" charset="0"/>
+                <a:ea typeface="Arial" pitchFamily="34" charset="-122"/>
+                <a:cs typeface="Arial" pitchFamily="34" charset="-120"/>
+              </a:rPr>
+              <a:t>El 10% de clientes con mayor score recompra a una tasa 2.27 veces mayor que un contacto aleatorio — con el mismo presupuesto, se llega a más clientes que sí vuelven a comprar.</a:t>
+            </a:r>
+          </a:p>
+        </p:txBody>
+      </p:sp>
+    </p:spTree>
+  </p:cSld>
+  <p:clrMapOvr>
+    <a:masterClrMapping/>
+  </p:clrMapOvr>
+</p:sld>
+</file>
+
+<file path=ppt/slides/slide15.xml><?xml version="1.0" encoding="utf-8"?>
+<p:sld xmlns:a="http://schemas.openxmlformats.org/drawingml/2006/main" xmlns:r="http://schemas.openxmlformats.org/officeDocument/2006/relationships" xmlns:p="http://schemas.openxmlformats.org/presentationml/2006/main">
+  <p:cSld name="Slide 10">
+    <p:spTree>
+      <p:nvGrpSpPr>
+        <p:cNvPr id="1" name=""/>
+        <p:cNvGrpSpPr/>
+        <p:nvPr/>
+      </p:nvGrpSpPr>
+      <p:grpSpPr>
+        <a:xfrm>
+          <a:off x="0" y="0"/>
+          <a:ext cx="0" cy="0"/>
+          <a:chOff x="0" y="0"/>
+          <a:chExt cx="0" cy="0"/>
+        </a:xfrm>
+      </p:grpSpPr>
+      <p:sp>
+        <p:nvSpPr>
+          <p:cNvPr id="2" name="Text 0"/>
+          <p:cNvSpPr/>
+          <p:nvPr/>
+        </p:nvSpPr>
+        <p:spPr>
+          <a:xfrm>
+            <a:off x="609600" y="609600"/>
+            <a:ext cx="8083296" cy="411361"/>
+          </a:xfrm>
+          <a:prstGeom prst="rect">
+            <a:avLst/>
+          </a:prstGeom>
+          <a:noFill/>
+          <a:ln/>
+        </p:spPr>
+        <p:txBody>
+          <a:bodyPr wrap="square" lIns="0" tIns="0" rIns="0" bIns="0" rtlCol="0" anchor="t"/>
+          <a:lstStyle/>
+          <a:p>
+            <a:pPr>
+              <a:lnSpc>
+                <a:spcPts val="3240"/>
+              </a:lnSpc>
+            </a:pPr>
+            <a:r>
+              <a:rPr lang="en-US" sz="3600" b="1" dirty="0">
+                <a:solidFill>
+                  <a:srgbClr val="EC6A16"/>
+                </a:solidFill>
+                <a:latin typeface="Calibri"/>
+                <a:ea typeface="Calibri"/>
+                <a:cs typeface="Calibri"/>
+              </a:rPr>
+              <a:t>Resultados: Qué Aprendió el Modelo</a:t>
+            </a:r>
+          </a:p>
+        </p:txBody>
+      </p:sp>
+      <p:sp>
+        <p:nvSpPr>
+          <p:cNvPr id="3" name="Text 1"/>
+          <p:cNvSpPr/>
+          <p:nvPr/>
+        </p:nvSpPr>
+        <p:spPr>
+          <a:xfrm>
+            <a:off x="914400" y="1252728"/>
+            <a:ext cx="7620000" cy="2880360"/>
+          </a:xfrm>
+          <a:prstGeom prst="rect">
+            <a:avLst/>
+          </a:prstGeom>
+          <a:noFill/>
+          <a:ln/>
+        </p:spPr>
+        <p:txBody>
+          <a:bodyPr wrap="square" lIns="0" tIns="0" rIns="0" bIns="0" rtlCol="0" anchor="t"/>
+          <a:lstStyle/>
+          <a:p>
+            <a:pPr marL="342900" indent="-342900">
+              <a:lnSpc>
+                <a:spcPts val="2160"/>
+              </a:lnSpc>
+              <a:buSzPct val="100000"/>
+              <a:buChar char="•"/>
+            </a:pPr>
+            <a:endParaRPr lang="en-US" sz="1200" dirty="0"/>
+            <a:r>
+              <a:rPr lang="en-US" sz="1200" b="1" dirty="0">
+                <a:solidFill>
+                  <a:srgbClr val="475569"/>
+                </a:solidFill>
+                <a:latin typeface="Arial" pitchFamily="34" charset="0"/>
+                <a:ea typeface="Arial" pitchFamily="34" charset="-122"/>
+                <a:cs typeface="Arial" pitchFamily="34" charset="-120"/>
+              </a:rPr>
+              <a:t>Valor y forma de pago del pedido (cuotas máximas, precio por ítem, precio total) son las señales más influyentes — más que cualquier otra dimensión.</a:t>
+            </a:r>
+          </a:p>
+          <a:p>
+            <a:pPr marL="342900" indent="-342900">
+              <a:lnSpc>
+                <a:spcPts val="2160"/>
+              </a:lnSpc>
+              <a:buSzPct val="100000"/>
+              <a:buChar char="•"/>
+            </a:pPr>
+            <a:endParaRPr lang="en-US" sz="1200" dirty="0"/>
+            <a:r>
+              <a:rPr lang="en-US" sz="1200" b="1" dirty="0">
+                <a:solidFill>
+                  <a:srgbClr val="475569"/>
+                </a:solidFill>
+                <a:latin typeface="Arial" pitchFamily="34" charset="0"/>
+                <a:ea typeface="Arial" pitchFamily="34" charset="-122"/>
+                <a:cs typeface="Arial" pitchFamily="34" charset="-120"/>
+              </a:rPr>
+              <a:t>Le siguen flete y tiempos de entrega/aprobación: la experiencia logística del primer pedido sí deja huella en la probabilidad de recompra.</a:t>
+            </a:r>
+          </a:p>
+          <a:p>
+            <a:pPr marL="342900" indent="-342900">
+              <a:lnSpc>
+                <a:spcPts val="2160"/>
+              </a:lnSpc>
+              <a:buSzPct val="100000"/>
+              <a:buChar char="•"/>
+            </a:pPr>
+            <a:endParaRPr lang="en-US" sz="1200" dirty="0"/>
+            <a:r>
+              <a:rPr lang="en-US" sz="1200" b="1" dirty="0">
+                <a:solidFill>
+                  <a:srgbClr val="475569"/>
+                </a:solidFill>
+                <a:latin typeface="Arial" pitchFamily="34" charset="0"/>
+                <a:ea typeface="Arial" pitchFamily="34" charset="-122"/>
+                <a:cs typeface="Arial" pitchFamily="34" charset="-120"/>
+              </a:rPr>
+              <a:t>Algunas categorías de producto (deportes/ocio, muebles/decoración) aportan señal adicional, aunque menor.</a:t>
+            </a:r>
+          </a:p>
+          <a:p>
+            <a:pPr marL="342900" indent="-342900">
+              <a:lnSpc>
+                <a:spcPts val="2160"/>
+              </a:lnSpc>
+              <a:buSzPct val="100000"/>
+              <a:buChar char="•"/>
+            </a:pPr>
+            <a:endParaRPr lang="en-US" sz="1200" dirty="0"/>
+            <a:r>
+              <a:rPr lang="en-US" sz="1200" b="1" dirty="0">
+                <a:solidFill>
+                  <a:srgbClr val="475569"/>
+                </a:solidFill>
+                <a:latin typeface="Arial" pitchFamily="34" charset="0"/>
+                <a:ea typeface="Arial" pitchFamily="34" charset="-122"/>
+                <a:cs typeface="Arial" pitchFamily="34" charset="-120"/>
+              </a:rPr>
+              <a:t>Ni review_score ni customer_state figuran entre las 15 variables más influyentes — consistente con el EDA: ni la satisfacción declarada ni la geografía son drivers individuales fuertes.</a:t>
+            </a:r>
+          </a:p>
+          <a:p>
+            <a:pPr marL="342900" indent="-342900">
+              <a:lnSpc>
+                <a:spcPts val="2160"/>
+              </a:lnSpc>
+              <a:buSzPct val="100000"/>
+              <a:buChar char="•"/>
+            </a:pPr>
+            <a:endParaRPr lang="en-US" sz="1200" dirty="0"/>
+            <a:r>
+              <a:rPr lang="en-US" sz="1200" b="1" dirty="0">
+                <a:solidFill>
+                  <a:srgbClr val="475569"/>
+                </a:solidFill>
+                <a:latin typeface="Arial" pitchFamily="34" charset="0"/>
+                <a:ea typeface="Arial" pitchFamily="34" charset="-122"/>
+                <a:cs typeface="Arial" pitchFamily="34" charset="-120"/>
+              </a:rPr>
+              <a:t>El modelo aprende de un conjunto amplio de señales débiles combinadas, no de una variable dominante — igual que mostró el EDA.</a:t>
+            </a:r>
+          </a:p>
+        </p:txBody>
+      </p:sp>
+    </p:spTree>
+  </p:cSld>
+  <p:clrMapOvr>
+    <a:masterClrMapping/>
+  </p:clrMapOvr>
+</p:sld>
+</file>
+
+<file path=ppt/slides/slide16.xml><?xml version="1.0" encoding="utf-8"?>
+<p:sld xmlns:a="http://schemas.openxmlformats.org/drawingml/2006/main" xmlns:r="http://schemas.openxmlformats.org/officeDocument/2006/relationships" xmlns:p="http://schemas.openxmlformats.org/presentationml/2006/main">
+  <p:cSld name="Slide 3">
+    <p:spTree>
+      <p:nvGrpSpPr>
+        <p:cNvPr id="1" name=""/>
+        <p:cNvGrpSpPr/>
+        <p:nvPr/>
+      </p:nvGrpSpPr>
+      <p:grpSpPr>
+        <a:xfrm>
+          <a:off x="0" y="0"/>
+          <a:ext cx="0" cy="0"/>
+          <a:chOff x="0" y="0"/>
+          <a:chExt cx="0" cy="0"/>
+        </a:xfrm>
+      </p:grpSpPr>
+      <p:sp>
+        <p:nvSpPr>
+          <p:cNvPr id="2" name="Text 0"/>
+          <p:cNvSpPr/>
+          <p:nvPr/>
+        </p:nvSpPr>
+        <p:spPr>
+          <a:xfrm>
+            <a:off x="609600" y="609600"/>
+            <a:ext cx="8083296" cy="411361"/>
+          </a:xfrm>
+          <a:prstGeom prst="rect">
+            <a:avLst/>
+          </a:prstGeom>
+          <a:noFill/>
+          <a:ln/>
+        </p:spPr>
+        <p:txBody>
+          <a:bodyPr wrap="square" lIns="0" tIns="0" rIns="0" bIns="0" rtlCol="0" anchor="t"/>
+          <a:lstStyle/>
+          <a:p>
+            <a:pPr marL="0" indent="0">
+              <a:lnSpc>
+                <a:spcPts val="3240"/>
+              </a:lnSpc>
+              <a:buNone/>
+            </a:pPr>
+            <a:r>
+              <a:rPr lang="en-US" sz="3600" b="1" dirty="0">
+                <a:solidFill>
+                  <a:srgbClr val="EC6A16"/>
+                </a:solidFill>
+                <a:latin typeface="Calibri"/>
+                <a:ea typeface="Calibri"/>
+                <a:cs typeface="Calibri"/>
+              </a:rPr>
+              <a:t>Resultados: Límites y Casos Atípicos</a:t>
+            </a:r>
+          </a:p>
+        </p:txBody>
+      </p:sp>
+      <p:sp>
+        <p:nvSpPr>
+          <p:cNvPr id="3" name="Text 1"/>
+          <p:cNvSpPr/>
+          <p:nvPr/>
+        </p:nvSpPr>
+        <p:spPr>
+          <a:xfrm>
+            <a:off x="609600" y="1252728"/>
+            <a:ext cx="8083296" cy="239911"/>
+          </a:xfrm>
+          <a:prstGeom prst="rect">
+            <a:avLst/>
+          </a:prstGeom>
+          <a:noFill/>
+          <a:ln/>
+        </p:spPr>
+        <p:txBody>
+          <a:bodyPr wrap="square" lIns="0" tIns="0" rIns="0" bIns="0" rtlCol="0" anchor="t"/>
+          <a:lstStyle/>
+          <a:p>
+            <a:pPr marL="0" indent="0">
+              <a:lnSpc>
+                <a:spcPts val="1890"/>
+              </a:lnSpc>
+              <a:buNone/>
+            </a:pPr>
+            <a:endParaRPr lang="en-US" sz="1350" dirty="0"/>
+            <a:r>
+              <a:rPr lang="en-US" sz="1350" dirty="0">
+                <a:solidFill>
+                  <a:srgbClr val="475569"/>
+                </a:solidFill>
+                <a:latin typeface="Arial" pitchFamily="34" charset="0"/>
+                <a:ea typeface="Arial" pitchFamily="34" charset="-122"/>
+                <a:cs typeface="Arial" pitchFamily="34" charset="-120"/>
+              </a:rPr>
+              <a:t>Errores típicos:</a:t>
+            </a:r>
+          </a:p>
+        </p:txBody>
+      </p:sp>
+      <p:sp>
+        <p:nvSpPr>
+          <p:cNvPr id="4" name="Text 2"/>
+          <p:cNvSpPr/>
+          <p:nvPr/>
+        </p:nvSpPr>
+        <p:spPr>
+          <a:xfrm>
+            <a:off x="609600" y="1645920"/>
+            <a:ext cx="8083296" cy="393192"/>
+          </a:xfrm>
+          <a:prstGeom prst="rect">
+            <a:avLst/>
+          </a:prstGeom>
+          <a:noFill/>
+          <a:ln/>
+        </p:spPr>
+        <p:txBody>
+          <a:bodyPr wrap="square" lIns="0" tIns="0" rIns="0" bIns="0" rtlCol="0" anchor="t"/>
+          <a:lstStyle/>
+          <a:p>
+            <a:pPr marL="0" indent="0">
+              <a:lnSpc>
+                <a:spcPts val="1680"/>
+              </a:lnSpc>
+              <a:buNone/>
+            </a:pPr>
+            <a:endParaRPr lang="en-US" sz="1200" dirty="0"/>
+            <a:r>
+              <a:rPr lang="en-US" sz="1200" dirty="0">
+                <a:solidFill>
+                  <a:srgbClr val="475569"/>
+                </a:solidFill>
+                <a:latin typeface="Arial" pitchFamily="34" charset="0"/>
+                <a:ea typeface="Arial" pitchFamily="34" charset="-122"/>
+                <a:cs typeface="Arial" pitchFamily="34" charset="-120"/>
+              </a:rPr>
+              <a:t>El modelo pierde precisión en pedidos atípicos: muy pocos ítems, categoría poco frecuente o combinaciones de pago inusuales — casos con poca base histórica similar.</a:t>
+            </a:r>
+          </a:p>
+        </p:txBody>
+      </p:sp>
+      <p:sp>
+        <p:nvSpPr>
+          <p:cNvPr id="5" name="Text 3"/>
+          <p:cNvSpPr/>
+          <p:nvPr/>
+        </p:nvSpPr>
+        <p:spPr>
+          <a:xfrm>
+            <a:off x="609600" y="2267712"/>
+            <a:ext cx="8083296" cy="239911"/>
+          </a:xfrm>
+          <a:prstGeom prst="rect">
+            <a:avLst/>
+          </a:prstGeom>
+          <a:noFill/>
+          <a:ln/>
+        </p:spPr>
+        <p:txBody>
+          <a:bodyPr wrap="square" lIns="0" tIns="0" rIns="0" bIns="0" rtlCol="0" anchor="t"/>
+          <a:lstStyle/>
+          <a:p>
+            <a:pPr marL="0" indent="0">
+              <a:lnSpc>
+                <a:spcPts val="1890"/>
+              </a:lnSpc>
+              <a:buNone/>
+            </a:pPr>
+            <a:endParaRPr lang="en-US" sz="1350" dirty="0"/>
+            <a:r>
+              <a:rPr lang="en-US" sz="1350" dirty="0">
+                <a:solidFill>
+                  <a:srgbClr val="475569"/>
+                </a:solidFill>
+                <a:latin typeface="Arial" pitchFamily="34" charset="0"/>
+                <a:ea typeface="Arial" pitchFamily="34" charset="-122"/>
+                <a:cs typeface="Arial" pitchFamily="34" charset="-120"/>
+              </a:rPr>
+              <a:t>Desempeño por subgrupo:</a:t>
+            </a:r>
+          </a:p>
+        </p:txBody>
+      </p:sp>
+      <p:sp>
+        <p:nvSpPr>
+          <p:cNvPr id="6" name="Text 4"/>
+          <p:cNvSpPr/>
+          <p:nvPr/>
+        </p:nvSpPr>
+        <p:spPr>
+          <a:xfrm>
+            <a:off x="609600" y="2660904"/>
+            <a:ext cx="8083296" cy="393192"/>
+          </a:xfrm>
+          <a:prstGeom prst="rect">
+            <a:avLst/>
+          </a:prstGeom>
+          <a:noFill/>
+          <a:ln/>
+        </p:spPr>
+        <p:txBody>
+          <a:bodyPr wrap="square" lIns="0" tIns="0" rIns="0" bIns="0" rtlCol="0" anchor="t"/>
+          <a:lstStyle/>
+          <a:p>
+            <a:pPr marL="0" indent="0">
+              <a:lnSpc>
+                <a:spcPts val="1680"/>
+              </a:lnSpc>
+              <a:buNone/>
+            </a:pPr>
+            <a:endParaRPr lang="en-US" sz="1200" dirty="0"/>
+            <a:r>
+              <a:rPr lang="en-US" sz="1200" dirty="0">
+                <a:solidFill>
+                  <a:srgbClr val="475569"/>
+                </a:solidFill>
+                <a:latin typeface="Arial" pitchFamily="34" charset="0"/>
+                <a:ea typeface="Arial" pitchFamily="34" charset="-122"/>
+                <a:cs typeface="Arial" pitchFamily="34" charset="-120"/>
+              </a:rPr>
+              <a:t>Sin degradación sistemática por categoría o customer_state, pero el volumen por subgrupo es limitado — estas estimaciones son orientativas, no concluyentes.</a:t>
+            </a:r>
+          </a:p>
+        </p:txBody>
+      </p:sp>
+      <p:sp>
+        <p:nvSpPr>
+          <p:cNvPr id="7" name="Text 5"/>
+          <p:cNvSpPr/>
+          <p:nvPr/>
+        </p:nvSpPr>
+        <p:spPr>
+          <a:xfrm>
+            <a:off x="609600" y="3282696"/>
+            <a:ext cx="8083296" cy="239911"/>
+          </a:xfrm>
+          <a:prstGeom prst="rect">
+            <a:avLst/>
+          </a:prstGeom>
+          <a:noFill/>
+          <a:ln/>
+        </p:spPr>
+        <p:txBody>
+          <a:bodyPr wrap="square" lIns="0" tIns="0" rIns="0" bIns="0" rtlCol="0" anchor="t"/>
+          <a:lstStyle/>
+          <a:p>
+            <a:pPr marL="0" indent="0">
+              <a:lnSpc>
+                <a:spcPts val="1890"/>
+              </a:lnSpc>
+              <a:buNone/>
+            </a:pPr>
+            <a:endParaRPr lang="en-US" sz="1350" dirty="0"/>
+            <a:r>
+              <a:rPr lang="en-US" sz="1350" dirty="0">
+                <a:solidFill>
+                  <a:srgbClr val="475569"/>
+                </a:solidFill>
+                <a:latin typeface="Arial" pitchFamily="34" charset="0"/>
+                <a:ea typeface="Arial" pitchFamily="34" charset="-122"/>
+                <a:cs typeface="Arial" pitchFamily="34" charset="-120"/>
+              </a:rPr>
+              <a:t>Qué NO puede capturar el modelo:</a:t>
+            </a:r>
+          </a:p>
+        </p:txBody>
+      </p:sp>
+      <p:sp>
+        <p:nvSpPr>
+          <p:cNvPr id="8" name="Text 6"/>
+          <p:cNvSpPr/>
+          <p:nvPr/>
+        </p:nvSpPr>
+        <p:spPr>
+          <a:xfrm>
+            <a:off x="609600" y="3675888"/>
+            <a:ext cx="8083296" cy="393192"/>
+          </a:xfrm>
+          <a:prstGeom prst="rect">
+            <a:avLst/>
+          </a:prstGeom>
+          <a:noFill/>
+          <a:ln/>
+        </p:spPr>
+        <p:txBody>
+          <a:bodyPr wrap="square" lIns="0" tIns="0" rIns="0" bIns="0" rtlCol="0" anchor="t"/>
+          <a:lstStyle/>
+          <a:p>
+            <a:pPr marL="0" indent="0">
+              <a:lnSpc>
+                <a:spcPts val="1680"/>
+              </a:lnSpc>
+              <a:buNone/>
+            </a:pPr>
+            <a:endParaRPr lang="en-US" sz="1200" dirty="0"/>
+            <a:r>
+              <a:rPr lang="en-US" sz="1200" dirty="0">
+                <a:solidFill>
+                  <a:srgbClr val="475569"/>
+                </a:solidFill>
+                <a:latin typeface="Arial" pitchFamily="34" charset="0"/>
+                <a:ea typeface="Arial" pitchFamily="34" charset="-122"/>
+                <a:cs typeface="Arial" pitchFamily="34" charset="-120"/>
+              </a:rPr>
+              <a:t>Factores fuera del dataset —competencia, necesidad real del producto, campañas externas— probablemente explican buena parte de lo que el modelo no captura.</a:t>
+            </a:r>
+          </a:p>
+        </p:txBody>
+      </p:sp>
+    </p:spTree>
+  </p:cSld>
+  <p:clrMapOvr>
+    <a:masterClrMapping/>
+  </p:clrMapOvr>
+</p:sld>
+</file>
+
+<file path=ppt/slides/slide17.xml><?xml version="1.0" encoding="utf-8"?>
+<p:sld xmlns:a="http://schemas.openxmlformats.org/drawingml/2006/main" xmlns:r="http://schemas.openxmlformats.org/officeDocument/2006/relationships" xmlns:p="http://schemas.openxmlformats.org/presentationml/2006/main">
+  <p:cSld name="Slide 9">
+    <p:spTree>
+      <p:nvGrpSpPr>
+        <p:cNvPr id="1" name=""/>
+        <p:cNvGrpSpPr/>
+        <p:nvPr/>
+      </p:nvGrpSpPr>
+      <p:grpSpPr>
+        <a:xfrm>
+          <a:off x="0" y="0"/>
+          <a:ext cx="0" cy="0"/>
+          <a:chOff x="0" y="0"/>
+          <a:chExt cx="0" cy="0"/>
+        </a:xfrm>
+      </p:grpSpPr>
+      <p:sp>
+        <p:nvSpPr>
+          <p:cNvPr id="2" name="Text 0"/>
+          <p:cNvSpPr/>
+          <p:nvPr/>
+        </p:nvSpPr>
+        <p:spPr>
+          <a:xfrm>
+            <a:off x="609600" y="609600"/>
+            <a:ext cx="8083296" cy="411361"/>
+          </a:xfrm>
+          <a:prstGeom prst="rect">
+            <a:avLst/>
+          </a:prstGeom>
+          <a:noFill/>
+          <a:ln/>
+        </p:spPr>
+        <p:txBody>
+          <a:bodyPr wrap="square" lIns="0" tIns="0" rIns="0" bIns="0" rtlCol="0" anchor="t"/>
+          <a:lstStyle/>
+          <a:p>
+            <a:pPr indent="0">
+              <a:lnSpc>
+                <a:spcPts val="3240"/>
+              </a:lnSpc>
+              <a:buNone/>
+            </a:pPr>
+            <a:r>
+              <a:rPr lang="en-US" sz="3600" b="1" dirty="0">
+                <a:solidFill>
+                  <a:srgbClr val="EC6A16"/>
+                </a:solidFill>
+                <a:latin typeface="Calibri"/>
+                <a:ea typeface="Calibri"/>
+                <a:cs typeface="Calibri"/>
+              </a:rPr>
+              <a:t>Segmentación RFM: Hallazgos</a:t>
+            </a:r>
+          </a:p>
+        </p:txBody>
+      </p:sp>
+      <p:sp>
+        <p:nvSpPr>
+          <p:cNvPr id="3" name="Text 1"/>
+          <p:cNvSpPr/>
+          <p:nvPr/>
+        </p:nvSpPr>
+        <p:spPr>
+          <a:xfrm>
+            <a:off x="609600" y="1252728"/>
+            <a:ext cx="8083296" cy="239911"/>
+          </a:xfrm>
+          <a:prstGeom prst="rect">
+            <a:avLst/>
+          </a:prstGeom>
+          <a:noFill/>
+          <a:ln/>
+        </p:spPr>
+        <p:txBody>
+          <a:bodyPr wrap="square" lIns="0" tIns="0" rIns="0" bIns="0" rtlCol="0" anchor="t"/>
+          <a:lstStyle/>
+          <a:p>
+            <a:pPr marL="0" indent="0">
+              <a:lnSpc>
+                <a:spcPts val="1890"/>
+              </a:lnSpc>
+              <a:buNone/>
+            </a:pPr>
+            <a:endParaRPr lang="en-US" sz="1350" dirty="0"/>
+            <a:r>
+              <a:rPr lang="en-US" sz="1350" dirty="0">
+                <a:solidFill>
+                  <a:srgbClr val="475569"/>
+                </a:solidFill>
+                <a:latin typeface="Arial" pitchFamily="34" charset="0"/>
+                <a:ea typeface="Arial" pitchFamily="34" charset="-122"/>
+                <a:cs typeface="Arial" pitchFamily="34" charset="-120"/>
+              </a:rPr>
+              <a:t>Los 4 segmentos (93,358 clientes):</a:t>
+            </a:r>
+          </a:p>
+        </p:txBody>
+      </p:sp>
+      <p:sp>
+        <p:nvSpPr>
+          <p:cNvPr id="4" name="Text 2"/>
+          <p:cNvSpPr/>
+          <p:nvPr/>
+        </p:nvSpPr>
+        <p:spPr>
+          <a:xfrm>
+            <a:off x="914400" y="1645920"/>
+            <a:ext cx="7620000" cy="1609344"/>
+          </a:xfrm>
+          <a:prstGeom prst="rect">
+            <a:avLst/>
+          </a:prstGeom>
+          <a:noFill/>
+          <a:ln/>
+        </p:spPr>
+        <p:txBody>
+          <a:bodyPr wrap="square" lIns="0" tIns="0" rIns="0" bIns="0" rtlCol="0" anchor="t"/>
+          <a:lstStyle/>
+          <a:p>
+            <a:pPr marL="342900" indent="-342900">
+              <a:lnSpc>
+                <a:spcPts val="2160"/>
+              </a:lnSpc>
+              <a:buSzPct val="100000"/>
+              <a:buChar char="•"/>
+            </a:pPr>
+            <a:endParaRPr lang="en-US" sz="1200" dirty="0"/>
+            <a:r>
+              <a:rPr lang="en-US" sz="1200" b="1" dirty="0">
+                <a:solidFill>
+                  <a:srgbClr val="475569"/>
+                </a:solidFill>
+                <a:latin typeface="Arial" pitchFamily="34" charset="0"/>
+                <a:ea typeface="Arial" pitchFamily="34" charset="-122"/>
+                <a:cs typeface="Arial" pitchFamily="34" charset="-120"/>
+              </a:rPr>
+              <a:t>Premium recientes (34.7%): monto promedio más alto ($251) — la base más valiosa hoy.</a:t>
+            </a:r>
+          </a:p>
+          <a:p>
+            <a:pPr marL="342900" indent="-342900">
+              <a:lnSpc>
+                <a:spcPts val="2160"/>
+              </a:lnSpc>
+              <a:buSzPct val="100000"/>
+              <a:buChar char="•"/>
+            </a:pPr>
+            <a:endParaRPr lang="en-US" sz="1200" dirty="0"/>
+            <a:r>
+              <a:rPr lang="en-US" sz="1200" b="1" dirty="0">
+                <a:solidFill>
+                  <a:srgbClr val="475569"/>
+                </a:solidFill>
+                <a:latin typeface="Arial" pitchFamily="34" charset="0"/>
+                <a:ea typeface="Arial" pitchFamily="34" charset="-122"/>
+                <a:cs typeface="Arial" pitchFamily="34" charset="-120"/>
+              </a:rPr>
+              <a:t>Bajo ticket reciente (33.2%): activos pero de bajo monto ($44) — oportunidad de upsell.</a:t>
+            </a:r>
+          </a:p>
+          <a:p>
+            <a:pPr marL="342900" indent="-342900">
+              <a:lnSpc>
+                <a:spcPts val="2160"/>
+              </a:lnSpc>
+              <a:buSzPct val="100000"/>
+              <a:buChar char="•"/>
+            </a:pPr>
+            <a:endParaRPr lang="en-US" sz="1200" dirty="0"/>
+            <a:r>
+              <a:rPr lang="en-US" sz="1200" b="1" dirty="0">
+                <a:solidFill>
+                  <a:srgbClr val="475569"/>
+                </a:solidFill>
+                <a:latin typeface="Arial" pitchFamily="34" charset="0"/>
+                <a:ea typeface="Arial" pitchFamily="34" charset="-122"/>
+                <a:cs typeface="Arial" pitchFamily="34" charset="-120"/>
+              </a:rPr>
+              <a:t>En riesgo/bajo valor (29.1%): recencia ~426 días, el más numeroso en riesgo de churn total.</a:t>
+            </a:r>
+          </a:p>
+          <a:p>
+            <a:pPr marL="342900" indent="-342900">
+              <a:lnSpc>
+                <a:spcPts val="2160"/>
+              </a:lnSpc>
+              <a:buSzPct val="100000"/>
+              <a:buChar char="•"/>
+            </a:pPr>
+            <a:endParaRPr lang="en-US" sz="1200" dirty="0"/>
+            <a:r>
+              <a:rPr lang="en-US" sz="1200" b="1" dirty="0">
+                <a:solidFill>
+                  <a:srgbClr val="475569"/>
+                </a:solidFill>
+                <a:latin typeface="Arial" pitchFamily="34" charset="0"/>
+                <a:ea typeface="Arial" pitchFamily="34" charset="-122"/>
+                <a:cs typeface="Arial" pitchFamily="34" charset="-120"/>
+              </a:rPr>
+              <a:t>Recompradores (3.0%): único con frecuencia &gt;1 — el objetivo de referencia del modelo.</a:t>
+            </a:r>
+          </a:p>
+        </p:txBody>
+      </p:sp>
+      <p:sp>
+        <p:nvSpPr>
+          <p:cNvPr id="5" name="Text 3"/>
+          <p:cNvSpPr/>
+          <p:nvPr/>
+        </p:nvSpPr>
+        <p:spPr>
+          <a:xfrm>
+            <a:off x="609600" y="3483864"/>
+            <a:ext cx="8083296" cy="239911"/>
+          </a:xfrm>
+          <a:prstGeom prst="rect">
+            <a:avLst/>
+          </a:prstGeom>
+          <a:noFill/>
+          <a:ln/>
+        </p:spPr>
+        <p:txBody>
+          <a:bodyPr wrap="square" lIns="0" tIns="0" rIns="0" bIns="0" rtlCol="0" anchor="t"/>
+          <a:lstStyle/>
+          <a:p>
+            <a:pPr marL="0" indent="0">
+              <a:lnSpc>
+                <a:spcPts val="1890"/>
+              </a:lnSpc>
+              <a:buNone/>
+            </a:pPr>
+            <a:endParaRPr lang="en-US" sz="1350" dirty="0"/>
+            <a:r>
+              <a:rPr lang="en-US" sz="1350" dirty="0">
+                <a:solidFill>
+                  <a:srgbClr val="475569"/>
+                </a:solidFill>
+                <a:latin typeface="Arial" pitchFamily="34" charset="0"/>
+                <a:ea typeface="Arial" pitchFamily="34" charset="-122"/>
+                <a:cs typeface="Arial" pitchFamily="34" charset="-120"/>
+              </a:rPr>
+              <a:t>Prioridad de negocio:</a:t>
+            </a:r>
+          </a:p>
+        </p:txBody>
+      </p:sp>
+      <p:sp>
+        <p:nvSpPr>
+          <p:cNvPr id="6" name="Text 4"/>
+          <p:cNvSpPr/>
+          <p:nvPr/>
+        </p:nvSpPr>
+        <p:spPr>
+          <a:xfrm>
+            <a:off x="609600" y="3877056"/>
+            <a:ext cx="8083296" cy="393192"/>
+          </a:xfrm>
+          <a:prstGeom prst="rect">
+            <a:avLst/>
+          </a:prstGeom>
+          <a:noFill/>
+          <a:ln/>
+        </p:spPr>
+        <p:txBody>
+          <a:bodyPr wrap="square" lIns="0" tIns="0" rIns="0" bIns="0" rtlCol="0" anchor="t"/>
+          <a:lstStyle/>
+          <a:p>
+            <a:pPr marL="0" indent="0">
+              <a:lnSpc>
+                <a:spcPts val="1680"/>
+              </a:lnSpc>
+              <a:buNone/>
+            </a:pPr>
+            <a:endParaRPr lang="en-US" sz="1200" dirty="0"/>
+            <a:r>
+              <a:rPr lang="en-US" sz="1200" dirty="0">
+                <a:solidFill>
+                  <a:srgbClr val="475569"/>
+                </a:solidFill>
+                <a:latin typeface="Arial" pitchFamily="34" charset="0"/>
+                <a:ea typeface="Arial" pitchFamily="34" charset="-122"/>
+                <a:cs typeface="Arial" pitchFamily="34" charset="-120"/>
+              </a:rPr>
+              <a:t>El segmento 'en riesgo/bajo valor' es la mayor oportunidad de reactivación: es casi 10 veces más numeroso que los recompradores actuales.</a:t>
+            </a:r>
+          </a:p>
+        </p:txBody>
+      </p:sp>
+    </p:spTree>
+  </p:cSld>
+  <p:clrMapOvr>
+    <a:masterClrMapping/>
+  </p:clrMapOvr>
+</p:sld>
+</file>
+
+<file path=ppt/slides/slide18.xml><?xml version="1.0" encoding="utf-8"?>
 <p:sld xmlns:a="http://schemas.openxmlformats.org/drawingml/2006/main" xmlns:r="http://schemas.openxmlformats.org/officeDocument/2006/relationships" xmlns:p="http://schemas.openxmlformats.org/presentationml/2006/main">
   <p:cSld name="Slide 12">
     <p:spTree>
@@ -3964,7 +5638,7 @@
 </p:sld>
 </file>
 
-<file path=ppt/slides/slide13.xml><?xml version="1.0" encoding="utf-8"?>
+<file path=ppt/slides/slide19.xml><?xml version="1.0" encoding="utf-8"?>
 <p:sld xmlns:a="http://schemas.openxmlformats.org/drawingml/2006/main" xmlns:r="http://schemas.openxmlformats.org/officeDocument/2006/relationships" xmlns:p="http://schemas.openxmlformats.org/presentationml/2006/main">
   <p:cSld name="Slide 13">
     <p:spTree>
@@ -4270,1684 +5944,6 @@
                 <a:cs typeface="Arial" pitchFamily="34" charset="-120"/>
               </a:rPr>
               <a:t>Las etiquetas de segmento (p. ej. 'en_riesgo_bajo_valor') se derivan del comportamiento real de cada cluster, evitando etiquetas cargadas de valor.</a:t>
-            </a:r>
-          </a:p>
-        </p:txBody>
-      </p:sp>
-    </p:spTree>
-  </p:cSld>
-  <p:clrMapOvr>
-    <a:masterClrMapping/>
-  </p:clrMapOvr>
-</p:sld>
-</file>
-
-<file path=ppt/slides/slide14.xml><?xml version="1.0" encoding="utf-8"?>
-<p:sld xmlns:a="http://schemas.openxmlformats.org/drawingml/2006/main" xmlns:r="http://schemas.openxmlformats.org/officeDocument/2006/relationships" xmlns:p="http://schemas.openxmlformats.org/presentationml/2006/main">
-  <p:cSld name="Slide 14">
-    <p:spTree>
-      <p:nvGrpSpPr>
-        <p:cNvPr id="1" name=""/>
-        <p:cNvGrpSpPr/>
-        <p:nvPr/>
-      </p:nvGrpSpPr>
-      <p:grpSpPr>
-        <a:xfrm>
-          <a:off x="0" y="0"/>
-          <a:ext cx="0" cy="0"/>
-          <a:chOff x="0" y="0"/>
-          <a:chExt cx="0" cy="0"/>
-        </a:xfrm>
-      </p:grpSpPr>
-      <p:sp>
-        <p:nvSpPr>
-          <p:cNvPr id="2" name="Text 0"/>
-          <p:cNvSpPr/>
-          <p:nvPr/>
-        </p:nvSpPr>
-        <p:spPr>
-          <a:xfrm>
-            <a:off x="609600" y="609600"/>
-            <a:ext cx="8083296" cy="411361"/>
-          </a:xfrm>
-          <a:prstGeom prst="rect">
-            <a:avLst/>
-          </a:prstGeom>
-          <a:noFill/>
-          <a:ln/>
-        </p:spPr>
-        <p:txBody>
-          <a:bodyPr wrap="square" lIns="0" tIns="0" rIns="0" bIns="0" rtlCol="0" anchor="t"/>
-          <a:lstStyle/>
-          <a:p>
-            <a:pPr>
-              <a:lnSpc>
-                <a:spcPts val="3240"/>
-              </a:lnSpc>
-            </a:pPr>
-            <a:r>
-              <a:rPr lang="en-US" sz="3600" b="1" dirty="0">
-                <a:solidFill>
-                  <a:srgbClr val="EC6A16"/>
-                </a:solidFill>
-                <a:latin typeface="Calibri"/>
-                <a:ea typeface="Calibri"/>
-                <a:cs typeface="Calibri"/>
-              </a:rPr>
-              <a:t>5. Conclusiones y Trabajo Futuro</a:t>
-            </a:r>
-          </a:p>
-        </p:txBody>
-      </p:sp>
-      <p:sp>
-        <p:nvSpPr>
-          <p:cNvPr id="3" name="Text 1"/>
-          <p:cNvSpPr/>
-          <p:nvPr/>
-        </p:nvSpPr>
-        <p:spPr>
-          <a:xfrm>
-            <a:off x="609600" y="1252728"/>
-            <a:ext cx="8083296" cy="239911"/>
-          </a:xfrm>
-          <a:prstGeom prst="rect">
-            <a:avLst/>
-          </a:prstGeom>
-          <a:noFill/>
-          <a:ln/>
-        </p:spPr>
-        <p:txBody>
-          <a:bodyPr wrap="square" lIns="0" tIns="0" rIns="0" bIns="0" rtlCol="0" anchor="t"/>
-          <a:lstStyle/>
-          <a:p>
-            <a:pPr marL="0" indent="0">
-              <a:lnSpc>
-                <a:spcPts val="1890"/>
-              </a:lnSpc>
-              <a:buNone/>
-            </a:pPr>
-            <a:r>
-              <a:rPr lang="en-US" sz="1350" dirty="0">
-                <a:solidFill>
-                  <a:srgbClr val="475569"/>
-                </a:solidFill>
-                <a:latin typeface="Arial" pitchFamily="34" charset="0"/>
-                <a:ea typeface="Arial" pitchFamily="34" charset="-122"/>
-                <a:cs typeface="Arial" pitchFamily="34" charset="-120"/>
-              </a:rPr>
-              <a:t>Conclusiones (3–5):</a:t>
-            </a:r>
-            <a:endParaRPr lang="en-US" sz="1350" dirty="0"/>
-          </a:p>
-        </p:txBody>
-      </p:sp>
-      <p:sp>
-        <p:nvSpPr>
-          <p:cNvPr id="4" name="Text 2"/>
-          <p:cNvSpPr/>
-          <p:nvPr/>
-        </p:nvSpPr>
-        <p:spPr>
-          <a:xfrm>
-            <a:off x="914400" y="1645920"/>
-            <a:ext cx="7620000" cy="1069848"/>
-          </a:xfrm>
-          <a:prstGeom prst="rect">
-            <a:avLst/>
-          </a:prstGeom>
-          <a:noFill/>
-          <a:ln/>
-        </p:spPr>
-        <p:txBody>
-          <a:bodyPr wrap="square" lIns="0" tIns="0" rIns="0" bIns="0" rtlCol="0" anchor="t"/>
-          <a:lstStyle/>
-          <a:p>
-            <a:pPr marL="342900" indent="-342900">
-              <a:lnSpc>
-                <a:spcPts val="2160"/>
-              </a:lnSpc>
-              <a:buSzPct val="100000"/>
-              <a:buChar char="•"/>
-            </a:pPr>
-            <a:endParaRPr lang="en-US" sz="1200" dirty="0"/>
-            <a:r>
-              <a:rPr lang="en-US" sz="1200" dirty="0">
-                <a:solidFill>
-                  <a:srgbClr val="475569"/>
-                </a:solidFill>
-                <a:latin typeface="Arial" pitchFamily="34" charset="0"/>
-                <a:ea typeface="Arial" pitchFamily="34" charset="-122"/>
-                <a:cs typeface="Arial" pitchFamily="34" charset="-120"/>
-              </a:rPr>
-              <a:t>Modelo reproducible y sin fuga de información, con lift de 2.27x en el decil superior.</a:t>
-            </a:r>
-          </a:p>
-          <a:p>
-            <a:pPr marL="342900" indent="-342900">
-              <a:lnSpc>
-                <a:spcPts val="2160"/>
-              </a:lnSpc>
-              <a:buSzPct val="100000"/>
-              <a:buChar char="•"/>
-            </a:pPr>
-            <a:endParaRPr lang="en-US" sz="1200" dirty="0"/>
-            <a:r>
-              <a:rPr lang="en-US" sz="1200" dirty="0">
-                <a:solidFill>
-                  <a:srgbClr val="475569"/>
-                </a:solidFill>
-                <a:latin typeface="Arial" pitchFamily="34" charset="0"/>
-                <a:ea typeface="Arial" pitchFamily="34" charset="-122"/>
-                <a:cs typeface="Arial" pitchFamily="34" charset="-120"/>
-              </a:rPr>
-              <a:t>Ningún driver individual —ni review_score— es fuerte por sí solo: el patrón es multi-causal.</a:t>
-            </a:r>
-          </a:p>
-          <a:p>
-            <a:pPr marL="342900" indent="-342900">
-              <a:lnSpc>
-                <a:spcPts val="2160"/>
-              </a:lnSpc>
-              <a:buSzPct val="100000"/>
-              <a:buChar char="•"/>
-            </a:pPr>
-            <a:endParaRPr lang="en-US" sz="1200" dirty="0"/>
-            <a:r>
-              <a:rPr lang="en-US" sz="1200" dirty="0">
-                <a:solidFill>
-                  <a:srgbClr val="475569"/>
-                </a:solidFill>
-                <a:latin typeface="Arial" pitchFamily="34" charset="0"/>
-                <a:ea typeface="Arial" pitchFamily="34" charset="-122"/>
-                <a:cs typeface="Arial" pitchFamily="34" charset="-120"/>
-              </a:rPr>
-              <a:t>RFM revela un segmento 'en riesgo/bajo valor' (29%): la mayor oportunidad de reactivación.</a:t>
-            </a:r>
-          </a:p>
-        </p:txBody>
-      </p:sp>
-      <p:sp>
-        <p:nvSpPr>
-          <p:cNvPr id="5" name="Text 3"/>
-          <p:cNvSpPr/>
-          <p:nvPr/>
-        </p:nvSpPr>
-        <p:spPr>
-          <a:xfrm>
-            <a:off x="609600" y="2944368"/>
-            <a:ext cx="8083296" cy="239911"/>
-          </a:xfrm>
-          <a:prstGeom prst="rect">
-            <a:avLst/>
-          </a:prstGeom>
-          <a:noFill/>
-          <a:ln/>
-        </p:spPr>
-        <p:txBody>
-          <a:bodyPr wrap="square" lIns="0" tIns="0" rIns="0" bIns="0" rtlCol="0" anchor="t"/>
-          <a:lstStyle/>
-          <a:p>
-            <a:pPr marL="0" indent="0">
-              <a:lnSpc>
-                <a:spcPts val="1890"/>
-              </a:lnSpc>
-              <a:buNone/>
-            </a:pPr>
-            <a:r>
-              <a:rPr lang="en-US" sz="1350" dirty="0">
-                <a:solidFill>
-                  <a:srgbClr val="475569"/>
-                </a:solidFill>
-                <a:latin typeface="Arial" pitchFamily="34" charset="0"/>
-                <a:ea typeface="Arial" pitchFamily="34" charset="-122"/>
-                <a:cs typeface="Arial" pitchFamily="34" charset="-120"/>
-              </a:rPr>
-              <a:t>Limitaciones:</a:t>
-            </a:r>
-            <a:endParaRPr lang="en-US" sz="1350" dirty="0"/>
-          </a:p>
-        </p:txBody>
-      </p:sp>
-      <p:sp>
-        <p:nvSpPr>
-          <p:cNvPr id="6" name="Text 4"/>
-          <p:cNvSpPr/>
-          <p:nvPr/>
-        </p:nvSpPr>
-        <p:spPr>
-          <a:xfrm>
-            <a:off x="609600" y="3337560"/>
-            <a:ext cx="8083296" cy="210312"/>
-          </a:xfrm>
-          <a:prstGeom prst="rect">
-            <a:avLst/>
-          </a:prstGeom>
-          <a:noFill/>
-          <a:ln/>
-        </p:spPr>
-        <p:txBody>
-          <a:bodyPr wrap="square" lIns="0" tIns="0" rIns="0" bIns="0" rtlCol="0" anchor="t"/>
-          <a:lstStyle/>
-          <a:p>
-            <a:pPr marL="0" indent="0">
-              <a:lnSpc>
-                <a:spcPts val="1680"/>
-              </a:lnSpc>
-              <a:buNone/>
-            </a:pPr>
-            <a:endParaRPr lang="en-US" sz="1200" dirty="0"/>
-            <a:r>
-              <a:rPr lang="en-US" sz="1200" dirty="0">
-                <a:solidFill>
-                  <a:srgbClr val="475569"/>
-                </a:solidFill>
-                <a:latin typeface="Arial" pitchFamily="34" charset="0"/>
-                <a:ea typeface="Arial" pitchFamily="34" charset="-122"/>
-                <a:cs typeface="Arial" pitchFamily="34" charset="-120"/>
-              </a:rPr>
-              <a:t>Señal predictiva modesta sobre un dataset estático; el lift reportado es retrospectivo, no A/B.</a:t>
-            </a:r>
-          </a:p>
-        </p:txBody>
-      </p:sp>
-      <p:sp>
-        <p:nvSpPr>
-          <p:cNvPr id="7" name="Text 5"/>
-          <p:cNvSpPr/>
-          <p:nvPr/>
-        </p:nvSpPr>
-        <p:spPr>
-          <a:xfrm>
-            <a:off x="609600" y="3776472"/>
-            <a:ext cx="8083296" cy="239911"/>
-          </a:xfrm>
-          <a:prstGeom prst="rect">
-            <a:avLst/>
-          </a:prstGeom>
-          <a:noFill/>
-          <a:ln/>
-        </p:spPr>
-        <p:txBody>
-          <a:bodyPr wrap="square" lIns="0" tIns="0" rIns="0" bIns="0" rtlCol="0" anchor="t"/>
-          <a:lstStyle/>
-          <a:p>
-            <a:pPr marL="0" indent="0">
-              <a:lnSpc>
-                <a:spcPts val="1890"/>
-              </a:lnSpc>
-              <a:buNone/>
-            </a:pPr>
-            <a:r>
-              <a:rPr lang="en-US" sz="1350" dirty="0">
-                <a:solidFill>
-                  <a:srgbClr val="475569"/>
-                </a:solidFill>
-                <a:latin typeface="Arial" pitchFamily="34" charset="0"/>
-                <a:ea typeface="Arial" pitchFamily="34" charset="-122"/>
-                <a:cs typeface="Arial" pitchFamily="34" charset="-120"/>
-              </a:rPr>
-              <a:t>Trabajo futuro:</a:t>
-            </a:r>
-            <a:endParaRPr lang="en-US" sz="1350" dirty="0"/>
-          </a:p>
-        </p:txBody>
-      </p:sp>
-      <p:sp>
-        <p:nvSpPr>
-          <p:cNvPr id="8" name="Text 6"/>
-          <p:cNvSpPr/>
-          <p:nvPr/>
-        </p:nvSpPr>
-        <p:spPr>
-          <a:xfrm>
-            <a:off x="609600" y="4169664"/>
-            <a:ext cx="8083296" cy="210312"/>
-          </a:xfrm>
-          <a:prstGeom prst="rect">
-            <a:avLst/>
-          </a:prstGeom>
-          <a:noFill/>
-          <a:ln/>
-        </p:spPr>
-        <p:txBody>
-          <a:bodyPr wrap="square" lIns="0" tIns="0" rIns="0" bIns="0" rtlCol="0" anchor="t"/>
-          <a:lstStyle/>
-          <a:p>
-            <a:pPr marL="0" indent="0">
-              <a:lnSpc>
-                <a:spcPts val="1680"/>
-              </a:lnSpc>
-              <a:buNone/>
-            </a:pPr>
-            <a:endParaRPr lang="en-US" sz="1200" dirty="0"/>
-            <a:r>
-              <a:rPr lang="en-US" sz="1200" dirty="0">
-                <a:solidFill>
-                  <a:srgbClr val="475569"/>
-                </a:solidFill>
-                <a:latin typeface="Arial" pitchFamily="34" charset="0"/>
-                <a:ea typeface="Arial" pitchFamily="34" charset="-122"/>
-                <a:cs typeface="Arial" pitchFamily="34" charset="-120"/>
-              </a:rPr>
-              <a:t>Clickstream/marketing, más modelos, recomendador complementario y validación A/B por segmento.</a:t>
-            </a:r>
-          </a:p>
-        </p:txBody>
-      </p:sp>
-    </p:spTree>
-  </p:cSld>
-  <p:clrMapOvr>
-    <a:masterClrMapping/>
-  </p:clrMapOvr>
-</p:sld>
-</file>
-
-<file path=ppt/slides/slide15.xml><?xml version="1.0" encoding="utf-8"?>
-<p:sld xmlns:a="http://schemas.openxmlformats.org/drawingml/2006/main" xmlns:r="http://schemas.openxmlformats.org/officeDocument/2006/relationships" xmlns:p="http://schemas.openxmlformats.org/presentationml/2006/main">
-  <p:cSld name="Slide 15">
-    <p:spTree>
-      <p:nvGrpSpPr>
-        <p:cNvPr id="1" name=""/>
-        <p:cNvGrpSpPr/>
-        <p:nvPr/>
-      </p:nvGrpSpPr>
-      <p:grpSpPr>
-        <a:xfrm>
-          <a:off x="0" y="0"/>
-          <a:ext cx="0" cy="0"/>
-          <a:chOff x="0" y="0"/>
-          <a:chExt cx="0" cy="0"/>
-        </a:xfrm>
-      </p:grpSpPr>
-      <p:sp>
-        <p:nvSpPr>
-          <p:cNvPr id="2" name="Text 0"/>
-          <p:cNvSpPr/>
-          <p:nvPr/>
-        </p:nvSpPr>
-        <p:spPr>
-          <a:xfrm>
-            <a:off x="609600" y="609600"/>
-            <a:ext cx="8083296" cy="411361"/>
-          </a:xfrm>
-          <a:prstGeom prst="rect">
-            <a:avLst/>
-          </a:prstGeom>
-          <a:noFill/>
-          <a:ln/>
-        </p:spPr>
-        <p:txBody>
-          <a:bodyPr wrap="square" lIns="0" tIns="0" rIns="0" bIns="0" rtlCol="0" anchor="t"/>
-          <a:lstStyle/>
-          <a:p>
-            <a:pPr marL="0" indent="0">
-              <a:lnSpc>
-                <a:spcPts val="3240"/>
-              </a:lnSpc>
-              <a:buNone/>
-            </a:pPr>
-            <a:r>
-              <a:rPr lang="en-US" sz="3600" b="1" dirty="0">
-                <a:solidFill>
-                  <a:srgbClr val="EC6A16"/>
-                </a:solidFill>
-                <a:latin typeface="Calibri"/>
-                <a:ea typeface="Calibri"/>
-                <a:cs typeface="Calibri"/>
-              </a:rPr>
-              <a:t>6. Anexos y Entregables</a:t>
-            </a:r>
-          </a:p>
-        </p:txBody>
-      </p:sp>
-      <p:sp>
-        <p:nvSpPr>
-          <p:cNvPr id="3" name="Text 1"/>
-          <p:cNvSpPr/>
-          <p:nvPr/>
-        </p:nvSpPr>
-        <p:spPr>
-          <a:xfrm>
-            <a:off x="914400" y="1249561"/>
-            <a:ext cx="7620000" cy="1828651"/>
-          </a:xfrm>
-          <a:prstGeom prst="rect">
-            <a:avLst/>
-          </a:prstGeom>
-          <a:noFill/>
-          <a:ln/>
-        </p:spPr>
-        <p:txBody>
-          <a:bodyPr wrap="square" lIns="0" tIns="0" rIns="0" bIns="0" rtlCol="0" anchor="t"/>
-          <a:lstStyle/>
-          <a:p>
-            <a:pPr marL="342900" indent="-342900">
-              <a:lnSpc>
-                <a:spcPts val="2160"/>
-              </a:lnSpc>
-              <a:buSzPct val="100000"/>
-              <a:buChar char="•"/>
-            </a:pPr>
-            <a:r>
-              <a:rPr lang="en-US" sz="1200" b="1" dirty="0">
-                <a:solidFill>
-                  <a:srgbClr val="475569"/>
-                </a:solidFill>
-                <a:latin typeface="Arial" pitchFamily="34" charset="0"/>
-                <a:ea typeface="Arial" pitchFamily="34" charset="-122"/>
-                <a:cs typeface="Arial" pitchFamily="34" charset="-120"/>
-              </a:rPr>
-              <a:t>Notebook 1 (EDA):</a:t>
-            </a:r>
-            <a:r>
-              <a:rPr lang="en-US" sz="1200" dirty="0">
-                <a:solidFill>
-                  <a:srgbClr val="475569"/>
-                </a:solidFill>
-                <a:latin typeface="Arial" pitchFamily="34" charset="0"/>
-                <a:ea typeface="Arial" pitchFamily="34" charset="-122"/>
-                <a:cs typeface="Arial" pitchFamily="34" charset="-120"/>
-              </a:rPr>
-              <a:t> notebooks/NB1_Estrategia_Datos_EDA.ipynb</a:t>
-            </a:r>
-            <a:endParaRPr lang="en-US" sz="1200" dirty="0"/>
-          </a:p>
-          <a:p>
-            <a:pPr marL="342900" indent="-342900">
-              <a:lnSpc>
-                <a:spcPts val="2160"/>
-              </a:lnSpc>
-              <a:buSzPct val="100000"/>
-              <a:buChar char="•"/>
-            </a:pPr>
-            <a:r>
-              <a:rPr lang="en-US" sz="1200" b="1" dirty="0">
-                <a:solidFill>
-                  <a:srgbClr val="475569"/>
-                </a:solidFill>
-                <a:latin typeface="Arial" pitchFamily="34" charset="0"/>
-                <a:ea typeface="Arial" pitchFamily="34" charset="-122"/>
-                <a:cs typeface="Arial" pitchFamily="34" charset="-120"/>
-              </a:rPr>
-              <a:t>Notebook 2 (Modelos):</a:t>
-            </a:r>
-            <a:r>
-              <a:rPr lang="en-US" sz="1200" dirty="0">
-                <a:solidFill>
-                  <a:srgbClr val="475569"/>
-                </a:solidFill>
-                <a:latin typeface="Arial" pitchFamily="34" charset="0"/>
-                <a:ea typeface="Arial" pitchFamily="34" charset="-122"/>
-                <a:cs typeface="Arial" pitchFamily="34" charset="-120"/>
-              </a:rPr>
-              <a:t> notebooks/NB2_Modelado_Validacion.ipynb</a:t>
-            </a:r>
-            <a:endParaRPr lang="en-US" sz="1200" dirty="0"/>
-          </a:p>
-          <a:p>
-            <a:pPr marL="342900" indent="-342900">
-              <a:lnSpc>
-                <a:spcPts val="2160"/>
-              </a:lnSpc>
-              <a:buSzPct val="100000"/>
-              <a:buChar char="•"/>
-            </a:pPr>
-            <a:r>
-              <a:rPr lang="en-US" sz="1200" b="1" dirty="0">
-                <a:solidFill>
-                  <a:srgbClr val="475569"/>
-                </a:solidFill>
-                <a:latin typeface="Arial" pitchFamily="34" charset="0"/>
-                <a:ea typeface="Arial" pitchFamily="34" charset="-122"/>
-                <a:cs typeface="Arial" pitchFamily="34" charset="-120"/>
-              </a:rPr>
-              <a:t>Repositorio / Demo:</a:t>
-            </a:r>
-            <a:r>
-              <a:rPr lang="en-US" sz="1200" dirty="0">
-                <a:solidFill>
-                  <a:srgbClr val="475569"/>
-                </a:solidFill>
-                <a:latin typeface="Arial" pitchFamily="34" charset="0"/>
-                <a:ea typeface="Arial" pitchFamily="34" charset="-122"/>
-                <a:cs typeface="Arial" pitchFamily="34" charset="-120"/>
-              </a:rPr>
-              <a:t> carpeta notebooks/artifacts/ (modelo, model card, predicciones, segmentos)</a:t>
-            </a:r>
-            <a:endParaRPr lang="en-US" sz="1200" dirty="0"/>
-          </a:p>
-          <a:p>
-            <a:pPr marL="342900" indent="-342900">
-              <a:lnSpc>
-                <a:spcPts val="2160"/>
-              </a:lnSpc>
-              <a:buSzPct val="100000"/>
-              <a:buChar char="•"/>
-            </a:pPr>
-            <a:r>
-              <a:rPr lang="en-US" sz="1200" b="1" dirty="0">
-                <a:solidFill>
-                  <a:srgbClr val="475569"/>
-                </a:solidFill>
-                <a:latin typeface="Arial" pitchFamily="34" charset="0"/>
-                <a:ea typeface="Arial" pitchFamily="34" charset="-122"/>
-                <a:cs typeface="Arial" pitchFamily="34" charset="-120"/>
-              </a:rPr>
-              <a:t>Datos (si públicos):</a:t>
-            </a:r>
-            <a:r>
-              <a:rPr lang="en-US" sz="1200" dirty="0">
-                <a:solidFill>
-                  <a:srgbClr val="475569"/>
-                </a:solidFill>
-                <a:latin typeface="Arial" pitchFamily="34" charset="0"/>
-                <a:ea typeface="Arial" pitchFamily="34" charset="-122"/>
-                <a:cs typeface="Arial" pitchFamily="34" charset="-120"/>
-              </a:rPr>
-              <a:t> Kaggle — Olist Brazilian E-Commerce (CC BY-NC-SA 4.0)</a:t>
-            </a:r>
-            <a:endParaRPr lang="en-US" sz="1200" dirty="0"/>
-          </a:p>
-          <a:p>
-            <a:pPr marL="342900" indent="-342900">
-              <a:lnSpc>
-                <a:spcPts val="2160"/>
-              </a:lnSpc>
-              <a:buSzPct val="100000"/>
-              <a:buChar char="•"/>
-            </a:pPr>
-            <a:r>
-              <a:rPr lang="en-US" sz="1200" b="1" dirty="0">
-                <a:solidFill>
-                  <a:srgbClr val="475569"/>
-                </a:solidFill>
-                <a:latin typeface="Arial" pitchFamily="34" charset="0"/>
-                <a:ea typeface="Arial" pitchFamily="34" charset="-122"/>
-                <a:cs typeface="Arial" pitchFamily="34" charset="-120"/>
-              </a:rPr>
-              <a:t>Documentación técnica:</a:t>
-            </a:r>
-            <a:r>
-              <a:rPr lang="en-US" sz="1200" dirty="0">
-                <a:solidFill>
-                  <a:srgbClr val="475569"/>
-                </a:solidFill>
-                <a:latin typeface="Arial" pitchFamily="34" charset="0"/>
-                <a:ea typeface="Arial" pitchFamily="34" charset="-122"/>
-                <a:cs typeface="Arial" pitchFamily="34" charset="-120"/>
-              </a:rPr>
-              <a:t> Informe_Tecnico_ShopMart_Olist.docx</a:t>
-            </a:r>
-            <a:endParaRPr lang="en-US" sz="1200" dirty="0"/>
-          </a:p>
-        </p:txBody>
-      </p:sp>
-    </p:spTree>
-  </p:cSld>
-  <p:clrMapOvr>
-    <a:masterClrMapping/>
-  </p:clrMapOvr>
-</p:sld>
-</file>
-
-<file path=ppt/slides/slide16.xml><?xml version="1.0" encoding="utf-8"?>
-<p:sld xmlns:a="http://schemas.openxmlformats.org/drawingml/2006/main" xmlns:r="http://schemas.openxmlformats.org/officeDocument/2006/relationships" xmlns:p="http://schemas.openxmlformats.org/presentationml/2006/main">
-  <p:cSld name="Slide 16">
-    <p:spTree>
-      <p:nvGrpSpPr>
-        <p:cNvPr id="1" name=""/>
-        <p:cNvGrpSpPr/>
-        <p:nvPr/>
-      </p:nvGrpSpPr>
-      <p:grpSpPr>
-        <a:xfrm>
-          <a:off x="0" y="0"/>
-          <a:ext cx="0" cy="0"/>
-          <a:chOff x="0" y="0"/>
-          <a:chExt cx="0" cy="0"/>
-        </a:xfrm>
-      </p:grpSpPr>
-      <p:sp>
-        <p:nvSpPr>
-          <p:cNvPr id="2" name="Text 0"/>
-          <p:cNvSpPr/>
-          <p:nvPr/>
-        </p:nvSpPr>
-        <p:spPr>
-          <a:xfrm>
-            <a:off x="3146858" y="1689795"/>
-            <a:ext cx="2850285" cy="548580"/>
-          </a:xfrm>
-          <a:prstGeom prst="rect">
-            <a:avLst/>
-          </a:prstGeom>
-          <a:noFill/>
-          <a:ln/>
-        </p:spPr>
-        <p:txBody>
-          <a:bodyPr wrap="square" lIns="0" tIns="0" rIns="0" bIns="0" rtlCol="0" anchor="t"/>
-          <a:lstStyle/>
-          <a:p>
-            <a:pPr marL="0" indent="0" algn="ctr">
-              <a:lnSpc>
-                <a:spcPts val="4320"/>
-              </a:lnSpc>
-              <a:buNone/>
-            </a:pPr>
-            <a:r>
-              <a:rPr lang="en-US" sz="3600" b="1" dirty="0">
-                <a:solidFill>
-                  <a:srgbClr val="FFFFFF"/>
-                </a:solidFill>
-                <a:latin typeface="Arial" pitchFamily="34" charset="0"/>
-                <a:ea typeface="Arial" pitchFamily="34" charset="-122"/>
-                <a:cs typeface="Arial" pitchFamily="34" charset="-120"/>
-              </a:rPr>
-              <a:t>¿Preguntas?</a:t>
-            </a:r>
-            <a:endParaRPr lang="en-US" sz="3600" dirty="0"/>
-          </a:p>
-        </p:txBody>
-      </p:sp>
-      <p:sp>
-        <p:nvSpPr>
-          <p:cNvPr id="3" name="Text 1"/>
-          <p:cNvSpPr/>
-          <p:nvPr/>
-        </p:nvSpPr>
-        <p:spPr>
-          <a:xfrm>
-            <a:off x="3545802" y="2543175"/>
-            <a:ext cx="2052248" cy="266700"/>
-          </a:xfrm>
-          <a:prstGeom prst="rect">
-            <a:avLst/>
-          </a:prstGeom>
-          <a:noFill/>
-          <a:ln/>
-        </p:spPr>
-        <p:txBody>
-          <a:bodyPr wrap="square" lIns="0" tIns="0" rIns="0" bIns="0" rtlCol="0" anchor="t"/>
-          <a:lstStyle/>
-          <a:p>
-            <a:pPr marL="0" indent="0" algn="ctr">
-              <a:lnSpc>
-                <a:spcPts val="2100"/>
-              </a:lnSpc>
-              <a:buNone/>
-            </a:pPr>
-            <a:r>
-              <a:rPr lang="en-US" sz="1500" dirty="0">
-                <a:solidFill>
-                  <a:srgbClr val="FFFFFF"/>
-                </a:solidFill>
-                <a:latin typeface="Arial" pitchFamily="34" charset="0"/>
-                <a:ea typeface="Arial" pitchFamily="34" charset="-122"/>
-                <a:cs typeface="Arial" pitchFamily="34" charset="-120"/>
-              </a:rPr>
-              <a:t>Gracias por su atención</a:t>
-            </a:r>
-            <a:endParaRPr lang="en-US" sz="1500" dirty="0"/>
-          </a:p>
-        </p:txBody>
-      </p:sp>
-      <p:sp>
-        <p:nvSpPr>
-          <p:cNvPr id="4" name="Text 2"/>
-          <p:cNvSpPr/>
-          <p:nvPr/>
-        </p:nvSpPr>
-        <p:spPr>
-          <a:xfrm>
-            <a:off x="2705715" y="3267075"/>
-            <a:ext cx="3732422" cy="186630"/>
-          </a:xfrm>
-          <a:prstGeom prst="rect">
-            <a:avLst/>
-          </a:prstGeom>
-          <a:noFill/>
-          <a:ln/>
-        </p:spPr>
-        <p:txBody>
-          <a:bodyPr wrap="square" lIns="0" tIns="0" rIns="0" bIns="0" rtlCol="0" anchor="t"/>
-          <a:lstStyle/>
-          <a:p>
-            <a:pPr marL="0" indent="0" algn="ctr">
-              <a:lnSpc>
-                <a:spcPts val="1470"/>
-              </a:lnSpc>
-              <a:buNone/>
-            </a:pPr>
-            <a:r>
-              <a:rPr lang="en-US" sz="1050" dirty="0">
-                <a:solidFill>
-                  <a:srgbClr val="FFFFFF"/>
-                </a:solidFill>
-                <a:latin typeface="Arial" pitchFamily="34" charset="0"/>
-                <a:ea typeface="Arial" pitchFamily="34" charset="-122"/>
-                <a:cs typeface="Arial" pitchFamily="34" charset="-120"/>
-              </a:rPr>
-              <a:t>Universidad Casa Grande</a:t>
-            </a:r>
-          </a:p>
-          <a:p>
-            <a:pPr marL="0" indent="0" algn="ctr">
-              <a:lnSpc>
-                <a:spcPts val="1470"/>
-              </a:lnSpc>
-              <a:buNone/>
-            </a:pPr>
-            <a:r>
-              <a:rPr lang="en-US" sz="1050" dirty="0">
-                <a:solidFill>
-                  <a:srgbClr val="FFFFFF"/>
-                </a:solidFill>
-                <a:latin typeface="Arial" pitchFamily="34" charset="0"/>
-                <a:ea typeface="Arial" pitchFamily="34" charset="-122"/>
-                <a:cs typeface="Arial" pitchFamily="34" charset="-120"/>
-              </a:rPr>
-              <a:t>Maestría en IA y Ciencia de Datos</a:t>
-            </a:r>
-            <a:endParaRPr lang="en-US" sz="1050" dirty="0"/>
-          </a:p>
-        </p:txBody>
-      </p:sp>
-    </p:spTree>
-  </p:cSld>
-  <p:clrMapOvr>
-    <a:masterClrMapping/>
-  </p:clrMapOvr>
-</p:sld>
-</file>
-
-<file path=ppt/slides/slide17.xml><?xml version="1.0" encoding="utf-8"?>
-<p:sld xmlns:a="http://schemas.openxmlformats.org/drawingml/2006/main" xmlns:r="http://schemas.openxmlformats.org/officeDocument/2006/relationships" xmlns:p="http://schemas.openxmlformats.org/presentationml/2006/main">
-  <p:cSld name="Slide 7">
-    <p:spTree>
-      <p:nvGrpSpPr>
-        <p:cNvPr id="1" name=""/>
-        <p:cNvGrpSpPr/>
-        <p:nvPr/>
-      </p:nvGrpSpPr>
-      <p:grpSpPr>
-        <a:xfrm>
-          <a:off x="0" y="0"/>
-          <a:ext cx="0" cy="0"/>
-          <a:chOff x="0" y="0"/>
-          <a:chExt cx="0" cy="0"/>
-        </a:xfrm>
-      </p:grpSpPr>
-      <p:sp>
-        <p:nvSpPr>
-          <p:cNvPr id="2" name="Text 0"/>
-          <p:cNvSpPr/>
-          <p:nvPr/>
-        </p:nvSpPr>
-        <p:spPr>
-          <a:xfrm>
-            <a:off x="609600" y="609600"/>
-            <a:ext cx="8083296" cy="411361"/>
-          </a:xfrm>
-          <a:prstGeom prst="rect">
-            <a:avLst/>
-          </a:prstGeom>
-          <a:noFill/>
-          <a:ln/>
-        </p:spPr>
-        <p:txBody>
-          <a:bodyPr wrap="square" lIns="0" tIns="0" rIns="0" bIns="0" rtlCol="0" anchor="t"/>
-          <a:lstStyle/>
-          <a:p>
-            <a:pPr indent="0">
-              <a:lnSpc>
-                <a:spcPts val="3240"/>
-              </a:lnSpc>
-              <a:buNone/>
-            </a:pPr>
-            <a:r>
-              <a:rPr lang="en-US" sz="3600" b="1" dirty="0">
-                <a:solidFill>
-                  <a:srgbClr val="EC6A16"/>
-                </a:solidFill>
-                <a:latin typeface="Calibri"/>
-                <a:ea typeface="Calibri"/>
-                <a:cs typeface="Calibri"/>
-              </a:rPr>
-              <a:t>EDA: Desbalance, Estacionalidad y Cardinalidad</a:t>
-            </a:r>
-          </a:p>
-        </p:txBody>
-      </p:sp>
-      <p:sp>
-        <p:nvSpPr>
-          <p:cNvPr id="3" name="Text 1"/>
-          <p:cNvSpPr/>
-          <p:nvPr/>
-        </p:nvSpPr>
-        <p:spPr>
-          <a:xfrm>
-            <a:off x="609600" y="1252728"/>
-            <a:ext cx="8083296" cy="239911"/>
-          </a:xfrm>
-          <a:prstGeom prst="rect">
-            <a:avLst/>
-          </a:prstGeom>
-          <a:noFill/>
-          <a:ln/>
-        </p:spPr>
-        <p:txBody>
-          <a:bodyPr wrap="square" lIns="0" tIns="0" rIns="0" bIns="0" rtlCol="0" anchor="t"/>
-          <a:lstStyle/>
-          <a:p>
-            <a:pPr marL="0" indent="0">
-              <a:lnSpc>
-                <a:spcPts val="1890"/>
-              </a:lnSpc>
-              <a:buNone/>
-            </a:pPr>
-            <a:endParaRPr lang="en-US" sz="1350" dirty="0"/>
-            <a:r>
-              <a:rPr lang="en-US" sz="1350" dirty="0">
-                <a:solidFill>
-                  <a:srgbClr val="475569"/>
-                </a:solidFill>
-                <a:latin typeface="Arial" pitchFamily="34" charset="0"/>
-                <a:ea typeface="Arial" pitchFamily="34" charset="-122"/>
-                <a:cs typeface="Arial" pitchFamily="34" charset="-120"/>
-              </a:rPr>
-              <a:t>Qué encontramos:</a:t>
-            </a:r>
-          </a:p>
-        </p:txBody>
-      </p:sp>
-      <p:sp>
-        <p:nvSpPr>
-          <p:cNvPr id="4" name="Text 2"/>
-          <p:cNvSpPr/>
-          <p:nvPr/>
-        </p:nvSpPr>
-        <p:spPr>
-          <a:xfrm>
-            <a:off x="914400" y="1645920"/>
-            <a:ext cx="7620000" cy="1069848"/>
-          </a:xfrm>
-          <a:prstGeom prst="rect">
-            <a:avLst/>
-          </a:prstGeom>
-          <a:noFill/>
-          <a:ln/>
-        </p:spPr>
-        <p:txBody>
-          <a:bodyPr wrap="square" lIns="0" tIns="0" rIns="0" bIns="0" rtlCol="0" anchor="t"/>
-          <a:lstStyle/>
-          <a:p>
-            <a:pPr marL="342900" indent="-342900">
-              <a:lnSpc>
-                <a:spcPts val="2160"/>
-              </a:lnSpc>
-              <a:buSzPct val="100000"/>
-              <a:buChar char="•"/>
-            </a:pPr>
-            <a:endParaRPr lang="en-US" sz="1200" dirty="0"/>
-            <a:r>
-              <a:rPr lang="en-US" sz="1200" dirty="0">
-                <a:solidFill>
-                  <a:srgbClr val="475569"/>
-                </a:solidFill>
-                <a:latin typeface="Arial" pitchFamily="34" charset="0"/>
-                <a:ea typeface="Arial" pitchFamily="34" charset="-122"/>
-                <a:cs typeface="Arial" pitchFamily="34" charset="-120"/>
-              </a:rPr>
-              <a:t>Desbalance severo (~3.3% recompra) → métrica primaria PR-AUC, no accuracy.</a:t>
-            </a:r>
-          </a:p>
-          <a:p>
-            <a:pPr marL="342900" indent="-342900">
-              <a:lnSpc>
-                <a:spcPts val="2160"/>
-              </a:lnSpc>
-              <a:buSzPct val="100000"/>
-              <a:buChar char="•"/>
-            </a:pPr>
-            <a:endParaRPr lang="en-US" sz="1200" dirty="0"/>
-            <a:r>
-              <a:rPr lang="en-US" sz="1200" dirty="0">
-                <a:solidFill>
-                  <a:srgbClr val="475569"/>
-                </a:solidFill>
-                <a:latin typeface="Arial" pitchFamily="34" charset="0"/>
-                <a:ea typeface="Arial" pitchFamily="34" charset="-122"/>
-                <a:cs typeface="Arial" pitchFamily="34" charset="-120"/>
-              </a:rPr>
-              <a:t>Estacionalidad moderada en volumen y tasa de recompra por mes de compra.</a:t>
-            </a:r>
-          </a:p>
-          <a:p>
-            <a:pPr marL="342900" indent="-342900">
-              <a:lnSpc>
-                <a:spcPts val="2160"/>
-              </a:lnSpc>
-              <a:buSzPct val="100000"/>
-              <a:buChar char="•"/>
-            </a:pPr>
-            <a:endParaRPr lang="en-US" sz="1200" dirty="0"/>
-            <a:r>
-              <a:rPr lang="en-US" sz="1200" dirty="0">
-                <a:solidFill>
-                  <a:srgbClr val="475569"/>
-                </a:solidFill>
-                <a:latin typeface="Arial" pitchFamily="34" charset="0"/>
-                <a:ea typeface="Arial" pitchFamily="34" charset="-122"/>
-                <a:cs typeface="Arial" pitchFamily="34" charset="-120"/>
-              </a:rPr>
-              <a:t>71 categorías long-tail y customer_city de alta cardinalidad (~4k): se agrupan/excluyen.</a:t>
-            </a:r>
-          </a:p>
-        </p:txBody>
-      </p:sp>
-      <p:sp>
-        <p:nvSpPr>
-          <p:cNvPr id="5" name="Text 3"/>
-          <p:cNvSpPr/>
-          <p:nvPr/>
-        </p:nvSpPr>
-        <p:spPr>
-          <a:xfrm>
-            <a:off x="609600" y="2944368"/>
-            <a:ext cx="8083296" cy="239911"/>
-          </a:xfrm>
-          <a:prstGeom prst="rect">
-            <a:avLst/>
-          </a:prstGeom>
-          <a:noFill/>
-          <a:ln/>
-        </p:spPr>
-        <p:txBody>
-          <a:bodyPr wrap="square" lIns="0" tIns="0" rIns="0" bIns="0" rtlCol="0" anchor="t"/>
-          <a:lstStyle/>
-          <a:p>
-            <a:pPr marL="0" indent="0">
-              <a:lnSpc>
-                <a:spcPts val="1890"/>
-              </a:lnSpc>
-              <a:buNone/>
-            </a:pPr>
-            <a:endParaRPr lang="en-US" sz="1350" dirty="0"/>
-            <a:r>
-              <a:rPr lang="en-US" sz="1350" dirty="0">
-                <a:solidFill>
-                  <a:srgbClr val="475569"/>
-                </a:solidFill>
-                <a:latin typeface="Arial" pitchFamily="34" charset="0"/>
-                <a:ea typeface="Arial" pitchFamily="34" charset="-122"/>
-                <a:cs typeface="Arial" pitchFamily="34" charset="-120"/>
-              </a:rPr>
-              <a:t>Conexión:</a:t>
-            </a:r>
-          </a:p>
-        </p:txBody>
-      </p:sp>
-      <p:sp>
-        <p:nvSpPr>
-          <p:cNvPr id="6" name="Text 4"/>
-          <p:cNvSpPr/>
-          <p:nvPr/>
-        </p:nvSpPr>
-        <p:spPr>
-          <a:xfrm>
-            <a:off x="914400" y="3337560"/>
-            <a:ext cx="7620000" cy="356616"/>
-          </a:xfrm>
-          <a:prstGeom prst="rect">
-            <a:avLst/>
-          </a:prstGeom>
-          <a:noFill/>
-          <a:ln/>
-        </p:spPr>
-        <p:txBody>
-          <a:bodyPr wrap="square" lIns="0" tIns="0" rIns="0" bIns="0" rtlCol="0" anchor="t"/>
-          <a:lstStyle/>
-          <a:p>
-            <a:pPr marL="342900" indent="-342900">
-              <a:lnSpc>
-                <a:spcPts val="2160"/>
-              </a:lnSpc>
-              <a:buSzPct val="100000"/>
-              <a:buChar char="•"/>
-            </a:pPr>
-            <a:endParaRPr lang="en-US" sz="1200" dirty="0"/>
-            <a:r>
-              <a:rPr lang="en-US" sz="1200" dirty="0">
-                <a:solidFill>
-                  <a:srgbClr val="475569"/>
-                </a:solidFill>
-                <a:latin typeface="Arial" pitchFamily="34" charset="0"/>
-                <a:ea typeface="Arial" pitchFamily="34" charset="-122"/>
-                <a:cs typeface="Arial" pitchFamily="34" charset="-120"/>
-              </a:rPr>
-              <a:t>El hallazgo más importante del EDA —el review_score— tiene su propia slide a continuación.</a:t>
-            </a:r>
-          </a:p>
-        </p:txBody>
-      </p:sp>
-    </p:spTree>
-  </p:cSld>
-  <p:clrMapOvr>
-    <a:masterClrMapping/>
-  </p:clrMapOvr>
-</p:sld>
-</file>
-
-<file path=ppt/slides/slide18.xml><?xml version="1.0" encoding="utf-8"?>
-<p:sld xmlns:a="http://schemas.openxmlformats.org/drawingml/2006/main" xmlns:r="http://schemas.openxmlformats.org/officeDocument/2006/relationships" xmlns:p="http://schemas.openxmlformats.org/presentationml/2006/main">
-  <p:cSld name="Slide 4">
-    <p:spTree>
-      <p:nvGrpSpPr>
-        <p:cNvPr id="1" name=""/>
-        <p:cNvGrpSpPr/>
-        <p:nvPr/>
-      </p:nvGrpSpPr>
-      <p:grpSpPr>
-        <a:xfrm>
-          <a:off x="0" y="0"/>
-          <a:ext cx="0" cy="0"/>
-          <a:chOff x="0" y="0"/>
-          <a:chExt cx="0" cy="0"/>
-        </a:xfrm>
-      </p:grpSpPr>
-      <p:sp>
-        <p:nvSpPr>
-          <p:cNvPr id="2" name="Text 0"/>
-          <p:cNvSpPr/>
-          <p:nvPr/>
-        </p:nvSpPr>
-        <p:spPr>
-          <a:xfrm>
-            <a:off x="609600" y="1249561"/>
-            <a:ext cx="7924800" cy="1249561"/>
-          </a:xfrm>
-          <a:prstGeom prst="rect">
-            <a:avLst/>
-          </a:prstGeom>
-          <a:solidFill>
-            <a:srgbClr val="F1F5F9"/>
-          </a:solidFill>
-          <a:ln/>
-          <a:effectLst>
-            <a:outerShdw blurRad="152400" dist="76200" dir="5400000" algn="bl" rotWithShape="0">
-              <a:srgbClr val="000000">
-                <a:alpha val="8000"/>
-              </a:srgbClr>
-            </a:outerShdw>
-          </a:effectLst>
-        </p:spPr>
-        <p:txBody>
-          <a:bodyPr wrap="none" lIns="0" tIns="0" rIns="0" bIns="0" rtlCol="0" anchor="ctr">
-            <a:normAutofit/>
-          </a:bodyPr>
-          <a:lstStyle/>
-          <a:p>
-            <a:pPr marL="0" indent="0">
-              <a:buNone/>
-            </a:pPr>
-            <a:endParaRPr lang="en-US" dirty="0"/>
-          </a:p>
-        </p:txBody>
-      </p:sp>
-      <p:sp>
-        <p:nvSpPr>
-          <p:cNvPr id="3" name="Text 1"/>
-          <p:cNvSpPr/>
-          <p:nvPr/>
-        </p:nvSpPr>
-        <p:spPr>
-          <a:xfrm>
-            <a:off x="609600" y="3284339"/>
-            <a:ext cx="7924800" cy="1249561"/>
-          </a:xfrm>
-          <a:prstGeom prst="rect">
-            <a:avLst/>
-          </a:prstGeom>
-          <a:solidFill>
-            <a:srgbClr val="F1F5F9"/>
-          </a:solidFill>
-          <a:ln/>
-          <a:effectLst>
-            <a:outerShdw blurRad="152400" dist="76200" dir="5400000" algn="bl" rotWithShape="0">
-              <a:srgbClr val="000000">
-                <a:alpha val="8000"/>
-              </a:srgbClr>
-            </a:outerShdw>
-          </a:effectLst>
-        </p:spPr>
-        <p:txBody>
-          <a:bodyPr wrap="none" lIns="0" tIns="0" rIns="0" bIns="0" rtlCol="0" anchor="ctr">
-            <a:normAutofit/>
-          </a:bodyPr>
-          <a:lstStyle/>
-          <a:p>
-            <a:pPr marL="0" indent="0">
-              <a:buNone/>
-            </a:pPr>
-            <a:endParaRPr lang="en-US" dirty="0"/>
-          </a:p>
-        </p:txBody>
-      </p:sp>
-      <p:sp>
-        <p:nvSpPr>
-          <p:cNvPr id="4" name="Text 2"/>
-          <p:cNvSpPr/>
-          <p:nvPr/>
-        </p:nvSpPr>
-        <p:spPr>
-          <a:xfrm>
-            <a:off x="609600" y="609600"/>
-            <a:ext cx="8083296" cy="411361"/>
-          </a:xfrm>
-          <a:prstGeom prst="rect">
-            <a:avLst/>
-          </a:prstGeom>
-          <a:noFill/>
-          <a:ln/>
-        </p:spPr>
-        <p:txBody>
-          <a:bodyPr wrap="square" lIns="0" tIns="0" rIns="0" bIns="0" rtlCol="0" anchor="t"/>
-          <a:lstStyle/>
-          <a:p>
-            <a:pPr>
-              <a:lnSpc>
-                <a:spcPts val="3240"/>
-              </a:lnSpc>
-            </a:pPr>
-            <a:r>
-              <a:rPr lang="en-US" sz="3600" b="1" dirty="0">
-                <a:solidFill>
-                  <a:srgbClr val="EC6A16"/>
-                </a:solidFill>
-                <a:latin typeface="Calibri"/>
-                <a:ea typeface="Calibri"/>
-                <a:cs typeface="Calibri"/>
-              </a:rPr>
-              <a:t>EDA: El "Mito" del Review Score</a:t>
-            </a:r>
-          </a:p>
-        </p:txBody>
-      </p:sp>
-      <p:sp>
-        <p:nvSpPr>
-          <p:cNvPr id="5" name="Text 3"/>
-          <p:cNvSpPr/>
-          <p:nvPr/>
-        </p:nvSpPr>
-        <p:spPr>
-          <a:xfrm>
-            <a:off x="914400" y="1554361"/>
-            <a:ext cx="7461504" cy="274290"/>
-          </a:xfrm>
-          <a:prstGeom prst="rect">
-            <a:avLst/>
-          </a:prstGeom>
-          <a:noFill/>
-          <a:ln/>
-        </p:spPr>
-        <p:txBody>
-          <a:bodyPr wrap="square" lIns="0" tIns="0" rIns="0" bIns="0" rtlCol="0" anchor="t"/>
-          <a:lstStyle/>
-          <a:p>
-            <a:pPr marL="0" indent="0">
-              <a:lnSpc>
-                <a:spcPts val="2160"/>
-              </a:lnSpc>
-              <a:buNone/>
-            </a:pPr>
-            <a:endParaRPr lang="en-US" sz="1800" dirty="0"/>
-            <a:r>
-              <a:rPr lang="en-US" sz="1800" b="1" dirty="0">
-                <a:solidFill>
-                  <a:srgbClr val="0284C7"/>
-                </a:solidFill>
-                <a:latin typeface="Arial" pitchFamily="34" charset="0"/>
-                <a:ea typeface="Arial" pitchFamily="34" charset="-122"/>
-                <a:cs typeface="Arial" pitchFamily="34" charset="-120"/>
-              </a:rPr>
-              <a:t>Lo esperable</a:t>
-            </a:r>
-          </a:p>
-        </p:txBody>
-      </p:sp>
-      <p:sp>
-        <p:nvSpPr>
-          <p:cNvPr id="6" name="Text 4"/>
-          <p:cNvSpPr/>
-          <p:nvPr/>
-        </p:nvSpPr>
-        <p:spPr>
-          <a:xfrm>
-            <a:off x="914400" y="1981051"/>
-            <a:ext cx="7461504" cy="213271"/>
-          </a:xfrm>
-          <a:prstGeom prst="rect">
-            <a:avLst/>
-          </a:prstGeom>
-          <a:noFill/>
-          <a:ln/>
-        </p:spPr>
-        <p:txBody>
-          <a:bodyPr wrap="square" lIns="0" tIns="0" rIns="0" bIns="0" rtlCol="0" anchor="t"/>
-          <a:lstStyle/>
-          <a:p>
-            <a:pPr marL="0" indent="0">
-              <a:lnSpc>
-                <a:spcPts val="1680"/>
-              </a:lnSpc>
-              <a:buNone/>
-            </a:pPr>
-            <a:endParaRPr lang="en-US" sz="1200" dirty="0"/>
-            <a:r>
-              <a:rPr lang="en-US" sz="1200" dirty="0">
-                <a:solidFill>
-                  <a:srgbClr val="475569"/>
-                </a:solidFill>
-                <a:latin typeface="Arial" pitchFamily="34" charset="0"/>
-                <a:ea typeface="Arial" pitchFamily="34" charset="-122"/>
-                <a:cs typeface="Arial" pitchFamily="34" charset="-120"/>
-              </a:rPr>
-              <a:t>La intuición de negocio dice que un cliente satisfecho (review alto) debería ser mucho más propenso a volver a comprar que uno insatisfecho.</a:t>
-            </a:r>
-          </a:p>
-        </p:txBody>
-      </p:sp>
-      <p:sp>
-        <p:nvSpPr>
-          <p:cNvPr id="7" name="Text 5"/>
-          <p:cNvSpPr/>
-          <p:nvPr/>
-        </p:nvSpPr>
-        <p:spPr>
-          <a:xfrm>
-            <a:off x="914400" y="3589139"/>
-            <a:ext cx="7461504" cy="274290"/>
-          </a:xfrm>
-          <a:prstGeom prst="rect">
-            <a:avLst/>
-          </a:prstGeom>
-          <a:noFill/>
-          <a:ln/>
-        </p:spPr>
-        <p:txBody>
-          <a:bodyPr wrap="square" lIns="0" tIns="0" rIns="0" bIns="0" rtlCol="0" anchor="t"/>
-          <a:lstStyle/>
-          <a:p>
-            <a:pPr marL="0" indent="0">
-              <a:lnSpc>
-                <a:spcPts val="2160"/>
-              </a:lnSpc>
-              <a:buNone/>
-            </a:pPr>
-            <a:endParaRPr lang="en-US" sz="1800" dirty="0"/>
-            <a:r>
-              <a:rPr lang="en-US" sz="1800" b="1" dirty="0">
-                <a:solidFill>
-                  <a:srgbClr val="0284C7"/>
-                </a:solidFill>
-                <a:latin typeface="Arial" pitchFamily="34" charset="0"/>
-                <a:ea typeface="Arial" pitchFamily="34" charset="-122"/>
-                <a:cs typeface="Arial" pitchFamily="34" charset="-120"/>
-              </a:rPr>
-              <a:t>Lo que muestra el dato</a:t>
-            </a:r>
-          </a:p>
-        </p:txBody>
-      </p:sp>
-      <p:sp>
-        <p:nvSpPr>
-          <p:cNvPr id="8" name="Text 6"/>
-          <p:cNvSpPr/>
-          <p:nvPr/>
-        </p:nvSpPr>
-        <p:spPr>
-          <a:xfrm>
-            <a:off x="914400" y="4015829"/>
-            <a:ext cx="7461504" cy="213271"/>
-          </a:xfrm>
-          <a:prstGeom prst="rect">
-            <a:avLst/>
-          </a:prstGeom>
-          <a:noFill/>
-          <a:ln/>
-        </p:spPr>
-        <p:txBody>
-          <a:bodyPr wrap="square" lIns="0" tIns="0" rIns="0" bIns="0" rtlCol="0" anchor="t"/>
-          <a:lstStyle/>
-          <a:p>
-            <a:pPr marL="0" indent="0">
-              <a:lnSpc>
-                <a:spcPts val="1680"/>
-              </a:lnSpc>
-              <a:buNone/>
-            </a:pPr>
-            <a:endParaRPr lang="en-US" sz="1200" dirty="0"/>
-            <a:r>
-              <a:rPr lang="en-US" sz="1200" dirty="0">
-                <a:solidFill>
-                  <a:srgbClr val="475569"/>
-                </a:solidFill>
-                <a:latin typeface="Arial" pitchFamily="34" charset="0"/>
-                <a:ea typeface="Arial" pitchFamily="34" charset="-122"/>
-                <a:cs typeface="Arial" pitchFamily="34" charset="-120"/>
-              </a:rPr>
-              <a:t>La tasa de recompra por review_score es prácticamente plana (2.96%–3.46%), sin tendencia monótona; su correlación con el target es de las más débiles (|ρ|&lt;0.03).</a:t>
-            </a:r>
-          </a:p>
-        </p:txBody>
-      </p:sp>
-    </p:spTree>
-  </p:cSld>
-  <p:clrMapOvr>
-    <a:masterClrMapping/>
-  </p:clrMapOvr>
-</p:sld>
-</file>
-
-<file path=ppt/slides/slide19.xml><?xml version="1.0" encoding="utf-8"?>
-<p:sld xmlns:a="http://schemas.openxmlformats.org/drawingml/2006/main" xmlns:r="http://schemas.openxmlformats.org/officeDocument/2006/relationships" xmlns:p="http://schemas.openxmlformats.org/presentationml/2006/main">
-  <p:cSld name="Slide 4">
-    <p:spTree>
-      <p:nvGrpSpPr>
-        <p:cNvPr id="1" name=""/>
-        <p:cNvGrpSpPr/>
-        <p:nvPr/>
-      </p:nvGrpSpPr>
-      <p:grpSpPr>
-        <a:xfrm>
-          <a:off x="0" y="0"/>
-          <a:ext cx="0" cy="0"/>
-          <a:chOff x="0" y="0"/>
-          <a:chExt cx="0" cy="0"/>
-        </a:xfrm>
-      </p:grpSpPr>
-      <p:sp>
-        <p:nvSpPr>
-          <p:cNvPr id="2" name="Text 0"/>
-          <p:cNvSpPr/>
-          <p:nvPr/>
-        </p:nvSpPr>
-        <p:spPr>
-          <a:xfrm>
-            <a:off x="609600" y="1249561"/>
-            <a:ext cx="7924800" cy="1249561"/>
-          </a:xfrm>
-          <a:prstGeom prst="rect">
-            <a:avLst/>
-          </a:prstGeom>
-          <a:solidFill>
-            <a:srgbClr val="F1F5F9"/>
-          </a:solidFill>
-          <a:ln/>
-          <a:effectLst>
-            <a:outerShdw blurRad="152400" dist="76200" dir="5400000" algn="bl" rotWithShape="0">
-              <a:srgbClr val="000000">
-                <a:alpha val="8000"/>
-              </a:srgbClr>
-            </a:outerShdw>
-          </a:effectLst>
-        </p:spPr>
-        <p:txBody>
-          <a:bodyPr wrap="none" lIns="0" tIns="0" rIns="0" bIns="0" rtlCol="0" anchor="ctr">
-            <a:normAutofit/>
-          </a:bodyPr>
-          <a:lstStyle/>
-          <a:p>
-            <a:pPr marL="0" indent="0">
-              <a:buNone/>
-            </a:pPr>
-            <a:endParaRPr lang="en-US" dirty="0"/>
-          </a:p>
-        </p:txBody>
-      </p:sp>
-      <p:sp>
-        <p:nvSpPr>
-          <p:cNvPr id="3" name="Text 1"/>
-          <p:cNvSpPr/>
-          <p:nvPr/>
-        </p:nvSpPr>
-        <p:spPr>
-          <a:xfrm>
-            <a:off x="609600" y="3284339"/>
-            <a:ext cx="7924800" cy="1249561"/>
-          </a:xfrm>
-          <a:prstGeom prst="rect">
-            <a:avLst/>
-          </a:prstGeom>
-          <a:solidFill>
-            <a:srgbClr val="F1F5F9"/>
-          </a:solidFill>
-          <a:ln/>
-          <a:effectLst>
-            <a:outerShdw blurRad="152400" dist="76200" dir="5400000" algn="bl" rotWithShape="0">
-              <a:srgbClr val="000000">
-                <a:alpha val="8000"/>
-              </a:srgbClr>
-            </a:outerShdw>
-          </a:effectLst>
-        </p:spPr>
-        <p:txBody>
-          <a:bodyPr wrap="none" lIns="0" tIns="0" rIns="0" bIns="0" rtlCol="0" anchor="ctr">
-            <a:normAutofit/>
-          </a:bodyPr>
-          <a:lstStyle/>
-          <a:p>
-            <a:pPr marL="0" indent="0">
-              <a:buNone/>
-            </a:pPr>
-            <a:endParaRPr lang="en-US" dirty="0"/>
-          </a:p>
-        </p:txBody>
-      </p:sp>
-      <p:sp>
-        <p:nvSpPr>
-          <p:cNvPr id="4" name="Text 2"/>
-          <p:cNvSpPr/>
-          <p:nvPr/>
-        </p:nvSpPr>
-        <p:spPr>
-          <a:xfrm>
-            <a:off x="609600" y="609600"/>
-            <a:ext cx="8083296" cy="411361"/>
-          </a:xfrm>
-          <a:prstGeom prst="rect">
-            <a:avLst/>
-          </a:prstGeom>
-          <a:noFill/>
-          <a:ln/>
-        </p:spPr>
-        <p:txBody>
-          <a:bodyPr wrap="square" lIns="0" tIns="0" rIns="0" bIns="0" rtlCol="0" anchor="t"/>
-          <a:lstStyle/>
-          <a:p>
-            <a:pPr>
-              <a:lnSpc>
-                <a:spcPts val="3240"/>
-              </a:lnSpc>
-            </a:pPr>
-            <a:r>
-              <a:rPr lang="en-US" sz="3600" b="1" dirty="0">
-                <a:solidFill>
-                  <a:srgbClr val="EC6A16"/>
-                </a:solidFill>
-                <a:latin typeface="Calibri"/>
-                <a:ea typeface="Calibri"/>
-                <a:cs typeface="Calibri"/>
-              </a:rPr>
-              <a:t>Resultados: Impacto de Negocio</a:t>
-            </a:r>
-          </a:p>
-        </p:txBody>
-      </p:sp>
-      <p:sp>
-        <p:nvSpPr>
-          <p:cNvPr id="5" name="Text 3"/>
-          <p:cNvSpPr/>
-          <p:nvPr/>
-        </p:nvSpPr>
-        <p:spPr>
-          <a:xfrm>
-            <a:off x="914400" y="1554361"/>
-            <a:ext cx="7461504" cy="274290"/>
-          </a:xfrm>
-          <a:prstGeom prst="rect">
-            <a:avLst/>
-          </a:prstGeom>
-          <a:noFill/>
-          <a:ln/>
-        </p:spPr>
-        <p:txBody>
-          <a:bodyPr wrap="square" lIns="0" tIns="0" rIns="0" bIns="0" rtlCol="0" anchor="t"/>
-          <a:lstStyle/>
-          <a:p>
-            <a:pPr marL="0" indent="0">
-              <a:lnSpc>
-                <a:spcPts val="2160"/>
-              </a:lnSpc>
-              <a:buNone/>
-            </a:pPr>
-            <a:endParaRPr lang="en-US" sz="1800" dirty="0"/>
-            <a:r>
-              <a:rPr lang="en-US" sz="1800" b="1" dirty="0">
-                <a:solidFill>
-                  <a:srgbClr val="0284C7"/>
-                </a:solidFill>
-                <a:latin typeface="Arial" pitchFamily="34" charset="0"/>
-                <a:ea typeface="Arial" pitchFamily="34" charset="-122"/>
-                <a:cs typeface="Arial" pitchFamily="34" charset="-120"/>
-              </a:rPr>
-              <a:t>El score como herramienta de priorización</a:t>
-            </a:r>
-          </a:p>
-        </p:txBody>
-      </p:sp>
-      <p:sp>
-        <p:nvSpPr>
-          <p:cNvPr id="6" name="Text 4"/>
-          <p:cNvSpPr/>
-          <p:nvPr/>
-        </p:nvSpPr>
-        <p:spPr>
-          <a:xfrm>
-            <a:off x="914400" y="1981051"/>
-            <a:ext cx="7461504" cy="213271"/>
-          </a:xfrm>
-          <a:prstGeom prst="rect">
-            <a:avLst/>
-          </a:prstGeom>
-          <a:noFill/>
-          <a:ln/>
-        </p:spPr>
-        <p:txBody>
-          <a:bodyPr wrap="square" lIns="0" tIns="0" rIns="0" bIns="0" rtlCol="0" anchor="t"/>
-          <a:lstStyle/>
-          <a:p>
-            <a:pPr marL="0" indent="0">
-              <a:lnSpc>
-                <a:spcPts val="1680"/>
-              </a:lnSpc>
-              <a:buNone/>
-            </a:pPr>
-            <a:endParaRPr lang="en-US" sz="1200" dirty="0"/>
-            <a:r>
-              <a:rPr lang="en-US" sz="1200" dirty="0">
-                <a:solidFill>
-                  <a:srgbClr val="475569"/>
-                </a:solidFill>
-                <a:latin typeface="Arial" pitchFamily="34" charset="0"/>
-                <a:ea typeface="Arial" pitchFamily="34" charset="-122"/>
-                <a:cs typeface="Arial" pitchFamily="34" charset="-120"/>
-              </a:rPr>
-              <a:t>En vez de contactar a todos los clientes por igual, marketing puede ordenar la base por score de recompra y enfocar el presupuesto en el extremo superior.</a:t>
-            </a:r>
-          </a:p>
-        </p:txBody>
-      </p:sp>
-      <p:sp>
-        <p:nvSpPr>
-          <p:cNvPr id="7" name="Text 5"/>
-          <p:cNvSpPr/>
-          <p:nvPr/>
-        </p:nvSpPr>
-        <p:spPr>
-          <a:xfrm>
-            <a:off x="914400" y="3589139"/>
-            <a:ext cx="7461504" cy="274290"/>
-          </a:xfrm>
-          <a:prstGeom prst="rect">
-            <a:avLst/>
-          </a:prstGeom>
-          <a:noFill/>
-          <a:ln/>
-        </p:spPr>
-        <p:txBody>
-          <a:bodyPr wrap="square" lIns="0" tIns="0" rIns="0" bIns="0" rtlCol="0" anchor="t"/>
-          <a:lstStyle/>
-          <a:p>
-            <a:pPr marL="0" indent="0">
-              <a:lnSpc>
-                <a:spcPts val="2160"/>
-              </a:lnSpc>
-              <a:buNone/>
-            </a:pPr>
-            <a:endParaRPr lang="en-US" sz="1800" dirty="0"/>
-            <a:r>
-              <a:rPr lang="en-US" sz="1800" b="1" dirty="0">
-                <a:solidFill>
-                  <a:srgbClr val="0284C7"/>
-                </a:solidFill>
-                <a:latin typeface="Arial" pitchFamily="34" charset="0"/>
-                <a:ea typeface="Arial" pitchFamily="34" charset="-122"/>
-                <a:cs typeface="Arial" pitchFamily="34" charset="-120"/>
-              </a:rPr>
-              <a:t>Lift de 2.27x en el decil superior</a:t>
-            </a:r>
-          </a:p>
-        </p:txBody>
-      </p:sp>
-      <p:sp>
-        <p:nvSpPr>
-          <p:cNvPr id="8" name="Text 6"/>
-          <p:cNvSpPr/>
-          <p:nvPr/>
-        </p:nvSpPr>
-        <p:spPr>
-          <a:xfrm>
-            <a:off x="914400" y="4015829"/>
-            <a:ext cx="7461504" cy="213271"/>
-          </a:xfrm>
-          <a:prstGeom prst="rect">
-            <a:avLst/>
-          </a:prstGeom>
-          <a:noFill/>
-          <a:ln/>
-        </p:spPr>
-        <p:txBody>
-          <a:bodyPr wrap="square" lIns="0" tIns="0" rIns="0" bIns="0" rtlCol="0" anchor="t"/>
-          <a:lstStyle/>
-          <a:p>
-            <a:pPr marL="0" indent="0">
-              <a:lnSpc>
-                <a:spcPts val="1680"/>
-              </a:lnSpc>
-              <a:buNone/>
-            </a:pPr>
-            <a:endParaRPr lang="en-US" sz="1200" dirty="0"/>
-            <a:r>
-              <a:rPr lang="en-US" sz="1200" dirty="0">
-                <a:solidFill>
-                  <a:srgbClr val="475569"/>
-                </a:solidFill>
-                <a:latin typeface="Arial" pitchFamily="34" charset="0"/>
-                <a:ea typeface="Arial" pitchFamily="34" charset="-122"/>
-                <a:cs typeface="Arial" pitchFamily="34" charset="-120"/>
-              </a:rPr>
-              <a:t>El 10% de clientes con mayor score recompra a una tasa 2.27 veces mayor que un contacto aleatorio — con el mismo presupuesto, se llega a más clientes que sí vuelven a comprar.</a:t>
             </a:r>
           </a:p>
         </p:txBody>
@@ -6177,814 +6173,6 @@
 
 <file path=ppt/slides/slide20.xml><?xml version="1.0" encoding="utf-8"?>
 <p:sld xmlns:a="http://schemas.openxmlformats.org/drawingml/2006/main" xmlns:r="http://schemas.openxmlformats.org/officeDocument/2006/relationships" xmlns:p="http://schemas.openxmlformats.org/presentationml/2006/main">
-  <p:cSld name="Slide 10">
-    <p:spTree>
-      <p:nvGrpSpPr>
-        <p:cNvPr id="1" name=""/>
-        <p:cNvGrpSpPr/>
-        <p:nvPr/>
-      </p:nvGrpSpPr>
-      <p:grpSpPr>
-        <a:xfrm>
-          <a:off x="0" y="0"/>
-          <a:ext cx="0" cy="0"/>
-          <a:chOff x="0" y="0"/>
-          <a:chExt cx="0" cy="0"/>
-        </a:xfrm>
-      </p:grpSpPr>
-      <p:sp>
-        <p:nvSpPr>
-          <p:cNvPr id="2" name="Text 0"/>
-          <p:cNvSpPr/>
-          <p:nvPr/>
-        </p:nvSpPr>
-        <p:spPr>
-          <a:xfrm>
-            <a:off x="609600" y="609600"/>
-            <a:ext cx="8083296" cy="411361"/>
-          </a:xfrm>
-          <a:prstGeom prst="rect">
-            <a:avLst/>
-          </a:prstGeom>
-          <a:noFill/>
-          <a:ln/>
-        </p:spPr>
-        <p:txBody>
-          <a:bodyPr wrap="square" lIns="0" tIns="0" rIns="0" bIns="0" rtlCol="0" anchor="t"/>
-          <a:lstStyle/>
-          <a:p>
-            <a:pPr>
-              <a:lnSpc>
-                <a:spcPts val="3240"/>
-              </a:lnSpc>
-            </a:pPr>
-            <a:r>
-              <a:rPr lang="en-US" sz="3600" b="1" dirty="0">
-                <a:solidFill>
-                  <a:srgbClr val="EC6A16"/>
-                </a:solidFill>
-                <a:latin typeface="Calibri"/>
-                <a:ea typeface="Calibri"/>
-                <a:cs typeface="Calibri"/>
-              </a:rPr>
-              <a:t>Resultados: Qué Aprendió el Modelo</a:t>
-            </a:r>
-          </a:p>
-        </p:txBody>
-      </p:sp>
-      <p:sp>
-        <p:nvSpPr>
-          <p:cNvPr id="3" name="Text 1"/>
-          <p:cNvSpPr/>
-          <p:nvPr/>
-        </p:nvSpPr>
-        <p:spPr>
-          <a:xfrm>
-            <a:off x="914400" y="1252728"/>
-            <a:ext cx="7620000" cy="2880360"/>
-          </a:xfrm>
-          <a:prstGeom prst="rect">
-            <a:avLst/>
-          </a:prstGeom>
-          <a:noFill/>
-          <a:ln/>
-        </p:spPr>
-        <p:txBody>
-          <a:bodyPr wrap="square" lIns="0" tIns="0" rIns="0" bIns="0" rtlCol="0" anchor="t"/>
-          <a:lstStyle/>
-          <a:p>
-            <a:pPr marL="342900" indent="-342900">
-              <a:lnSpc>
-                <a:spcPts val="2160"/>
-              </a:lnSpc>
-              <a:buSzPct val="100000"/>
-              <a:buChar char="•"/>
-            </a:pPr>
-            <a:endParaRPr lang="en-US" sz="1200" dirty="0"/>
-            <a:r>
-              <a:rPr lang="en-US" sz="1200" b="1" dirty="0">
-                <a:solidFill>
-                  <a:srgbClr val="475569"/>
-                </a:solidFill>
-                <a:latin typeface="Arial" pitchFamily="34" charset="0"/>
-                <a:ea typeface="Arial" pitchFamily="34" charset="-122"/>
-                <a:cs typeface="Arial" pitchFamily="34" charset="-120"/>
-              </a:rPr>
-              <a:t>Valor y forma de pago del pedido (cuotas máximas, precio por ítem, precio total) son las señales más influyentes — más que cualquier otra dimensión.</a:t>
-            </a:r>
-          </a:p>
-          <a:p>
-            <a:pPr marL="342900" indent="-342900">
-              <a:lnSpc>
-                <a:spcPts val="2160"/>
-              </a:lnSpc>
-              <a:buSzPct val="100000"/>
-              <a:buChar char="•"/>
-            </a:pPr>
-            <a:endParaRPr lang="en-US" sz="1200" dirty="0"/>
-            <a:r>
-              <a:rPr lang="en-US" sz="1200" b="1" dirty="0">
-                <a:solidFill>
-                  <a:srgbClr val="475569"/>
-                </a:solidFill>
-                <a:latin typeface="Arial" pitchFamily="34" charset="0"/>
-                <a:ea typeface="Arial" pitchFamily="34" charset="-122"/>
-                <a:cs typeface="Arial" pitchFamily="34" charset="-120"/>
-              </a:rPr>
-              <a:t>Le siguen flete y tiempos de entrega/aprobación: la experiencia logística del primer pedido sí deja huella en la probabilidad de recompra.</a:t>
-            </a:r>
-          </a:p>
-          <a:p>
-            <a:pPr marL="342900" indent="-342900">
-              <a:lnSpc>
-                <a:spcPts val="2160"/>
-              </a:lnSpc>
-              <a:buSzPct val="100000"/>
-              <a:buChar char="•"/>
-            </a:pPr>
-            <a:endParaRPr lang="en-US" sz="1200" dirty="0"/>
-            <a:r>
-              <a:rPr lang="en-US" sz="1200" b="1" dirty="0">
-                <a:solidFill>
-                  <a:srgbClr val="475569"/>
-                </a:solidFill>
-                <a:latin typeface="Arial" pitchFamily="34" charset="0"/>
-                <a:ea typeface="Arial" pitchFamily="34" charset="-122"/>
-                <a:cs typeface="Arial" pitchFamily="34" charset="-120"/>
-              </a:rPr>
-              <a:t>Algunas categorías de producto (deportes/ocio, muebles/decoración) aportan señal adicional, aunque menor.</a:t>
-            </a:r>
-          </a:p>
-          <a:p>
-            <a:pPr marL="342900" indent="-342900">
-              <a:lnSpc>
-                <a:spcPts val="2160"/>
-              </a:lnSpc>
-              <a:buSzPct val="100000"/>
-              <a:buChar char="•"/>
-            </a:pPr>
-            <a:endParaRPr lang="en-US" sz="1200" dirty="0"/>
-            <a:r>
-              <a:rPr lang="en-US" sz="1200" b="1" dirty="0">
-                <a:solidFill>
-                  <a:srgbClr val="475569"/>
-                </a:solidFill>
-                <a:latin typeface="Arial" pitchFamily="34" charset="0"/>
-                <a:ea typeface="Arial" pitchFamily="34" charset="-122"/>
-                <a:cs typeface="Arial" pitchFamily="34" charset="-120"/>
-              </a:rPr>
-              <a:t>Ni review_score ni customer_state figuran entre las 15 variables más influyentes — consistente con el EDA: ni la satisfacción declarada ni la geografía son drivers individuales fuertes.</a:t>
-            </a:r>
-          </a:p>
-          <a:p>
-            <a:pPr marL="342900" indent="-342900">
-              <a:lnSpc>
-                <a:spcPts val="2160"/>
-              </a:lnSpc>
-              <a:buSzPct val="100000"/>
-              <a:buChar char="•"/>
-            </a:pPr>
-            <a:endParaRPr lang="en-US" sz="1200" dirty="0"/>
-            <a:r>
-              <a:rPr lang="en-US" sz="1200" b="1" dirty="0">
-                <a:solidFill>
-                  <a:srgbClr val="475569"/>
-                </a:solidFill>
-                <a:latin typeface="Arial" pitchFamily="34" charset="0"/>
-                <a:ea typeface="Arial" pitchFamily="34" charset="-122"/>
-                <a:cs typeface="Arial" pitchFamily="34" charset="-120"/>
-              </a:rPr>
-              <a:t>El modelo aprende de un conjunto amplio de señales débiles combinadas, no de una variable dominante — igual que mostró el EDA.</a:t>
-            </a:r>
-          </a:p>
-        </p:txBody>
-      </p:sp>
-    </p:spTree>
-  </p:cSld>
-  <p:clrMapOvr>
-    <a:masterClrMapping/>
-  </p:clrMapOvr>
-</p:sld>
-</file>
-
-<file path=ppt/slides/slide21.xml><?xml version="1.0" encoding="utf-8"?>
-<p:sld xmlns:a="http://schemas.openxmlformats.org/drawingml/2006/main" xmlns:r="http://schemas.openxmlformats.org/officeDocument/2006/relationships" xmlns:p="http://schemas.openxmlformats.org/presentationml/2006/main">
-  <p:cSld name="Slide 3">
-    <p:spTree>
-      <p:nvGrpSpPr>
-        <p:cNvPr id="1" name=""/>
-        <p:cNvGrpSpPr/>
-        <p:nvPr/>
-      </p:nvGrpSpPr>
-      <p:grpSpPr>
-        <a:xfrm>
-          <a:off x="0" y="0"/>
-          <a:ext cx="0" cy="0"/>
-          <a:chOff x="0" y="0"/>
-          <a:chExt cx="0" cy="0"/>
-        </a:xfrm>
-      </p:grpSpPr>
-      <p:sp>
-        <p:nvSpPr>
-          <p:cNvPr id="2" name="Text 0"/>
-          <p:cNvSpPr/>
-          <p:nvPr/>
-        </p:nvSpPr>
-        <p:spPr>
-          <a:xfrm>
-            <a:off x="609600" y="609600"/>
-            <a:ext cx="8083296" cy="411361"/>
-          </a:xfrm>
-          <a:prstGeom prst="rect">
-            <a:avLst/>
-          </a:prstGeom>
-          <a:noFill/>
-          <a:ln/>
-        </p:spPr>
-        <p:txBody>
-          <a:bodyPr wrap="square" lIns="0" tIns="0" rIns="0" bIns="0" rtlCol="0" anchor="t"/>
-          <a:lstStyle/>
-          <a:p>
-            <a:pPr marL="0" indent="0">
-              <a:lnSpc>
-                <a:spcPts val="3240"/>
-              </a:lnSpc>
-              <a:buNone/>
-            </a:pPr>
-            <a:r>
-              <a:rPr lang="en-US" sz="3600" b="1" dirty="0">
-                <a:solidFill>
-                  <a:srgbClr val="EC6A16"/>
-                </a:solidFill>
-                <a:latin typeface="Calibri"/>
-                <a:ea typeface="Calibri"/>
-                <a:cs typeface="Calibri"/>
-              </a:rPr>
-              <a:t>Resultados: Límites y Casos Atípicos</a:t>
-            </a:r>
-          </a:p>
-        </p:txBody>
-      </p:sp>
-      <p:sp>
-        <p:nvSpPr>
-          <p:cNvPr id="3" name="Text 1"/>
-          <p:cNvSpPr/>
-          <p:nvPr/>
-        </p:nvSpPr>
-        <p:spPr>
-          <a:xfrm>
-            <a:off x="609600" y="1252728"/>
-            <a:ext cx="8083296" cy="239911"/>
-          </a:xfrm>
-          <a:prstGeom prst="rect">
-            <a:avLst/>
-          </a:prstGeom>
-          <a:noFill/>
-          <a:ln/>
-        </p:spPr>
-        <p:txBody>
-          <a:bodyPr wrap="square" lIns="0" tIns="0" rIns="0" bIns="0" rtlCol="0" anchor="t"/>
-          <a:lstStyle/>
-          <a:p>
-            <a:pPr marL="0" indent="0">
-              <a:lnSpc>
-                <a:spcPts val="1890"/>
-              </a:lnSpc>
-              <a:buNone/>
-            </a:pPr>
-            <a:endParaRPr lang="en-US" sz="1350" dirty="0"/>
-            <a:r>
-              <a:rPr lang="en-US" sz="1350" dirty="0">
-                <a:solidFill>
-                  <a:srgbClr val="475569"/>
-                </a:solidFill>
-                <a:latin typeface="Arial" pitchFamily="34" charset="0"/>
-                <a:ea typeface="Arial" pitchFamily="34" charset="-122"/>
-                <a:cs typeface="Arial" pitchFamily="34" charset="-120"/>
-              </a:rPr>
-              <a:t>Errores típicos:</a:t>
-            </a:r>
-          </a:p>
-        </p:txBody>
-      </p:sp>
-      <p:sp>
-        <p:nvSpPr>
-          <p:cNvPr id="4" name="Text 2"/>
-          <p:cNvSpPr/>
-          <p:nvPr/>
-        </p:nvSpPr>
-        <p:spPr>
-          <a:xfrm>
-            <a:off x="609600" y="1645920"/>
-            <a:ext cx="8083296" cy="393192"/>
-          </a:xfrm>
-          <a:prstGeom prst="rect">
-            <a:avLst/>
-          </a:prstGeom>
-          <a:noFill/>
-          <a:ln/>
-        </p:spPr>
-        <p:txBody>
-          <a:bodyPr wrap="square" lIns="0" tIns="0" rIns="0" bIns="0" rtlCol="0" anchor="t"/>
-          <a:lstStyle/>
-          <a:p>
-            <a:pPr marL="0" indent="0">
-              <a:lnSpc>
-                <a:spcPts val="1680"/>
-              </a:lnSpc>
-              <a:buNone/>
-            </a:pPr>
-            <a:endParaRPr lang="en-US" sz="1200" dirty="0"/>
-            <a:r>
-              <a:rPr lang="en-US" sz="1200" dirty="0">
-                <a:solidFill>
-                  <a:srgbClr val="475569"/>
-                </a:solidFill>
-                <a:latin typeface="Arial" pitchFamily="34" charset="0"/>
-                <a:ea typeface="Arial" pitchFamily="34" charset="-122"/>
-                <a:cs typeface="Arial" pitchFamily="34" charset="-120"/>
-              </a:rPr>
-              <a:t>El modelo pierde precisión en pedidos atípicos: muy pocos ítems, categoría poco frecuente o combinaciones de pago inusuales — casos con poca base histórica similar.</a:t>
-            </a:r>
-          </a:p>
-        </p:txBody>
-      </p:sp>
-      <p:sp>
-        <p:nvSpPr>
-          <p:cNvPr id="5" name="Text 3"/>
-          <p:cNvSpPr/>
-          <p:nvPr/>
-        </p:nvSpPr>
-        <p:spPr>
-          <a:xfrm>
-            <a:off x="609600" y="2267712"/>
-            <a:ext cx="8083296" cy="239911"/>
-          </a:xfrm>
-          <a:prstGeom prst="rect">
-            <a:avLst/>
-          </a:prstGeom>
-          <a:noFill/>
-          <a:ln/>
-        </p:spPr>
-        <p:txBody>
-          <a:bodyPr wrap="square" lIns="0" tIns="0" rIns="0" bIns="0" rtlCol="0" anchor="t"/>
-          <a:lstStyle/>
-          <a:p>
-            <a:pPr marL="0" indent="0">
-              <a:lnSpc>
-                <a:spcPts val="1890"/>
-              </a:lnSpc>
-              <a:buNone/>
-            </a:pPr>
-            <a:endParaRPr lang="en-US" sz="1350" dirty="0"/>
-            <a:r>
-              <a:rPr lang="en-US" sz="1350" dirty="0">
-                <a:solidFill>
-                  <a:srgbClr val="475569"/>
-                </a:solidFill>
-                <a:latin typeface="Arial" pitchFamily="34" charset="0"/>
-                <a:ea typeface="Arial" pitchFamily="34" charset="-122"/>
-                <a:cs typeface="Arial" pitchFamily="34" charset="-120"/>
-              </a:rPr>
-              <a:t>Desempeño por subgrupo:</a:t>
-            </a:r>
-          </a:p>
-        </p:txBody>
-      </p:sp>
-      <p:sp>
-        <p:nvSpPr>
-          <p:cNvPr id="6" name="Text 4"/>
-          <p:cNvSpPr/>
-          <p:nvPr/>
-        </p:nvSpPr>
-        <p:spPr>
-          <a:xfrm>
-            <a:off x="609600" y="2660904"/>
-            <a:ext cx="8083296" cy="393192"/>
-          </a:xfrm>
-          <a:prstGeom prst="rect">
-            <a:avLst/>
-          </a:prstGeom>
-          <a:noFill/>
-          <a:ln/>
-        </p:spPr>
-        <p:txBody>
-          <a:bodyPr wrap="square" lIns="0" tIns="0" rIns="0" bIns="0" rtlCol="0" anchor="t"/>
-          <a:lstStyle/>
-          <a:p>
-            <a:pPr marL="0" indent="0">
-              <a:lnSpc>
-                <a:spcPts val="1680"/>
-              </a:lnSpc>
-              <a:buNone/>
-            </a:pPr>
-            <a:endParaRPr lang="en-US" sz="1200" dirty="0"/>
-            <a:r>
-              <a:rPr lang="en-US" sz="1200" dirty="0">
-                <a:solidFill>
-                  <a:srgbClr val="475569"/>
-                </a:solidFill>
-                <a:latin typeface="Arial" pitchFamily="34" charset="0"/>
-                <a:ea typeface="Arial" pitchFamily="34" charset="-122"/>
-                <a:cs typeface="Arial" pitchFamily="34" charset="-120"/>
-              </a:rPr>
-              <a:t>Sin degradación sistemática por categoría o customer_state, pero el volumen por subgrupo es limitado — estas estimaciones son orientativas, no concluyentes.</a:t>
-            </a:r>
-          </a:p>
-        </p:txBody>
-      </p:sp>
-      <p:sp>
-        <p:nvSpPr>
-          <p:cNvPr id="7" name="Text 5"/>
-          <p:cNvSpPr/>
-          <p:nvPr/>
-        </p:nvSpPr>
-        <p:spPr>
-          <a:xfrm>
-            <a:off x="609600" y="3282696"/>
-            <a:ext cx="8083296" cy="239911"/>
-          </a:xfrm>
-          <a:prstGeom prst="rect">
-            <a:avLst/>
-          </a:prstGeom>
-          <a:noFill/>
-          <a:ln/>
-        </p:spPr>
-        <p:txBody>
-          <a:bodyPr wrap="square" lIns="0" tIns="0" rIns="0" bIns="0" rtlCol="0" anchor="t"/>
-          <a:lstStyle/>
-          <a:p>
-            <a:pPr marL="0" indent="0">
-              <a:lnSpc>
-                <a:spcPts val="1890"/>
-              </a:lnSpc>
-              <a:buNone/>
-            </a:pPr>
-            <a:endParaRPr lang="en-US" sz="1350" dirty="0"/>
-            <a:r>
-              <a:rPr lang="en-US" sz="1350" dirty="0">
-                <a:solidFill>
-                  <a:srgbClr val="475569"/>
-                </a:solidFill>
-                <a:latin typeface="Arial" pitchFamily="34" charset="0"/>
-                <a:ea typeface="Arial" pitchFamily="34" charset="-122"/>
-                <a:cs typeface="Arial" pitchFamily="34" charset="-120"/>
-              </a:rPr>
-              <a:t>Qué NO puede capturar el modelo:</a:t>
-            </a:r>
-          </a:p>
-        </p:txBody>
-      </p:sp>
-      <p:sp>
-        <p:nvSpPr>
-          <p:cNvPr id="8" name="Text 6"/>
-          <p:cNvSpPr/>
-          <p:nvPr/>
-        </p:nvSpPr>
-        <p:spPr>
-          <a:xfrm>
-            <a:off x="609600" y="3675888"/>
-            <a:ext cx="8083296" cy="393192"/>
-          </a:xfrm>
-          <a:prstGeom prst="rect">
-            <a:avLst/>
-          </a:prstGeom>
-          <a:noFill/>
-          <a:ln/>
-        </p:spPr>
-        <p:txBody>
-          <a:bodyPr wrap="square" lIns="0" tIns="0" rIns="0" bIns="0" rtlCol="0" anchor="t"/>
-          <a:lstStyle/>
-          <a:p>
-            <a:pPr marL="0" indent="0">
-              <a:lnSpc>
-                <a:spcPts val="1680"/>
-              </a:lnSpc>
-              <a:buNone/>
-            </a:pPr>
-            <a:endParaRPr lang="en-US" sz="1200" dirty="0"/>
-            <a:r>
-              <a:rPr lang="en-US" sz="1200" dirty="0">
-                <a:solidFill>
-                  <a:srgbClr val="475569"/>
-                </a:solidFill>
-                <a:latin typeface="Arial" pitchFamily="34" charset="0"/>
-                <a:ea typeface="Arial" pitchFamily="34" charset="-122"/>
-                <a:cs typeface="Arial" pitchFamily="34" charset="-120"/>
-              </a:rPr>
-              <a:t>Factores fuera del dataset —competencia, necesidad real del producto, campañas externas— probablemente explican buena parte de lo que el modelo no captura.</a:t>
-            </a:r>
-          </a:p>
-        </p:txBody>
-      </p:sp>
-    </p:spTree>
-  </p:cSld>
-  <p:clrMapOvr>
-    <a:masterClrMapping/>
-  </p:clrMapOvr>
-</p:sld>
-</file>
-
-<file path=ppt/slides/slide22.xml><?xml version="1.0" encoding="utf-8"?>
-<p:sld xmlns:a="http://schemas.openxmlformats.org/drawingml/2006/main" xmlns:r="http://schemas.openxmlformats.org/officeDocument/2006/relationships" xmlns:p="http://schemas.openxmlformats.org/presentationml/2006/main">
-  <p:cSld name="Slide 9">
-    <p:spTree>
-      <p:nvGrpSpPr>
-        <p:cNvPr id="1" name=""/>
-        <p:cNvGrpSpPr/>
-        <p:nvPr/>
-      </p:nvGrpSpPr>
-      <p:grpSpPr>
-        <a:xfrm>
-          <a:off x="0" y="0"/>
-          <a:ext cx="0" cy="0"/>
-          <a:chOff x="0" y="0"/>
-          <a:chExt cx="0" cy="0"/>
-        </a:xfrm>
-      </p:grpSpPr>
-      <p:sp>
-        <p:nvSpPr>
-          <p:cNvPr id="2" name="Text 0"/>
-          <p:cNvSpPr/>
-          <p:nvPr/>
-        </p:nvSpPr>
-        <p:spPr>
-          <a:xfrm>
-            <a:off x="609600" y="609600"/>
-            <a:ext cx="8083296" cy="411361"/>
-          </a:xfrm>
-          <a:prstGeom prst="rect">
-            <a:avLst/>
-          </a:prstGeom>
-          <a:noFill/>
-          <a:ln/>
-        </p:spPr>
-        <p:txBody>
-          <a:bodyPr wrap="square" lIns="0" tIns="0" rIns="0" bIns="0" rtlCol="0" anchor="t"/>
-          <a:lstStyle/>
-          <a:p>
-            <a:pPr indent="0">
-              <a:lnSpc>
-                <a:spcPts val="3240"/>
-              </a:lnSpc>
-              <a:buNone/>
-            </a:pPr>
-            <a:r>
-              <a:rPr lang="en-US" sz="3600" b="1" dirty="0">
-                <a:solidFill>
-                  <a:srgbClr val="EC6A16"/>
-                </a:solidFill>
-                <a:latin typeface="Calibri"/>
-                <a:ea typeface="Calibri"/>
-                <a:cs typeface="Calibri"/>
-              </a:rPr>
-              <a:t>Segmentación RFM: Hallazgos</a:t>
-            </a:r>
-          </a:p>
-        </p:txBody>
-      </p:sp>
-      <p:sp>
-        <p:nvSpPr>
-          <p:cNvPr id="3" name="Text 1"/>
-          <p:cNvSpPr/>
-          <p:nvPr/>
-        </p:nvSpPr>
-        <p:spPr>
-          <a:xfrm>
-            <a:off x="609600" y="1252728"/>
-            <a:ext cx="8083296" cy="239911"/>
-          </a:xfrm>
-          <a:prstGeom prst="rect">
-            <a:avLst/>
-          </a:prstGeom>
-          <a:noFill/>
-          <a:ln/>
-        </p:spPr>
-        <p:txBody>
-          <a:bodyPr wrap="square" lIns="0" tIns="0" rIns="0" bIns="0" rtlCol="0" anchor="t"/>
-          <a:lstStyle/>
-          <a:p>
-            <a:pPr marL="0" indent="0">
-              <a:lnSpc>
-                <a:spcPts val="1890"/>
-              </a:lnSpc>
-              <a:buNone/>
-            </a:pPr>
-            <a:endParaRPr lang="en-US" sz="1350" dirty="0"/>
-            <a:r>
-              <a:rPr lang="en-US" sz="1350" dirty="0">
-                <a:solidFill>
-                  <a:srgbClr val="475569"/>
-                </a:solidFill>
-                <a:latin typeface="Arial" pitchFamily="34" charset="0"/>
-                <a:ea typeface="Arial" pitchFamily="34" charset="-122"/>
-                <a:cs typeface="Arial" pitchFamily="34" charset="-120"/>
-              </a:rPr>
-              <a:t>Los 4 segmentos (93,358 clientes):</a:t>
-            </a:r>
-          </a:p>
-        </p:txBody>
-      </p:sp>
-      <p:sp>
-        <p:nvSpPr>
-          <p:cNvPr id="4" name="Text 2"/>
-          <p:cNvSpPr/>
-          <p:nvPr/>
-        </p:nvSpPr>
-        <p:spPr>
-          <a:xfrm>
-            <a:off x="914400" y="1645920"/>
-            <a:ext cx="7620000" cy="1609344"/>
-          </a:xfrm>
-          <a:prstGeom prst="rect">
-            <a:avLst/>
-          </a:prstGeom>
-          <a:noFill/>
-          <a:ln/>
-        </p:spPr>
-        <p:txBody>
-          <a:bodyPr wrap="square" lIns="0" tIns="0" rIns="0" bIns="0" rtlCol="0" anchor="t"/>
-          <a:lstStyle/>
-          <a:p>
-            <a:pPr marL="342900" indent="-342900">
-              <a:lnSpc>
-                <a:spcPts val="2160"/>
-              </a:lnSpc>
-              <a:buSzPct val="100000"/>
-              <a:buChar char="•"/>
-            </a:pPr>
-            <a:endParaRPr lang="en-US" sz="1200" dirty="0"/>
-            <a:r>
-              <a:rPr lang="en-US" sz="1200" b="1" dirty="0">
-                <a:solidFill>
-                  <a:srgbClr val="475569"/>
-                </a:solidFill>
-                <a:latin typeface="Arial" pitchFamily="34" charset="0"/>
-                <a:ea typeface="Arial" pitchFamily="34" charset="-122"/>
-                <a:cs typeface="Arial" pitchFamily="34" charset="-120"/>
-              </a:rPr>
-              <a:t>Premium recientes (34.7%): monto promedio más alto ($251) — la base más valiosa hoy.</a:t>
-            </a:r>
-          </a:p>
-          <a:p>
-            <a:pPr marL="342900" indent="-342900">
-              <a:lnSpc>
-                <a:spcPts val="2160"/>
-              </a:lnSpc>
-              <a:buSzPct val="100000"/>
-              <a:buChar char="•"/>
-            </a:pPr>
-            <a:endParaRPr lang="en-US" sz="1200" dirty="0"/>
-            <a:r>
-              <a:rPr lang="en-US" sz="1200" b="1" dirty="0">
-                <a:solidFill>
-                  <a:srgbClr val="475569"/>
-                </a:solidFill>
-                <a:latin typeface="Arial" pitchFamily="34" charset="0"/>
-                <a:ea typeface="Arial" pitchFamily="34" charset="-122"/>
-                <a:cs typeface="Arial" pitchFamily="34" charset="-120"/>
-              </a:rPr>
-              <a:t>Bajo ticket reciente (33.2%): activos pero de bajo monto ($44) — oportunidad de upsell.</a:t>
-            </a:r>
-          </a:p>
-          <a:p>
-            <a:pPr marL="342900" indent="-342900">
-              <a:lnSpc>
-                <a:spcPts val="2160"/>
-              </a:lnSpc>
-              <a:buSzPct val="100000"/>
-              <a:buChar char="•"/>
-            </a:pPr>
-            <a:endParaRPr lang="en-US" sz="1200" dirty="0"/>
-            <a:r>
-              <a:rPr lang="en-US" sz="1200" b="1" dirty="0">
-                <a:solidFill>
-                  <a:srgbClr val="475569"/>
-                </a:solidFill>
-                <a:latin typeface="Arial" pitchFamily="34" charset="0"/>
-                <a:ea typeface="Arial" pitchFamily="34" charset="-122"/>
-                <a:cs typeface="Arial" pitchFamily="34" charset="-120"/>
-              </a:rPr>
-              <a:t>En riesgo/bajo valor (29.1%): recencia ~426 días, el más numeroso en riesgo de churn total.</a:t>
-            </a:r>
-          </a:p>
-          <a:p>
-            <a:pPr marL="342900" indent="-342900">
-              <a:lnSpc>
-                <a:spcPts val="2160"/>
-              </a:lnSpc>
-              <a:buSzPct val="100000"/>
-              <a:buChar char="•"/>
-            </a:pPr>
-            <a:endParaRPr lang="en-US" sz="1200" dirty="0"/>
-            <a:r>
-              <a:rPr lang="en-US" sz="1200" b="1" dirty="0">
-                <a:solidFill>
-                  <a:srgbClr val="475569"/>
-                </a:solidFill>
-                <a:latin typeface="Arial" pitchFamily="34" charset="0"/>
-                <a:ea typeface="Arial" pitchFamily="34" charset="-122"/>
-                <a:cs typeface="Arial" pitchFamily="34" charset="-120"/>
-              </a:rPr>
-              <a:t>Recompradores (3.0%): único con frecuencia &gt;1 — el objetivo de referencia del modelo.</a:t>
-            </a:r>
-          </a:p>
-        </p:txBody>
-      </p:sp>
-      <p:sp>
-        <p:nvSpPr>
-          <p:cNvPr id="5" name="Text 3"/>
-          <p:cNvSpPr/>
-          <p:nvPr/>
-        </p:nvSpPr>
-        <p:spPr>
-          <a:xfrm>
-            <a:off x="609600" y="3483864"/>
-            <a:ext cx="8083296" cy="239911"/>
-          </a:xfrm>
-          <a:prstGeom prst="rect">
-            <a:avLst/>
-          </a:prstGeom>
-          <a:noFill/>
-          <a:ln/>
-        </p:spPr>
-        <p:txBody>
-          <a:bodyPr wrap="square" lIns="0" tIns="0" rIns="0" bIns="0" rtlCol="0" anchor="t"/>
-          <a:lstStyle/>
-          <a:p>
-            <a:pPr marL="0" indent="0">
-              <a:lnSpc>
-                <a:spcPts val="1890"/>
-              </a:lnSpc>
-              <a:buNone/>
-            </a:pPr>
-            <a:endParaRPr lang="en-US" sz="1350" dirty="0"/>
-            <a:r>
-              <a:rPr lang="en-US" sz="1350" dirty="0">
-                <a:solidFill>
-                  <a:srgbClr val="475569"/>
-                </a:solidFill>
-                <a:latin typeface="Arial" pitchFamily="34" charset="0"/>
-                <a:ea typeface="Arial" pitchFamily="34" charset="-122"/>
-                <a:cs typeface="Arial" pitchFamily="34" charset="-120"/>
-              </a:rPr>
-              <a:t>Prioridad de negocio:</a:t>
-            </a:r>
-          </a:p>
-        </p:txBody>
-      </p:sp>
-      <p:sp>
-        <p:nvSpPr>
-          <p:cNvPr id="6" name="Text 4"/>
-          <p:cNvSpPr/>
-          <p:nvPr/>
-        </p:nvSpPr>
-        <p:spPr>
-          <a:xfrm>
-            <a:off x="609600" y="3877056"/>
-            <a:ext cx="8083296" cy="393192"/>
-          </a:xfrm>
-          <a:prstGeom prst="rect">
-            <a:avLst/>
-          </a:prstGeom>
-          <a:noFill/>
-          <a:ln/>
-        </p:spPr>
-        <p:txBody>
-          <a:bodyPr wrap="square" lIns="0" tIns="0" rIns="0" bIns="0" rtlCol="0" anchor="t"/>
-          <a:lstStyle/>
-          <a:p>
-            <a:pPr marL="0" indent="0">
-              <a:lnSpc>
-                <a:spcPts val="1680"/>
-              </a:lnSpc>
-              <a:buNone/>
-            </a:pPr>
-            <a:endParaRPr lang="en-US" sz="1200" dirty="0"/>
-            <a:r>
-              <a:rPr lang="en-US" sz="1200" dirty="0">
-                <a:solidFill>
-                  <a:srgbClr val="475569"/>
-                </a:solidFill>
-                <a:latin typeface="Arial" pitchFamily="34" charset="0"/>
-                <a:ea typeface="Arial" pitchFamily="34" charset="-122"/>
-                <a:cs typeface="Arial" pitchFamily="34" charset="-120"/>
-              </a:rPr>
-              <a:t>El segmento 'en riesgo/bajo valor' es la mayor oportunidad de reactivación: es casi 10 veces más numeroso que los recompradores actuales.</a:t>
-            </a:r>
-          </a:p>
-        </p:txBody>
-      </p:sp>
-    </p:spTree>
-  </p:cSld>
-  <p:clrMapOvr>
-    <a:masterClrMapping/>
-  </p:clrMapOvr>
-</p:sld>
-</file>
-
-<file path=ppt/slides/slide23.xml><?xml version="1.0" encoding="utf-8"?>
-<p:sld xmlns:a="http://schemas.openxmlformats.org/drawingml/2006/main" xmlns:r="http://schemas.openxmlformats.org/officeDocument/2006/relationships" xmlns:p="http://schemas.openxmlformats.org/presentationml/2006/main">
   <p:cSld name="Slide 13">
     <p:spTree>
       <p:nvGrpSpPr>
@@ -7290,6 +6478,784 @@
               </a:rPr>
               <a:t>Señal predictiva débil: usar como insumo de priorización con supervisión humana, nunca como filtro automático de exclusión de campañas.</a:t>
             </a:r>
+          </a:p>
+        </p:txBody>
+      </p:sp>
+    </p:spTree>
+  </p:cSld>
+  <p:clrMapOvr>
+    <a:masterClrMapping/>
+  </p:clrMapOvr>
+</p:sld>
+</file>
+
+<file path=ppt/slides/slide21.xml><?xml version="1.0" encoding="utf-8"?>
+<p:sld xmlns:a="http://schemas.openxmlformats.org/drawingml/2006/main" xmlns:r="http://schemas.openxmlformats.org/officeDocument/2006/relationships" xmlns:p="http://schemas.openxmlformats.org/presentationml/2006/main">
+  <p:cSld name="Slide 14">
+    <p:spTree>
+      <p:nvGrpSpPr>
+        <p:cNvPr id="1" name=""/>
+        <p:cNvGrpSpPr/>
+        <p:nvPr/>
+      </p:nvGrpSpPr>
+      <p:grpSpPr>
+        <a:xfrm>
+          <a:off x="0" y="0"/>
+          <a:ext cx="0" cy="0"/>
+          <a:chOff x="0" y="0"/>
+          <a:chExt cx="0" cy="0"/>
+        </a:xfrm>
+      </p:grpSpPr>
+      <p:sp>
+        <p:nvSpPr>
+          <p:cNvPr id="2" name="Text 0"/>
+          <p:cNvSpPr/>
+          <p:nvPr/>
+        </p:nvSpPr>
+        <p:spPr>
+          <a:xfrm>
+            <a:off x="609600" y="609600"/>
+            <a:ext cx="8083296" cy="411361"/>
+          </a:xfrm>
+          <a:prstGeom prst="rect">
+            <a:avLst/>
+          </a:prstGeom>
+          <a:noFill/>
+          <a:ln/>
+        </p:spPr>
+        <p:txBody>
+          <a:bodyPr wrap="square" lIns="0" tIns="0" rIns="0" bIns="0" rtlCol="0" anchor="t"/>
+          <a:lstStyle/>
+          <a:p>
+            <a:pPr>
+              <a:lnSpc>
+                <a:spcPts val="3240"/>
+              </a:lnSpc>
+            </a:pPr>
+            <a:r>
+              <a:rPr lang="en-US" sz="3600" b="1" dirty="0">
+                <a:solidFill>
+                  <a:srgbClr val="EC6A16"/>
+                </a:solidFill>
+                <a:latin typeface="Calibri"/>
+                <a:ea typeface="Calibri"/>
+                <a:cs typeface="Calibri"/>
+              </a:rPr>
+              <a:t>5. Conclusiones y Trabajo Futuro</a:t>
+            </a:r>
+          </a:p>
+        </p:txBody>
+      </p:sp>
+      <p:sp>
+        <p:nvSpPr>
+          <p:cNvPr id="3" name="Text 1"/>
+          <p:cNvSpPr/>
+          <p:nvPr/>
+        </p:nvSpPr>
+        <p:spPr>
+          <a:xfrm>
+            <a:off x="609600" y="1252728"/>
+            <a:ext cx="8083296" cy="239911"/>
+          </a:xfrm>
+          <a:prstGeom prst="rect">
+            <a:avLst/>
+          </a:prstGeom>
+          <a:noFill/>
+          <a:ln/>
+        </p:spPr>
+        <p:txBody>
+          <a:bodyPr wrap="square" lIns="0" tIns="0" rIns="0" bIns="0" rtlCol="0" anchor="t"/>
+          <a:lstStyle/>
+          <a:p>
+            <a:pPr marL="0" indent="0">
+              <a:lnSpc>
+                <a:spcPts val="1890"/>
+              </a:lnSpc>
+              <a:buNone/>
+            </a:pPr>
+            <a:r>
+              <a:rPr lang="en-US" sz="1350" dirty="0">
+                <a:solidFill>
+                  <a:srgbClr val="475569"/>
+                </a:solidFill>
+                <a:latin typeface="Arial" pitchFamily="34" charset="0"/>
+                <a:ea typeface="Arial" pitchFamily="34" charset="-122"/>
+                <a:cs typeface="Arial" pitchFamily="34" charset="-120"/>
+              </a:rPr>
+              <a:t>Conclusiones (3–5):</a:t>
+            </a:r>
+            <a:endParaRPr lang="en-US" sz="1350" dirty="0"/>
+          </a:p>
+        </p:txBody>
+      </p:sp>
+      <p:sp>
+        <p:nvSpPr>
+          <p:cNvPr id="4" name="Text 2"/>
+          <p:cNvSpPr/>
+          <p:nvPr/>
+        </p:nvSpPr>
+        <p:spPr>
+          <a:xfrm>
+            <a:off x="914400" y="1645920"/>
+            <a:ext cx="7620000" cy="1069848"/>
+          </a:xfrm>
+          <a:prstGeom prst="rect">
+            <a:avLst/>
+          </a:prstGeom>
+          <a:noFill/>
+          <a:ln/>
+        </p:spPr>
+        <p:txBody>
+          <a:bodyPr wrap="square" lIns="0" tIns="0" rIns="0" bIns="0" rtlCol="0" anchor="t"/>
+          <a:lstStyle/>
+          <a:p>
+            <a:pPr marL="342900" indent="-342900">
+              <a:lnSpc>
+                <a:spcPts val="2160"/>
+              </a:lnSpc>
+              <a:buSzPct val="100000"/>
+              <a:buChar char="•"/>
+            </a:pPr>
+            <a:endParaRPr lang="en-US" sz="1200" dirty="0"/>
+            <a:r>
+              <a:rPr lang="en-US" sz="1200" dirty="0">
+                <a:solidFill>
+                  <a:srgbClr val="475569"/>
+                </a:solidFill>
+                <a:latin typeface="Arial" pitchFamily="34" charset="0"/>
+                <a:ea typeface="Arial" pitchFamily="34" charset="-122"/>
+                <a:cs typeface="Arial" pitchFamily="34" charset="-120"/>
+              </a:rPr>
+              <a:t>Modelo reproducible y sin fuga de información, con lift de 2.27x en el decil superior.</a:t>
+            </a:r>
+          </a:p>
+          <a:p>
+            <a:pPr marL="342900" indent="-342900">
+              <a:lnSpc>
+                <a:spcPts val="2160"/>
+              </a:lnSpc>
+              <a:buSzPct val="100000"/>
+              <a:buChar char="•"/>
+            </a:pPr>
+            <a:endParaRPr lang="en-US" sz="1200" dirty="0"/>
+            <a:r>
+              <a:rPr lang="en-US" sz="1200" dirty="0">
+                <a:solidFill>
+                  <a:srgbClr val="475569"/>
+                </a:solidFill>
+                <a:latin typeface="Arial" pitchFamily="34" charset="0"/>
+                <a:ea typeface="Arial" pitchFamily="34" charset="-122"/>
+                <a:cs typeface="Arial" pitchFamily="34" charset="-120"/>
+              </a:rPr>
+              <a:t>Ningún driver individual —ni review_score— es fuerte por sí solo: el patrón es multi-causal.</a:t>
+            </a:r>
+          </a:p>
+          <a:p>
+            <a:pPr marL="342900" indent="-342900">
+              <a:lnSpc>
+                <a:spcPts val="2160"/>
+              </a:lnSpc>
+              <a:buSzPct val="100000"/>
+              <a:buChar char="•"/>
+            </a:pPr>
+            <a:endParaRPr lang="en-US" sz="1200" dirty="0"/>
+            <a:r>
+              <a:rPr lang="en-US" sz="1200" dirty="0">
+                <a:solidFill>
+                  <a:srgbClr val="475569"/>
+                </a:solidFill>
+                <a:latin typeface="Arial" pitchFamily="34" charset="0"/>
+                <a:ea typeface="Arial" pitchFamily="34" charset="-122"/>
+                <a:cs typeface="Arial" pitchFamily="34" charset="-120"/>
+              </a:rPr>
+              <a:t>RFM revela un segmento 'en riesgo/bajo valor' (29%): la mayor oportunidad de reactivación.</a:t>
+            </a:r>
+          </a:p>
+        </p:txBody>
+      </p:sp>
+      <p:sp>
+        <p:nvSpPr>
+          <p:cNvPr id="5" name="Text 3"/>
+          <p:cNvSpPr/>
+          <p:nvPr/>
+        </p:nvSpPr>
+        <p:spPr>
+          <a:xfrm>
+            <a:off x="609600" y="2944368"/>
+            <a:ext cx="8083296" cy="239911"/>
+          </a:xfrm>
+          <a:prstGeom prst="rect">
+            <a:avLst/>
+          </a:prstGeom>
+          <a:noFill/>
+          <a:ln/>
+        </p:spPr>
+        <p:txBody>
+          <a:bodyPr wrap="square" lIns="0" tIns="0" rIns="0" bIns="0" rtlCol="0" anchor="t"/>
+          <a:lstStyle/>
+          <a:p>
+            <a:pPr marL="0" indent="0">
+              <a:lnSpc>
+                <a:spcPts val="1890"/>
+              </a:lnSpc>
+              <a:buNone/>
+            </a:pPr>
+            <a:r>
+              <a:rPr lang="en-US" sz="1350" dirty="0">
+                <a:solidFill>
+                  <a:srgbClr val="475569"/>
+                </a:solidFill>
+                <a:latin typeface="Arial" pitchFamily="34" charset="0"/>
+                <a:ea typeface="Arial" pitchFamily="34" charset="-122"/>
+                <a:cs typeface="Arial" pitchFamily="34" charset="-120"/>
+              </a:rPr>
+              <a:t>Limitaciones:</a:t>
+            </a:r>
+            <a:endParaRPr lang="en-US" sz="1350" dirty="0"/>
+          </a:p>
+        </p:txBody>
+      </p:sp>
+      <p:sp>
+        <p:nvSpPr>
+          <p:cNvPr id="6" name="Text 4"/>
+          <p:cNvSpPr/>
+          <p:nvPr/>
+        </p:nvSpPr>
+        <p:spPr>
+          <a:xfrm>
+            <a:off x="609600" y="3337560"/>
+            <a:ext cx="8083296" cy="210312"/>
+          </a:xfrm>
+          <a:prstGeom prst="rect">
+            <a:avLst/>
+          </a:prstGeom>
+          <a:noFill/>
+          <a:ln/>
+        </p:spPr>
+        <p:txBody>
+          <a:bodyPr wrap="square" lIns="0" tIns="0" rIns="0" bIns="0" rtlCol="0" anchor="t"/>
+          <a:lstStyle/>
+          <a:p>
+            <a:pPr marL="0" indent="0">
+              <a:lnSpc>
+                <a:spcPts val="1680"/>
+              </a:lnSpc>
+              <a:buNone/>
+            </a:pPr>
+            <a:endParaRPr lang="en-US" sz="1200" dirty="0"/>
+            <a:r>
+              <a:rPr lang="en-US" sz="1200" dirty="0">
+                <a:solidFill>
+                  <a:srgbClr val="475569"/>
+                </a:solidFill>
+                <a:latin typeface="Arial" pitchFamily="34" charset="0"/>
+                <a:ea typeface="Arial" pitchFamily="34" charset="-122"/>
+                <a:cs typeface="Arial" pitchFamily="34" charset="-120"/>
+              </a:rPr>
+              <a:t>Señal predictiva modesta sobre un dataset estático; el lift reportado es retrospectivo, no A/B.</a:t>
+            </a:r>
+          </a:p>
+        </p:txBody>
+      </p:sp>
+      <p:sp>
+        <p:nvSpPr>
+          <p:cNvPr id="7" name="Text 5"/>
+          <p:cNvSpPr/>
+          <p:nvPr/>
+        </p:nvSpPr>
+        <p:spPr>
+          <a:xfrm>
+            <a:off x="609600" y="3776472"/>
+            <a:ext cx="8083296" cy="239911"/>
+          </a:xfrm>
+          <a:prstGeom prst="rect">
+            <a:avLst/>
+          </a:prstGeom>
+          <a:noFill/>
+          <a:ln/>
+        </p:spPr>
+        <p:txBody>
+          <a:bodyPr wrap="square" lIns="0" tIns="0" rIns="0" bIns="0" rtlCol="0" anchor="t"/>
+          <a:lstStyle/>
+          <a:p>
+            <a:pPr marL="0" indent="0">
+              <a:lnSpc>
+                <a:spcPts val="1890"/>
+              </a:lnSpc>
+              <a:buNone/>
+            </a:pPr>
+            <a:r>
+              <a:rPr lang="en-US" sz="1350" dirty="0">
+                <a:solidFill>
+                  <a:srgbClr val="475569"/>
+                </a:solidFill>
+                <a:latin typeface="Arial" pitchFamily="34" charset="0"/>
+                <a:ea typeface="Arial" pitchFamily="34" charset="-122"/>
+                <a:cs typeface="Arial" pitchFamily="34" charset="-120"/>
+              </a:rPr>
+              <a:t>Trabajo futuro:</a:t>
+            </a:r>
+            <a:endParaRPr lang="en-US" sz="1350" dirty="0"/>
+          </a:p>
+        </p:txBody>
+      </p:sp>
+      <p:sp>
+        <p:nvSpPr>
+          <p:cNvPr id="8" name="Text 6"/>
+          <p:cNvSpPr/>
+          <p:nvPr/>
+        </p:nvSpPr>
+        <p:spPr>
+          <a:xfrm>
+            <a:off x="609600" y="4169664"/>
+            <a:ext cx="8083296" cy="210312"/>
+          </a:xfrm>
+          <a:prstGeom prst="rect">
+            <a:avLst/>
+          </a:prstGeom>
+          <a:noFill/>
+          <a:ln/>
+        </p:spPr>
+        <p:txBody>
+          <a:bodyPr wrap="square" lIns="0" tIns="0" rIns="0" bIns="0" rtlCol="0" anchor="t"/>
+          <a:lstStyle/>
+          <a:p>
+            <a:pPr marL="0" indent="0">
+              <a:lnSpc>
+                <a:spcPts val="1680"/>
+              </a:lnSpc>
+              <a:buNone/>
+            </a:pPr>
+            <a:endParaRPr lang="en-US" sz="1200" dirty="0"/>
+            <a:r>
+              <a:rPr lang="en-US" sz="1200" dirty="0">
+                <a:solidFill>
+                  <a:srgbClr val="475569"/>
+                </a:solidFill>
+                <a:latin typeface="Arial" pitchFamily="34" charset="0"/>
+                <a:ea typeface="Arial" pitchFamily="34" charset="-122"/>
+                <a:cs typeface="Arial" pitchFamily="34" charset="-120"/>
+              </a:rPr>
+              <a:t>Clickstream/marketing, más modelos, recomendador complementario y validación A/B por segmento.</a:t>
+            </a:r>
+          </a:p>
+        </p:txBody>
+      </p:sp>
+    </p:spTree>
+  </p:cSld>
+  <p:clrMapOvr>
+    <a:masterClrMapping/>
+  </p:clrMapOvr>
+</p:sld>
+</file>
+
+<file path=ppt/slides/slide22.xml><?xml version="1.0" encoding="utf-8"?>
+<p:sld xmlns:a="http://schemas.openxmlformats.org/drawingml/2006/main" xmlns:r="http://schemas.openxmlformats.org/officeDocument/2006/relationships" xmlns:p="http://schemas.openxmlformats.org/presentationml/2006/main">
+  <p:cSld name="Slide 15">
+    <p:spTree>
+      <p:nvGrpSpPr>
+        <p:cNvPr id="1" name=""/>
+        <p:cNvGrpSpPr/>
+        <p:nvPr/>
+      </p:nvGrpSpPr>
+      <p:grpSpPr>
+        <a:xfrm>
+          <a:off x="0" y="0"/>
+          <a:ext cx="0" cy="0"/>
+          <a:chOff x="0" y="0"/>
+          <a:chExt cx="0" cy="0"/>
+        </a:xfrm>
+      </p:grpSpPr>
+      <p:sp>
+        <p:nvSpPr>
+          <p:cNvPr id="2" name="Text 0"/>
+          <p:cNvSpPr/>
+          <p:nvPr/>
+        </p:nvSpPr>
+        <p:spPr>
+          <a:xfrm>
+            <a:off x="609600" y="609600"/>
+            <a:ext cx="8083296" cy="411361"/>
+          </a:xfrm>
+          <a:prstGeom prst="rect">
+            <a:avLst/>
+          </a:prstGeom>
+          <a:noFill/>
+          <a:ln/>
+        </p:spPr>
+        <p:txBody>
+          <a:bodyPr wrap="square" lIns="0" tIns="0" rIns="0" bIns="0" rtlCol="0" anchor="t"/>
+          <a:lstStyle/>
+          <a:p>
+            <a:pPr marL="0" indent="0">
+              <a:lnSpc>
+                <a:spcPts val="3240"/>
+              </a:lnSpc>
+              <a:buNone/>
+            </a:pPr>
+            <a:r>
+              <a:rPr lang="en-US" sz="3600" b="1" dirty="0">
+                <a:solidFill>
+                  <a:srgbClr val="EC6A16"/>
+                </a:solidFill>
+                <a:latin typeface="Calibri"/>
+                <a:ea typeface="Calibri"/>
+                <a:cs typeface="Calibri"/>
+              </a:rPr>
+              <a:t>6. Anexos y Entregables</a:t>
+            </a:r>
+          </a:p>
+        </p:txBody>
+      </p:sp>
+      <p:sp>
+        <p:nvSpPr>
+          <p:cNvPr id="3" name="Text 1"/>
+          <p:cNvSpPr/>
+          <p:nvPr/>
+        </p:nvSpPr>
+        <p:spPr>
+          <a:xfrm>
+            <a:off x="914400" y="1249561"/>
+            <a:ext cx="7620000" cy="1828651"/>
+          </a:xfrm>
+          <a:prstGeom prst="rect">
+            <a:avLst/>
+          </a:prstGeom>
+          <a:noFill/>
+          <a:ln/>
+        </p:spPr>
+        <p:txBody>
+          <a:bodyPr wrap="square" lIns="0" tIns="0" rIns="0" bIns="0" rtlCol="0" anchor="t"/>
+          <a:lstStyle/>
+          <a:p>
+            <a:pPr marL="342900" indent="-342900">
+              <a:lnSpc>
+                <a:spcPts val="2160"/>
+              </a:lnSpc>
+              <a:buSzPct val="100000"/>
+              <a:buChar char="•"/>
+            </a:pPr>
+            <a:r>
+              <a:rPr lang="en-US" sz="1200" b="1" dirty="0">
+                <a:solidFill>
+                  <a:srgbClr val="475569"/>
+                </a:solidFill>
+                <a:latin typeface="Arial" pitchFamily="34" charset="0"/>
+                <a:ea typeface="Arial" pitchFamily="34" charset="-122"/>
+                <a:cs typeface="Arial" pitchFamily="34" charset="-120"/>
+              </a:rPr>
+              <a:t>Notebook 1 (EDA):</a:t>
+            </a:r>
+            <a:r>
+              <a:rPr lang="en-US" sz="1200" dirty="0">
+                <a:solidFill>
+                  <a:srgbClr val="475569"/>
+                </a:solidFill>
+                <a:latin typeface="Arial" pitchFamily="34" charset="0"/>
+                <a:ea typeface="Arial" pitchFamily="34" charset="-122"/>
+                <a:cs typeface="Arial" pitchFamily="34" charset="-120"/>
+              </a:rPr>
+              <a:t> notebooks/NB1_Estrategia_Datos_EDA.ipynb</a:t>
+            </a:r>
+            <a:endParaRPr lang="en-US" sz="1200" dirty="0"/>
+          </a:p>
+          <a:p>
+            <a:pPr marL="342900" indent="-342900">
+              <a:lnSpc>
+                <a:spcPts val="2160"/>
+              </a:lnSpc>
+              <a:buSzPct val="100000"/>
+              <a:buChar char="•"/>
+            </a:pPr>
+            <a:r>
+              <a:rPr lang="en-US" sz="1200" b="1" dirty="0">
+                <a:solidFill>
+                  <a:srgbClr val="475569"/>
+                </a:solidFill>
+                <a:latin typeface="Arial" pitchFamily="34" charset="0"/>
+                <a:ea typeface="Arial" pitchFamily="34" charset="-122"/>
+                <a:cs typeface="Arial" pitchFamily="34" charset="-120"/>
+              </a:rPr>
+              <a:t>Notebook 2 (Modelos):</a:t>
+            </a:r>
+            <a:r>
+              <a:rPr lang="en-US" sz="1200" dirty="0">
+                <a:solidFill>
+                  <a:srgbClr val="475569"/>
+                </a:solidFill>
+                <a:latin typeface="Arial" pitchFamily="34" charset="0"/>
+                <a:ea typeface="Arial" pitchFamily="34" charset="-122"/>
+                <a:cs typeface="Arial" pitchFamily="34" charset="-120"/>
+              </a:rPr>
+              <a:t> notebooks/NB2_Modelado_Validacion.ipynb</a:t>
+            </a:r>
+            <a:endParaRPr lang="en-US" sz="1200" dirty="0"/>
+          </a:p>
+          <a:p>
+            <a:pPr marL="342900" indent="-342900">
+              <a:lnSpc>
+                <a:spcPts val="2160"/>
+              </a:lnSpc>
+              <a:buSzPct val="100000"/>
+              <a:buChar char="•"/>
+            </a:pPr>
+            <a:r>
+              <a:rPr lang="en-US" sz="1200" b="1" dirty="0">
+                <a:solidFill>
+                  <a:srgbClr val="475569"/>
+                </a:solidFill>
+                <a:latin typeface="Arial" pitchFamily="34" charset="0"/>
+                <a:ea typeface="Arial" pitchFamily="34" charset="-122"/>
+                <a:cs typeface="Arial" pitchFamily="34" charset="-120"/>
+              </a:rPr>
+              <a:t>Repositorio / Demo:</a:t>
+            </a:r>
+            <a:r>
+              <a:rPr lang="en-US" sz="1200" dirty="0">
+                <a:solidFill>
+                  <a:srgbClr val="475569"/>
+                </a:solidFill>
+                <a:latin typeface="Arial" pitchFamily="34" charset="0"/>
+                <a:ea typeface="Arial" pitchFamily="34" charset="-122"/>
+                <a:cs typeface="Arial" pitchFamily="34" charset="-120"/>
+              </a:rPr>
+              <a:t> carpeta notebooks/artifacts/ (modelo, model card, predicciones, segmentos)</a:t>
+            </a:r>
+            <a:endParaRPr lang="en-US" sz="1200" dirty="0"/>
+          </a:p>
+          <a:p>
+            <a:pPr marL="342900" indent="-342900">
+              <a:lnSpc>
+                <a:spcPts val="2160"/>
+              </a:lnSpc>
+              <a:buSzPct val="100000"/>
+              <a:buChar char="•"/>
+            </a:pPr>
+            <a:r>
+              <a:rPr lang="en-US" sz="1200" b="1" dirty="0">
+                <a:solidFill>
+                  <a:srgbClr val="475569"/>
+                </a:solidFill>
+                <a:latin typeface="Arial" pitchFamily="34" charset="0"/>
+                <a:ea typeface="Arial" pitchFamily="34" charset="-122"/>
+                <a:cs typeface="Arial" pitchFamily="34" charset="-120"/>
+              </a:rPr>
+              <a:t>Datos (si públicos):</a:t>
+            </a:r>
+            <a:r>
+              <a:rPr lang="en-US" sz="1200" dirty="0">
+                <a:solidFill>
+                  <a:srgbClr val="475569"/>
+                </a:solidFill>
+                <a:latin typeface="Arial" pitchFamily="34" charset="0"/>
+                <a:ea typeface="Arial" pitchFamily="34" charset="-122"/>
+                <a:cs typeface="Arial" pitchFamily="34" charset="-120"/>
+              </a:rPr>
+              <a:t> Kaggle — Olist Brazilian E-Commerce (CC BY-NC-SA 4.0)</a:t>
+            </a:r>
+            <a:endParaRPr lang="en-US" sz="1200" dirty="0"/>
+          </a:p>
+          <a:p>
+            <a:pPr marL="342900" indent="-342900">
+              <a:lnSpc>
+                <a:spcPts val="2160"/>
+              </a:lnSpc>
+              <a:buSzPct val="100000"/>
+              <a:buChar char="•"/>
+            </a:pPr>
+            <a:r>
+              <a:rPr lang="en-US" sz="1200" b="1" dirty="0">
+                <a:solidFill>
+                  <a:srgbClr val="475569"/>
+                </a:solidFill>
+                <a:latin typeface="Arial" pitchFamily="34" charset="0"/>
+                <a:ea typeface="Arial" pitchFamily="34" charset="-122"/>
+                <a:cs typeface="Arial" pitchFamily="34" charset="-120"/>
+              </a:rPr>
+              <a:t>Documentación técnica:</a:t>
+            </a:r>
+            <a:r>
+              <a:rPr lang="en-US" sz="1200" dirty="0">
+                <a:solidFill>
+                  <a:srgbClr val="475569"/>
+                </a:solidFill>
+                <a:latin typeface="Arial" pitchFamily="34" charset="0"/>
+                <a:ea typeface="Arial" pitchFamily="34" charset="-122"/>
+                <a:cs typeface="Arial" pitchFamily="34" charset="-120"/>
+              </a:rPr>
+              <a:t> Informe_Tecnico_ShopMart_Olist.docx</a:t>
+            </a:r>
+            <a:endParaRPr lang="en-US" sz="1200" dirty="0"/>
+          </a:p>
+        </p:txBody>
+      </p:sp>
+    </p:spTree>
+  </p:cSld>
+  <p:clrMapOvr>
+    <a:masterClrMapping/>
+  </p:clrMapOvr>
+</p:sld>
+</file>
+
+<file path=ppt/slides/slide23.xml><?xml version="1.0" encoding="utf-8"?>
+<p:sld xmlns:a="http://schemas.openxmlformats.org/drawingml/2006/main" xmlns:r="http://schemas.openxmlformats.org/officeDocument/2006/relationships" xmlns:p="http://schemas.openxmlformats.org/presentationml/2006/main">
+  <p:cSld name="Slide 16">
+    <p:spTree>
+      <p:nvGrpSpPr>
+        <p:cNvPr id="1" name=""/>
+        <p:cNvGrpSpPr/>
+        <p:nvPr/>
+      </p:nvGrpSpPr>
+      <p:grpSpPr>
+        <a:xfrm>
+          <a:off x="0" y="0"/>
+          <a:ext cx="0" cy="0"/>
+          <a:chOff x="0" y="0"/>
+          <a:chExt cx="0" cy="0"/>
+        </a:xfrm>
+      </p:grpSpPr>
+      <p:sp>
+        <p:nvSpPr>
+          <p:cNvPr id="2" name="Text 0"/>
+          <p:cNvSpPr/>
+          <p:nvPr/>
+        </p:nvSpPr>
+        <p:spPr>
+          <a:xfrm>
+            <a:off x="3146858" y="1689795"/>
+            <a:ext cx="2850285" cy="548580"/>
+          </a:xfrm>
+          <a:prstGeom prst="rect">
+            <a:avLst/>
+          </a:prstGeom>
+          <a:noFill/>
+          <a:ln/>
+        </p:spPr>
+        <p:txBody>
+          <a:bodyPr wrap="square" lIns="0" tIns="0" rIns="0" bIns="0" rtlCol="0" anchor="t"/>
+          <a:lstStyle/>
+          <a:p>
+            <a:pPr marL="0" indent="0" algn="ctr">
+              <a:lnSpc>
+                <a:spcPts val="4320"/>
+              </a:lnSpc>
+              <a:buNone/>
+            </a:pPr>
+            <a:r>
+              <a:rPr lang="en-US" sz="3600" b="1" dirty="0">
+                <a:solidFill>
+                  <a:srgbClr val="FFFFFF"/>
+                </a:solidFill>
+                <a:latin typeface="Arial" pitchFamily="34" charset="0"/>
+                <a:ea typeface="Arial" pitchFamily="34" charset="-122"/>
+                <a:cs typeface="Arial" pitchFamily="34" charset="-120"/>
+              </a:rPr>
+              <a:t>¿Preguntas?</a:t>
+            </a:r>
+            <a:endParaRPr lang="en-US" sz="3600" dirty="0"/>
+          </a:p>
+        </p:txBody>
+      </p:sp>
+      <p:sp>
+        <p:nvSpPr>
+          <p:cNvPr id="3" name="Text 1"/>
+          <p:cNvSpPr/>
+          <p:nvPr/>
+        </p:nvSpPr>
+        <p:spPr>
+          <a:xfrm>
+            <a:off x="3545802" y="2543175"/>
+            <a:ext cx="2052248" cy="266700"/>
+          </a:xfrm>
+          <a:prstGeom prst="rect">
+            <a:avLst/>
+          </a:prstGeom>
+          <a:noFill/>
+          <a:ln/>
+        </p:spPr>
+        <p:txBody>
+          <a:bodyPr wrap="square" lIns="0" tIns="0" rIns="0" bIns="0" rtlCol="0" anchor="t"/>
+          <a:lstStyle/>
+          <a:p>
+            <a:pPr marL="0" indent="0" algn="ctr">
+              <a:lnSpc>
+                <a:spcPts val="2100"/>
+              </a:lnSpc>
+              <a:buNone/>
+            </a:pPr>
+            <a:r>
+              <a:rPr lang="en-US" sz="1500" dirty="0">
+                <a:solidFill>
+                  <a:srgbClr val="FFFFFF"/>
+                </a:solidFill>
+                <a:latin typeface="Arial" pitchFamily="34" charset="0"/>
+                <a:ea typeface="Arial" pitchFamily="34" charset="-122"/>
+                <a:cs typeface="Arial" pitchFamily="34" charset="-120"/>
+              </a:rPr>
+              <a:t>Gracias por su atención</a:t>
+            </a:r>
+            <a:endParaRPr lang="en-US" sz="1500" dirty="0"/>
+          </a:p>
+        </p:txBody>
+      </p:sp>
+      <p:sp>
+        <p:nvSpPr>
+          <p:cNvPr id="4" name="Text 2"/>
+          <p:cNvSpPr/>
+          <p:nvPr/>
+        </p:nvSpPr>
+        <p:spPr>
+          <a:xfrm>
+            <a:off x="2705715" y="3267075"/>
+            <a:ext cx="3732422" cy="186630"/>
+          </a:xfrm>
+          <a:prstGeom prst="rect">
+            <a:avLst/>
+          </a:prstGeom>
+          <a:noFill/>
+          <a:ln/>
+        </p:spPr>
+        <p:txBody>
+          <a:bodyPr wrap="square" lIns="0" tIns="0" rIns="0" bIns="0" rtlCol="0" anchor="t"/>
+          <a:lstStyle/>
+          <a:p>
+            <a:pPr marL="0" indent="0" algn="ctr">
+              <a:lnSpc>
+                <a:spcPts val="1470"/>
+              </a:lnSpc>
+              <a:buNone/>
+            </a:pPr>
+            <a:r>
+              <a:rPr lang="en-US" sz="1050" dirty="0">
+                <a:solidFill>
+                  <a:srgbClr val="FFFFFF"/>
+                </a:solidFill>
+                <a:latin typeface="Arial" pitchFamily="34" charset="0"/>
+                <a:ea typeface="Arial" pitchFamily="34" charset="-122"/>
+                <a:cs typeface="Arial" pitchFamily="34" charset="-120"/>
+              </a:rPr>
+              <a:t>Universidad Casa Grande</a:t>
+            </a:r>
+          </a:p>
+          <a:p>
+            <a:pPr marL="0" indent="0" algn="ctr">
+              <a:lnSpc>
+                <a:spcPts val="1470"/>
+              </a:lnSpc>
+              <a:buNone/>
+            </a:pPr>
+            <a:r>
+              <a:rPr lang="en-US" sz="1050" dirty="0">
+                <a:solidFill>
+                  <a:srgbClr val="FFFFFF"/>
+                </a:solidFill>
+                <a:latin typeface="Arial" pitchFamily="34" charset="0"/>
+                <a:ea typeface="Arial" pitchFamily="34" charset="-122"/>
+                <a:cs typeface="Arial" pitchFamily="34" charset="-120"/>
+              </a:rPr>
+              <a:t>Maestría en IA y Ciencia de Datos</a:t>
+            </a:r>
+            <a:endParaRPr lang="en-US" sz="1050" dirty="0"/>
           </a:p>
         </p:txBody>
       </p:sp>
@@ -8700,7 +8666,7 @@
 
 <file path=ppt/slides/slide8.xml><?xml version="1.0" encoding="utf-8"?>
 <p:sld xmlns:a="http://schemas.openxmlformats.org/drawingml/2006/main" xmlns:r="http://schemas.openxmlformats.org/officeDocument/2006/relationships" xmlns:p="http://schemas.openxmlformats.org/presentationml/2006/main">
-  <p:cSld name="Slide 8">
+  <p:cSld name="Slide 7">
     <p:spTree>
       <p:nvGrpSpPr>
         <p:cNvPr id="1" name=""/>
@@ -8736,10 +8702,11 @@
           <a:bodyPr wrap="square" lIns="0" tIns="0" rIns="0" bIns="0" rtlCol="0" anchor="t"/>
           <a:lstStyle/>
           <a:p>
-            <a:pPr>
+            <a:pPr indent="0">
               <a:lnSpc>
                 <a:spcPts val="3240"/>
               </a:lnSpc>
+              <a:buNone/>
             </a:pPr>
             <a:r>
               <a:rPr lang="en-US" sz="3600" b="1" dirty="0">
@@ -8750,7 +8717,7 @@
                 <a:ea typeface="Calibri"/>
                 <a:cs typeface="Calibri"/>
               </a:rPr>
-              <a:t>Features y Baseline</a:t>
+              <a:t>EDA: Desbalance, Estacionalidad y Cardinalidad</a:t>
             </a:r>
           </a:p>
         </p:txBody>
@@ -8782,6 +8749,7 @@
               </a:lnSpc>
               <a:buNone/>
             </a:pPr>
+            <a:endParaRPr lang="en-US" sz="1350" dirty="0"/>
             <a:r>
               <a:rPr lang="en-US" sz="1350" dirty="0">
                 <a:solidFill>
@@ -8791,38 +8759,165 @@
                 <a:ea typeface="Arial" pitchFamily="34" charset="-122"/>
                 <a:cs typeface="Arial" pitchFamily="34" charset="-120"/>
               </a:rPr>
-              <a:t>Transformaciones / Selección / Desbalance:</a:t>
-            </a:r>
+              <a:t>Qué encontramos:</a:t>
+            </a:r>
+          </a:p>
+        </p:txBody>
+      </p:sp>
+      <p:sp>
+        <p:nvSpPr>
+          <p:cNvPr id="4" name="Text 2"/>
+          <p:cNvSpPr/>
+          <p:nvPr/>
+        </p:nvSpPr>
+        <p:spPr>
+          <a:xfrm>
+            <a:off x="914400" y="1645920"/>
+            <a:ext cx="7620000" cy="1069848"/>
+          </a:xfrm>
+          <a:prstGeom prst="rect">
+            <a:avLst/>
+          </a:prstGeom>
+          <a:noFill/>
+          <a:ln/>
+        </p:spPr>
+        <p:txBody>
+          <a:bodyPr wrap="square" lIns="0" tIns="0" rIns="0" bIns="0" rtlCol="0" anchor="t"/>
+          <a:lstStyle/>
+          <a:p>
+            <a:pPr marL="342900" indent="-342900">
+              <a:lnSpc>
+                <a:spcPts val="2160"/>
+              </a:lnSpc>
+              <a:buSzPct val="100000"/>
+              <a:buChar char="•"/>
+            </a:pPr>
+            <a:endParaRPr lang="en-US" sz="1200" dirty="0"/>
+            <a:r>
+              <a:rPr lang="en-US" sz="1200" dirty="0">
+                <a:solidFill>
+                  <a:srgbClr val="475569"/>
+                </a:solidFill>
+                <a:latin typeface="Arial" pitchFamily="34" charset="0"/>
+                <a:ea typeface="Arial" pitchFamily="34" charset="-122"/>
+                <a:cs typeface="Arial" pitchFamily="34" charset="-120"/>
+              </a:rPr>
+              <a:t>Desbalance severo (~3.3% recompra) → métrica primaria PR-AUC, no accuracy.</a:t>
+            </a:r>
+          </a:p>
+          <a:p>
+            <a:pPr marL="342900" indent="-342900">
+              <a:lnSpc>
+                <a:spcPts val="2160"/>
+              </a:lnSpc>
+              <a:buSzPct val="100000"/>
+              <a:buChar char="•"/>
+            </a:pPr>
+            <a:endParaRPr lang="en-US" sz="1200" dirty="0"/>
+            <a:r>
+              <a:rPr lang="en-US" sz="1200" dirty="0">
+                <a:solidFill>
+                  <a:srgbClr val="475569"/>
+                </a:solidFill>
+                <a:latin typeface="Arial" pitchFamily="34" charset="0"/>
+                <a:ea typeface="Arial" pitchFamily="34" charset="-122"/>
+                <a:cs typeface="Arial" pitchFamily="34" charset="-120"/>
+              </a:rPr>
+              <a:t>Estacionalidad moderada en volumen y tasa de recompra por mes de compra.</a:t>
+            </a:r>
+          </a:p>
+          <a:p>
+            <a:pPr marL="342900" indent="-342900">
+              <a:lnSpc>
+                <a:spcPts val="2160"/>
+              </a:lnSpc>
+              <a:buSzPct val="100000"/>
+              <a:buChar char="•"/>
+            </a:pPr>
+            <a:endParaRPr lang="en-US" sz="1200" dirty="0"/>
+            <a:r>
+              <a:rPr lang="en-US" sz="1200" dirty="0">
+                <a:solidFill>
+                  <a:srgbClr val="475569"/>
+                </a:solidFill>
+                <a:latin typeface="Arial" pitchFamily="34" charset="0"/>
+                <a:ea typeface="Arial" pitchFamily="34" charset="-122"/>
+                <a:cs typeface="Arial" pitchFamily="34" charset="-120"/>
+              </a:rPr>
+              <a:t>71 categorías long-tail y customer_city de alta cardinalidad (~4k): se agrupan/excluyen.</a:t>
+            </a:r>
+          </a:p>
+        </p:txBody>
+      </p:sp>
+      <p:sp>
+        <p:nvSpPr>
+          <p:cNvPr id="5" name="Text 3"/>
+          <p:cNvSpPr/>
+          <p:nvPr/>
+        </p:nvSpPr>
+        <p:spPr>
+          <a:xfrm>
+            <a:off x="609600" y="2944368"/>
+            <a:ext cx="8083296" cy="239911"/>
+          </a:xfrm>
+          <a:prstGeom prst="rect">
+            <a:avLst/>
+          </a:prstGeom>
+          <a:noFill/>
+          <a:ln/>
+        </p:spPr>
+        <p:txBody>
+          <a:bodyPr wrap="square" lIns="0" tIns="0" rIns="0" bIns="0" rtlCol="0" anchor="t"/>
+          <a:lstStyle/>
+          <a:p>
+            <a:pPr marL="0" indent="0">
+              <a:lnSpc>
+                <a:spcPts val="1890"/>
+              </a:lnSpc>
+              <a:buNone/>
+            </a:pPr>
             <a:endParaRPr lang="en-US" sz="1350" dirty="0"/>
-          </a:p>
-        </p:txBody>
-      </p:sp>
-      <p:sp>
-        <p:nvSpPr>
-          <p:cNvPr id="4" name="Text 2"/>
-          <p:cNvSpPr/>
-          <p:nvPr/>
-        </p:nvSpPr>
-        <p:spPr>
-          <a:xfrm>
-            <a:off x="609600" y="1645920"/>
-            <a:ext cx="8083296" cy="393192"/>
-          </a:xfrm>
-          <a:prstGeom prst="rect">
-            <a:avLst/>
-          </a:prstGeom>
-          <a:noFill/>
-          <a:ln/>
-        </p:spPr>
-        <p:txBody>
-          <a:bodyPr wrap="square" lIns="0" tIns="0" rIns="0" bIns="0" rtlCol="0" anchor="t"/>
-          <a:lstStyle/>
-          <a:p>
-            <a:pPr marL="0" indent="0">
-              <a:lnSpc>
-                <a:spcPts val="1680"/>
-              </a:lnSpc>
-              <a:buNone/>
+            <a:r>
+              <a:rPr lang="en-US" sz="1350" dirty="0">
+                <a:solidFill>
+                  <a:srgbClr val="475569"/>
+                </a:solidFill>
+                <a:latin typeface="Arial" pitchFamily="34" charset="0"/>
+                <a:ea typeface="Arial" pitchFamily="34" charset="-122"/>
+                <a:cs typeface="Arial" pitchFamily="34" charset="-120"/>
+              </a:rPr>
+              <a:t>Conexión:</a:t>
+            </a:r>
+          </a:p>
+        </p:txBody>
+      </p:sp>
+      <p:sp>
+        <p:nvSpPr>
+          <p:cNvPr id="6" name="Text 4"/>
+          <p:cNvSpPr/>
+          <p:nvPr/>
+        </p:nvSpPr>
+        <p:spPr>
+          <a:xfrm>
+            <a:off x="914400" y="3337560"/>
+            <a:ext cx="7620000" cy="356616"/>
+          </a:xfrm>
+          <a:prstGeom prst="rect">
+            <a:avLst/>
+          </a:prstGeom>
+          <a:noFill/>
+          <a:ln/>
+        </p:spPr>
+        <p:txBody>
+          <a:bodyPr wrap="square" lIns="0" tIns="0" rIns="0" bIns="0" rtlCol="0" anchor="t"/>
+          <a:lstStyle/>
+          <a:p>
+            <a:pPr marL="342900" indent="-342900">
+              <a:lnSpc>
+                <a:spcPts val="2160"/>
+              </a:lnSpc>
+              <a:buSzPct val="100000"/>
+              <a:buChar char="•"/>
             </a:pPr>
             <a:endParaRPr lang="en-US" sz="1200" dirty="0"/>
             <a:r>
@@ -8834,91 +8929,7 @@
                 <a:ea typeface="Arial" pitchFamily="34" charset="-122"/>
                 <a:cs typeface="Arial" pitchFamily="34" charset="-120"/>
               </a:rPr>
-              <a:t>23 features derivadas del primer pedido (valor, pago, entrega, categoría, estacionalidad), ensambladas en un pipeline de one-hot + imputación + escalado ajustado solo en train.</a:t>
-            </a:r>
-          </a:p>
-        </p:txBody>
-      </p:sp>
-      <p:sp>
-        <p:nvSpPr>
-          <p:cNvPr id="5" name="Text 3"/>
-          <p:cNvSpPr/>
-          <p:nvPr/>
-        </p:nvSpPr>
-        <p:spPr>
-          <a:xfrm>
-            <a:off x="609600" y="2267712"/>
-            <a:ext cx="8083296" cy="239911"/>
-          </a:xfrm>
-          <a:prstGeom prst="rect">
-            <a:avLst/>
-          </a:prstGeom>
-          <a:noFill/>
-          <a:ln/>
-        </p:spPr>
-        <p:txBody>
-          <a:bodyPr wrap="square" lIns="0" tIns="0" rIns="0" bIns="0" rtlCol="0" anchor="t"/>
-          <a:lstStyle/>
-          <a:p>
-            <a:pPr marL="0" indent="0">
-              <a:lnSpc>
-                <a:spcPts val="1890"/>
-              </a:lnSpc>
-              <a:buNone/>
-            </a:pPr>
-            <a:r>
-              <a:rPr lang="en-US" sz="1350" dirty="0">
-                <a:solidFill>
-                  <a:srgbClr val="475569"/>
-                </a:solidFill>
-                <a:latin typeface="Arial" pitchFamily="34" charset="0"/>
-                <a:ea typeface="Arial" pitchFamily="34" charset="-122"/>
-                <a:cs typeface="Arial" pitchFamily="34" charset="-120"/>
-              </a:rPr>
-              <a:t>Baseline:</a:t>
-            </a:r>
-            <a:endParaRPr lang="en-US" sz="1350" dirty="0"/>
-          </a:p>
-        </p:txBody>
-      </p:sp>
-      <p:sp>
-        <p:nvSpPr>
-          <p:cNvPr id="6" name="Text 4"/>
-          <p:cNvSpPr/>
-          <p:nvPr/>
-        </p:nvSpPr>
-        <p:spPr>
-          <a:xfrm>
-            <a:off x="609600" y="2660904"/>
-            <a:ext cx="8083296" cy="393192"/>
-          </a:xfrm>
-          <a:prstGeom prst="rect">
-            <a:avLst/>
-          </a:prstGeom>
-          <a:noFill/>
-          <a:ln/>
-        </p:spPr>
-        <p:txBody>
-          <a:bodyPr wrap="square" lIns="0" tIns="0" rIns="0" bIns="0" rtlCol="0" anchor="t"/>
-          <a:lstStyle/>
-          <a:p>
-            <a:pPr marL="0" indent="0">
-              <a:lnSpc>
-                <a:spcPts val="1680"/>
-              </a:lnSpc>
-              <a:buNone/>
-            </a:pPr>
-            <a:endParaRPr lang="en-US" sz="1200" dirty="0"/>
-            <a:r>
-              <a:rPr lang="en-US" sz="1200" dirty="0">
-                <a:solidFill>
-                  <a:srgbClr val="475569"/>
-                </a:solidFill>
-                <a:latin typeface="Arial" pitchFamily="34" charset="0"/>
-                <a:ea typeface="Arial" pitchFamily="34" charset="-122"/>
-                <a:cs typeface="Arial" pitchFamily="34" charset="-120"/>
-              </a:rPr>
-              <a:t>El DummyClassifier reproduce la tasa base sin usar ninguna señal (PR-AUC = 0.033) — es el piso que cualquier modelo real debe superar para justificar su complejidad.</a:t>
+              <a:t>El hallazgo más importante del EDA —el review_score— tiene su propia slide a continuación.</a:t>
             </a:r>
           </a:p>
         </p:txBody>
@@ -8933,7 +8944,7 @@
 
 <file path=ppt/slides/slide9.xml><?xml version="1.0" encoding="utf-8"?>
 <p:sld xmlns:a="http://schemas.openxmlformats.org/drawingml/2006/main" xmlns:r="http://schemas.openxmlformats.org/officeDocument/2006/relationships" xmlns:p="http://schemas.openxmlformats.org/presentationml/2006/main">
-  <p:cSld name="Slide 9">
+  <p:cSld name="Slide 4">
     <p:spTree>
       <p:nvGrpSpPr>
         <p:cNvPr id="1" name=""/>
@@ -8956,6 +8967,84 @@
         </p:nvSpPr>
         <p:spPr>
           <a:xfrm>
+            <a:off x="609600" y="1249561"/>
+            <a:ext cx="7924800" cy="1249561"/>
+          </a:xfrm>
+          <a:prstGeom prst="rect">
+            <a:avLst/>
+          </a:prstGeom>
+          <a:solidFill>
+            <a:srgbClr val="F1F5F9"/>
+          </a:solidFill>
+          <a:ln/>
+          <a:effectLst>
+            <a:outerShdw blurRad="152400" dist="76200" dir="5400000" algn="bl" rotWithShape="0">
+              <a:srgbClr val="000000">
+                <a:alpha val="8000"/>
+              </a:srgbClr>
+            </a:outerShdw>
+          </a:effectLst>
+        </p:spPr>
+        <p:txBody>
+          <a:bodyPr wrap="none" lIns="0" tIns="0" rIns="0" bIns="0" rtlCol="0" anchor="ctr">
+            <a:normAutofit/>
+          </a:bodyPr>
+          <a:lstStyle/>
+          <a:p>
+            <a:pPr marL="0" indent="0">
+              <a:buNone/>
+            </a:pPr>
+            <a:endParaRPr lang="en-US" dirty="0"/>
+          </a:p>
+        </p:txBody>
+      </p:sp>
+      <p:sp>
+        <p:nvSpPr>
+          <p:cNvPr id="3" name="Text 1"/>
+          <p:cNvSpPr/>
+          <p:nvPr/>
+        </p:nvSpPr>
+        <p:spPr>
+          <a:xfrm>
+            <a:off x="609600" y="3284339"/>
+            <a:ext cx="7924800" cy="1249561"/>
+          </a:xfrm>
+          <a:prstGeom prst="rect">
+            <a:avLst/>
+          </a:prstGeom>
+          <a:solidFill>
+            <a:srgbClr val="F1F5F9"/>
+          </a:solidFill>
+          <a:ln/>
+          <a:effectLst>
+            <a:outerShdw blurRad="152400" dist="76200" dir="5400000" algn="bl" rotWithShape="0">
+              <a:srgbClr val="000000">
+                <a:alpha val="8000"/>
+              </a:srgbClr>
+            </a:outerShdw>
+          </a:effectLst>
+        </p:spPr>
+        <p:txBody>
+          <a:bodyPr wrap="none" lIns="0" tIns="0" rIns="0" bIns="0" rtlCol="0" anchor="ctr">
+            <a:normAutofit/>
+          </a:bodyPr>
+          <a:lstStyle/>
+          <a:p>
+            <a:pPr marL="0" indent="0">
+              <a:buNone/>
+            </a:pPr>
+            <a:endParaRPr lang="en-US" dirty="0"/>
+          </a:p>
+        </p:txBody>
+      </p:sp>
+      <p:sp>
+        <p:nvSpPr>
+          <p:cNvPr id="4" name="Text 2"/>
+          <p:cNvSpPr/>
+          <p:nvPr/>
+        </p:nvSpPr>
+        <p:spPr>
+          <a:xfrm>
             <a:off x="609600" y="609600"/>
             <a:ext cx="8083296" cy="411361"/>
           </a:xfrm>
@@ -8969,11 +9058,10 @@
           <a:bodyPr wrap="square" lIns="0" tIns="0" rIns="0" bIns="0" rtlCol="0" anchor="t"/>
           <a:lstStyle/>
           <a:p>
-            <a:pPr indent="0">
+            <a:pPr>
               <a:lnSpc>
                 <a:spcPts val="3240"/>
               </a:lnSpc>
-              <a:buNone/>
             </a:pPr>
             <a:r>
               <a:rPr lang="en-US" sz="3600" b="1" dirty="0">
@@ -8984,21 +9072,21 @@
                 <a:ea typeface="Calibri"/>
                 <a:cs typeface="Calibri"/>
               </a:rPr>
-              <a:t>3. Modelos: Candidatos y Selección</a:t>
-            </a:r>
-          </a:p>
-        </p:txBody>
-      </p:sp>
-      <p:sp>
-        <p:nvSpPr>
-          <p:cNvPr id="3" name="Text 1"/>
-          <p:cNvSpPr/>
-          <p:nvPr/>
-        </p:nvSpPr>
-        <p:spPr>
-          <a:xfrm>
-            <a:off x="609600" y="1252728"/>
-            <a:ext cx="8083296" cy="239911"/>
+              <a:t>EDA: El "Mito" del Review Score</a:t>
+            </a:r>
+          </a:p>
+        </p:txBody>
+      </p:sp>
+      <p:sp>
+        <p:nvSpPr>
+          <p:cNvPr id="5" name="Text 3"/>
+          <p:cNvSpPr/>
+          <p:nvPr/>
+        </p:nvSpPr>
+        <p:spPr>
+          <a:xfrm>
+            <a:off x="914400" y="1554361"/>
+            <a:ext cx="7461504" cy="274290"/>
           </a:xfrm>
           <a:prstGeom prst="rect">
             <a:avLst/>
@@ -9012,181 +9100,138 @@
           <a:p>
             <a:pPr marL="0" indent="0">
               <a:lnSpc>
-                <a:spcPts val="1890"/>
+                <a:spcPts val="2160"/>
               </a:lnSpc>
               <a:buNone/>
             </a:pPr>
-            <a:r>
-              <a:rPr lang="en-US" sz="1350" dirty="0">
-                <a:solidFill>
-                  <a:srgbClr val="475569"/>
-                </a:solidFill>
-                <a:latin typeface="Arial" pitchFamily="34" charset="0"/>
-                <a:ea typeface="Arial" pitchFamily="34" charset="-122"/>
-                <a:cs typeface="Arial" pitchFamily="34" charset="-120"/>
-              </a:rPr>
-              <a:t>Evaluados:</a:t>
-            </a:r>
-            <a:endParaRPr lang="en-US" sz="1350" dirty="0"/>
-          </a:p>
-        </p:txBody>
-      </p:sp>
-      <p:sp>
-        <p:nvSpPr>
-          <p:cNvPr id="4" name="Text 2"/>
-          <p:cNvSpPr/>
-          <p:nvPr/>
-        </p:nvSpPr>
-        <p:spPr>
-          <a:xfrm>
-            <a:off x="914400" y="1645920"/>
-            <a:ext cx="7620000" cy="1618488"/>
-          </a:xfrm>
-          <a:prstGeom prst="rect">
-            <a:avLst/>
-          </a:prstGeom>
-          <a:noFill/>
-          <a:ln/>
-        </p:spPr>
-        <p:txBody>
-          <a:bodyPr wrap="square" lIns="0" tIns="0" rIns="0" bIns="0" rtlCol="0" anchor="t"/>
-          <a:lstStyle/>
-          <a:p>
-            <a:pPr marL="342900" indent="-342900">
+            <a:endParaRPr lang="en-US" sz="1800" dirty="0"/>
+            <a:r>
+              <a:rPr lang="en-US" sz="1800" b="1" dirty="0">
+                <a:solidFill>
+                  <a:srgbClr val="0284C7"/>
+                </a:solidFill>
+                <a:latin typeface="Arial" pitchFamily="34" charset="0"/>
+                <a:ea typeface="Arial" pitchFamily="34" charset="-122"/>
+                <a:cs typeface="Arial" pitchFamily="34" charset="-120"/>
+              </a:rPr>
+              <a:t>Lo esperable</a:t>
+            </a:r>
+          </a:p>
+        </p:txBody>
+      </p:sp>
+      <p:sp>
+        <p:nvSpPr>
+          <p:cNvPr id="6" name="Text 4"/>
+          <p:cNvSpPr/>
+          <p:nvPr/>
+        </p:nvSpPr>
+        <p:spPr>
+          <a:xfrm>
+            <a:off x="914400" y="1981051"/>
+            <a:ext cx="7461504" cy="213271"/>
+          </a:xfrm>
+          <a:prstGeom prst="rect">
+            <a:avLst/>
+          </a:prstGeom>
+          <a:noFill/>
+          <a:ln/>
+        </p:spPr>
+        <p:txBody>
+          <a:bodyPr wrap="square" lIns="0" tIns="0" rIns="0" bIns="0" rtlCol="0" anchor="t"/>
+          <a:lstStyle/>
+          <a:p>
+            <a:pPr marL="0" indent="0">
+              <a:lnSpc>
+                <a:spcPts val="1680"/>
+              </a:lnSpc>
+              <a:buNone/>
+            </a:pPr>
+            <a:endParaRPr lang="en-US" sz="1200" dirty="0"/>
+            <a:r>
+              <a:rPr lang="en-US" sz="1200" dirty="0">
+                <a:solidFill>
+                  <a:srgbClr val="475569"/>
+                </a:solidFill>
+                <a:latin typeface="Arial" pitchFamily="34" charset="0"/>
+                <a:ea typeface="Arial" pitchFamily="34" charset="-122"/>
+                <a:cs typeface="Arial" pitchFamily="34" charset="-120"/>
+              </a:rPr>
+              <a:t>La intuición de negocio dice que un cliente satisfecho (review alto) debería ser mucho más propenso a volver a comprar que uno insatisfecho.</a:t>
+            </a:r>
+          </a:p>
+        </p:txBody>
+      </p:sp>
+      <p:sp>
+        <p:nvSpPr>
+          <p:cNvPr id="7" name="Text 5"/>
+          <p:cNvSpPr/>
+          <p:nvPr/>
+        </p:nvSpPr>
+        <p:spPr>
+          <a:xfrm>
+            <a:off x="914400" y="3589139"/>
+            <a:ext cx="7461504" cy="274290"/>
+          </a:xfrm>
+          <a:prstGeom prst="rect">
+            <a:avLst/>
+          </a:prstGeom>
+          <a:noFill/>
+          <a:ln/>
+        </p:spPr>
+        <p:txBody>
+          <a:bodyPr wrap="square" lIns="0" tIns="0" rIns="0" bIns="0" rtlCol="0" anchor="t"/>
+          <a:lstStyle/>
+          <a:p>
+            <a:pPr marL="0" indent="0">
               <a:lnSpc>
                 <a:spcPts val="2160"/>
               </a:lnSpc>
-              <a:buSzPct val="100000"/>
-              <a:buChar char="•"/>
+              <a:buNone/>
+            </a:pPr>
+            <a:endParaRPr lang="en-US" sz="1800" dirty="0"/>
+            <a:r>
+              <a:rPr lang="en-US" sz="1800" b="1" dirty="0">
+                <a:solidFill>
+                  <a:srgbClr val="0284C7"/>
+                </a:solidFill>
+                <a:latin typeface="Arial" pitchFamily="34" charset="0"/>
+                <a:ea typeface="Arial" pitchFamily="34" charset="-122"/>
+                <a:cs typeface="Arial" pitchFamily="34" charset="-120"/>
+              </a:rPr>
+              <a:t>Lo que muestra el dato</a:t>
+            </a:r>
+          </a:p>
+        </p:txBody>
+      </p:sp>
+      <p:sp>
+        <p:nvSpPr>
+          <p:cNvPr id="8" name="Text 6"/>
+          <p:cNvSpPr/>
+          <p:nvPr/>
+        </p:nvSpPr>
+        <p:spPr>
+          <a:xfrm>
+            <a:off x="914400" y="4015829"/>
+            <a:ext cx="7461504" cy="213271"/>
+          </a:xfrm>
+          <a:prstGeom prst="rect">
+            <a:avLst/>
+          </a:prstGeom>
+          <a:noFill/>
+          <a:ln/>
+        </p:spPr>
+        <p:txBody>
+          <a:bodyPr wrap="square" lIns="0" tIns="0" rIns="0" bIns="0" rtlCol="0" anchor="t"/>
+          <a:lstStyle/>
+          <a:p>
+            <a:pPr marL="0" indent="0">
+              <a:lnSpc>
+                <a:spcPts val="1680"/>
+              </a:lnSpc>
+              <a:buNone/>
             </a:pPr>
             <a:endParaRPr lang="en-US" sz="1200" dirty="0"/>
             <a:r>
-              <a:rPr lang="en-US" sz="1200" b="1" dirty="0">
-                <a:solidFill>
-                  <a:srgbClr val="475569"/>
-                </a:solidFill>
-                <a:latin typeface="Arial" pitchFamily="34" charset="0"/>
-                <a:ea typeface="Arial" pitchFamily="34" charset="-122"/>
-                <a:cs typeface="Arial" pitchFamily="34" charset="-120"/>
-              </a:rPr>
-              <a:t>DummyClassifier: baseline sin usar ninguna señal — el piso de referencia, no un candidato real.</a:t>
-            </a:r>
-          </a:p>
-          <a:p>
-            <a:pPr marL="342900" indent="-342900">
-              <a:lnSpc>
-                <a:spcPts val="2160"/>
-              </a:lnSpc>
-              <a:buSzPct val="100000"/>
-              <a:buChar char="•"/>
-            </a:pPr>
-            <a:endParaRPr lang="en-US" sz="1200" dirty="0"/>
-            <a:r>
-              <a:rPr lang="en-US" sz="1200" b="1" dirty="0">
-                <a:solidFill>
-                  <a:srgbClr val="475569"/>
-                </a:solidFill>
-                <a:latin typeface="Arial" pitchFamily="34" charset="0"/>
-                <a:ea typeface="Arial" pitchFamily="34" charset="-122"/>
-                <a:cs typeface="Arial" pitchFamily="34" charset="-120"/>
-              </a:rPr>
-              <a:t>LogisticRegression: interpretable y auditable (PR-AUC CV=0.047); no captura interacciones no lineales.</a:t>
-            </a:r>
-          </a:p>
-          <a:p>
-            <a:pPr marL="342900" indent="-342900">
-              <a:lnSpc>
-                <a:spcPts val="2160"/>
-              </a:lnSpc>
-              <a:buSzPct val="100000"/>
-              <a:buChar char="•"/>
-            </a:pPr>
-            <a:endParaRPr lang="en-US" sz="1200" dirty="0"/>
-            <a:r>
-              <a:rPr lang="en-US" sz="1200" b="1" dirty="0">
-                <a:solidFill>
-                  <a:srgbClr val="475569"/>
-                </a:solidFill>
-                <a:latin typeface="Arial" pitchFamily="34" charset="0"/>
-                <a:ea typeface="Arial" pitchFamily="34" charset="-122"/>
-                <a:cs typeface="Arial" pitchFamily="34" charset="-120"/>
-              </a:rPr>
-              <a:t>HistGradientBoosting: mayor margen de mejora vía tuning; sin tuning empata con la regresión logística (0.046).</a:t>
-            </a:r>
-          </a:p>
-        </p:txBody>
-      </p:sp>
-      <p:sp>
-        <p:nvSpPr>
-          <p:cNvPr id="5" name="Text 3"/>
-          <p:cNvSpPr/>
-          <p:nvPr/>
-        </p:nvSpPr>
-        <p:spPr>
-          <a:xfrm>
-            <a:off x="609600" y="3493008"/>
-            <a:ext cx="8083296" cy="239911"/>
-          </a:xfrm>
-          <a:prstGeom prst="rect">
-            <a:avLst/>
-          </a:prstGeom>
-          <a:noFill/>
-          <a:ln/>
-        </p:spPr>
-        <p:txBody>
-          <a:bodyPr wrap="square" lIns="0" tIns="0" rIns="0" bIns="0" rtlCol="0" anchor="t"/>
-          <a:lstStyle/>
-          <a:p>
-            <a:pPr marL="0" indent="0">
-              <a:lnSpc>
-                <a:spcPts val="1890"/>
-              </a:lnSpc>
-              <a:buNone/>
-            </a:pPr>
-            <a:r>
-              <a:rPr lang="en-US" sz="1350" dirty="0">
-                <a:solidFill>
-                  <a:srgbClr val="475569"/>
-                </a:solidFill>
-                <a:latin typeface="Arial" pitchFamily="34" charset="0"/>
-                <a:ea typeface="Arial" pitchFamily="34" charset="-122"/>
-                <a:cs typeface="Arial" pitchFamily="34" charset="-120"/>
-              </a:rPr>
-              <a:t>Modelo final y justificación:</a:t>
-            </a:r>
-            <a:endParaRPr lang="en-US" sz="1350" dirty="0"/>
-          </a:p>
-        </p:txBody>
-      </p:sp>
-      <p:sp>
-        <p:nvSpPr>
-          <p:cNvPr id="6" name="Text 4"/>
-          <p:cNvSpPr/>
-          <p:nvPr/>
-        </p:nvSpPr>
-        <p:spPr>
-          <a:xfrm>
-            <a:off x="609600" y="3886200"/>
-            <a:ext cx="8083296" cy="576072"/>
-          </a:xfrm>
-          <a:prstGeom prst="rect">
-            <a:avLst/>
-          </a:prstGeom>
-          <a:noFill/>
-          <a:ln/>
-        </p:spPr>
-        <p:txBody>
-          <a:bodyPr wrap="square" lIns="0" tIns="0" rIns="0" bIns="0" rtlCol="0" anchor="t"/>
-          <a:lstStyle/>
-          <a:p>
-            <a:pPr marL="0" indent="0">
-              <a:lnSpc>
-                <a:spcPts val="1680"/>
-              </a:lnSpc>
-              <a:buNone/>
-            </a:pPr>
-            <a:endParaRPr lang="en-US" sz="1200" dirty="0"/>
-            <a:r>
               <a:rPr lang="en-US" sz="1200" dirty="0">
                 <a:solidFill>
                   <a:srgbClr val="475569"/>
@@ -9195,7 +9240,7 @@
                 <a:ea typeface="Arial" pitchFamily="34" charset="-122"/>
                 <a:cs typeface="Arial" pitchFamily="34" charset="-120"/>
               </a:rPr>
-              <a:t>Se eligió HistGradientBoostingClassifier optimizado: empató con la regresión logística en la comparación inicial, pero tenía más margen de mejora vía tuning y podía capturar interacciones que un modelo lineal no explota.</a:t>
+              <a:t>La tasa de recompra por review_score es prácticamente plana (2.96%–3.46%), sin tendencia monótona; su correlación con el target es de las más débiles (|ρ|&lt;0.03).</a:t>
             </a:r>
           </a:p>
         </p:txBody>

--- a/docs/Defensa_ShopMart_Olist.pptx
+++ b/docs/Defensa_ShopMart_Olist.pptx
@@ -4904,15 +4904,15 @@
             </a:pPr>
             <a:endParaRPr lang="en-US" sz="1200" dirty="0"/>
             <a:r>
-              <a:rPr lang="en-US" sz="1200" dirty="0">
-                <a:solidFill>
-                  <a:srgbClr val="475569"/>
-                </a:solidFill>
-                <a:latin typeface="Arial" pitchFamily="34" charset="0"/>
-                <a:ea typeface="Arial" pitchFamily="34" charset="-122"/>
-                <a:cs typeface="Arial" pitchFamily="34" charset="-120"/>
-              </a:rPr>
-              <a:t>Sin degradación sistemática por categoría o customer_state, pero el volumen por subgrupo es limitado — estas estimaciones son orientativas, no concluyentes.</a:t>
+              <a:rPr lang="en-US" sz="1200" dirty="0" b="0">
+                <a:solidFill>
+                  <a:srgbClr val="475569"/>
+                </a:solidFill>
+                <a:latin typeface="Arial" pitchFamily="34" charset="0"/>
+                <a:ea typeface="Arial" pitchFamily="34" charset="-122"/>
+                <a:cs typeface="Arial" pitchFamily="34" charset="-120"/>
+              </a:rPr>
+              <a:t>Por categoría, sin degradación sistemática. Por customer_state, PR-AUC 0.025–0.208 en 24 de 27 estados; 3 sin casos de recompra en test quedan sin evaluar — orientativo.</a:t>
             </a:r>
           </a:p>
         </p:txBody>
@@ -5583,7 +5583,7 @@
                 <a:ea typeface="Arial" pitchFamily="34" charset="-122"/>
                 <a:cs typeface="Arial" pitchFamily="34" charset="-120"/>
               </a:rPr>
-              <a:t>Latencia: milisegundos por registro — modelo liviano (150 iteraciones), compatible con un endpoint síncrono.</a:t>
+              <a:t>Latencia: milisegundos por registro — modelo liviano (62 rondas de boosting entrenadas, techo buscado de 150), compatible con un endpoint síncrono.</a:t>
             </a:r>
           </a:p>
           <a:p>
@@ -5851,15 +5851,15 @@
             </a:pPr>
             <a:endParaRPr lang="en-US" sz="1200" dirty="0"/>
             <a:r>
-              <a:rPr lang="en-US" sz="1200" dirty="0">
-                <a:solidFill>
-                  <a:srgbClr val="475569"/>
-                </a:solidFill>
-                <a:latin typeface="Arial" pitchFamily="34" charset="0"/>
-                <a:ea typeface="Arial" pitchFamily="34" charset="-122"/>
-                <a:cs typeface="Arial" pitchFamily="34" charset="-120"/>
-              </a:rPr>
-              <a:t>Sin disparidades severas por categoría o estado, aunque el tamaño muestral por subgrupo es limitado — se recomienda monitorear esta métrica en producción.</a:t>
+              <a:rPr lang="en-US" sz="1200" dirty="0" b="0">
+                <a:solidFill>
+                  <a:srgbClr val="475569"/>
+                </a:solidFill>
+                <a:latin typeface="Arial" pitchFamily="34" charset="0"/>
+                <a:ea typeface="Arial" pitchFamily="34" charset="-122"/>
+                <a:cs typeface="Arial" pitchFamily="34" charset="-120"/>
+              </a:rPr>
+              <a:t>Por categoría y por customer_state, PR-AUC 0.025–0.208 en 24 de 27 estados, sin disparidad severa; 3 sin casos de recompra quedan sin evaluar — monitorear en producción.</a:t>
             </a:r>
           </a:p>
         </p:txBody>

--- a/docs/Defensa_ShopMart_Olist.pptx
+++ b/docs/Defensa_ShopMart_Olist.pptx
@@ -317,7 +317,7 @@
           <a:p>
             <a:r>
               <a:rPr lang="es-ES" dirty="0"/>
-              <a:t>La respuesta corta, que voy a desarrollar en las próximas slides, es: sí se puede anticipar parcialmente, la señal es modesta pero accionable, y el camino para llegar ahí enseña tanto como el resultado final.</a:t>
+              <a:t>La respuesta corta, que voy a desarrollar en las próximas slides, es: al validar correctamente en el tiempo, la señal se revela nula — y ese hallazgo metodológico, no el desempeño de ningún modelo, es el resultado central de este trabajo.</a:t>
             </a:r>
           </a:p>
         </p:txBody>
@@ -404,7 +404,7 @@
           <a:p>
             <a:r>
               <a:rPr lang="es-ES" dirty="0"/>
-              <a:t>El orden temporal del split es un detalle fácil de pasar por alto pero importante: si mezcláramos clientes al azar, el test podría contener clientes 'del pasado' que son más fáciles de evaluar — ordenar temporalmente hace el test más parecido a un despliegue real.</a:t>
+              <a:t>El orden temporal del split tiene un matiz importante: no es un corte cronológico simple, sino uno que respeta el tiempo dentro de cada clase para no romper el balance de ~3.3% de recompra (detalle en el Informe, sección 3.2). Adelanto algo que desarrollo en la próxima slide: esta partición, al ser la correcta, es también la que reveló que el modelo no generaliza hacia adelante en el tiempo — algo que la validación anterior (con un split que no era realmente temporal) escondía por completo.</a:t>
             </a:r>
           </a:p>
           <a:p>
@@ -497,19 +497,19 @@
           <a:p>
             <a:r>
               <a:rPr lang="es-ES" dirty="0"/>
-              <a:t>El +79% relativo suena grande, pero hay que traducirlo con cuidado: vamos de 3.3% a ~5.9% de precisión en el score, no de 3.3% a 79%. Prefiero decir esto yo mismo antes de que lo pregunten.</a:t>
+              <a:t>El framing correcto para esta defensa cambió por completo respecto a una versión anterior de este análisis: ya no es 'señal débil pero real', es 'la validación anterior estaba mal hecha, y al corregirla, la señal desaparece'. Es una conclusión más incómoda, pero es la honesta.</a:t>
             </a:r>
           </a:p>
           <a:p>
             <a:r>
               <a:rPr lang="es-ES" dirty="0"/>
-              <a:t>ROC-AUC de 0.63 confirma la misma historia desde otro ángulo: el modelo discrimina mejor que el azar (0.5), pero está lejos de un discriminador fuerte (&gt;0.8). Es consistente con la conclusión del EDA de que ninguna variable individual es un driver fuerte.</a:t>
+              <a:t>El punto que más quiero que quede claro: el ensemble parecía ganar con margen en CV (slide 11), y aun así no generalizó — es el ejemplo de libro de por qué la validación cruzada dentro de train nunca reemplaza una validación genuinamente prospectiva cuando hay desplazamiento temporal.</a:t>
             </a:r>
           </a:p>
           <a:p>
             <a:r>
               <a:rPr lang="es-ES" dirty="0"/>
-              <a:t>El framing correcto para la defensa es: 'señal débil pero real y accionable', no 'modelo poderoso'. Esa honestidad es parte de lo que se evalúa en un caso de ciencia de datos aplicada.</a:t>
+              <a:t>El framing correcto para esta versión es: 'señal nula bajo validación honesta, y ese hallazgo metodológico es el verdadero resultado'. Esa honestidad es parte de lo que se evalúa en un caso de ciencia de datos aplicada.</a:t>
             </a:r>
           </a:p>
         </p:txBody>
@@ -782,13 +782,13 @@
           <a:p>
             <a:r>
               <a:rPr lang="es-ES" dirty="0"/>
-              <a:t>Estas tres conclusiones son, en orden de importancia para mí: (1) el pipeline es sólido y honesto metodológicamente, (2) el hallazgo del EDA se sostiene hasta el final —nada domina—, y (3) RFM entrega un segundo ángulo de acción independiente del modelo predictivo.</a:t>
+              <a:t>Estas conclusiones son, en orden de importancia para mí: (1) el hallazgo metodológico —una validación cruzada dentro de train puede ocultar por completo la falta de generalización temporal— es el aporte más valioso de este trabajo; (2) el modelo final, evaluado correctamente, no aporta lift útil sobre un contacto aleatorio; (3) RFM sigue entregando un segundo ángulo de acción, independiente de este resultado.</a:t>
             </a:r>
           </a:p>
           <a:p>
             <a:r>
               <a:rPr lang="es-ES" dirty="0"/>
-              <a:t>Sobre trabajo futuro, si me preguntan qué haría primero con más tiempo: la validación A/B real del lift, porque hasta que eso no exista, 2.27x sigue siendo una promesa retrospectiva, no una garantía.</a:t>
+              <a:t>Sobre trabajo futuro, si me preguntan qué haría primero con más tiempo: investigar por qué el desempeño colapsa de train a test, y rediseñar la selección de hiperparámetros para que use validación temporal explícita — antes de volver a prometer cualquier lift de negocio.</a:t>
             </a:r>
           </a:p>
         </p:txBody>
@@ -962,7 +962,7 @@
           <a:p>
             <a:r>
               <a:rPr lang="es-ES" dirty="0"/>
-              <a:t>Cierro recapitulando en una frase: se puede anticipar parcialmente la recompra desde el primer pedido, la señal es modesta pero accionable, y el hallazgo más valioso quizás no sea el modelo en sí, sino haber descartado con evidencia la intuición de que la satisfacción declarada explica la recompra.</a:t>
+              <a:t>Cierro recapitulando en una frase: la validación cruzada dentro de entrenamiento sugería una señal real; validar correctamente en el tiempo mostró que no lo es — y ese descubrimiento, junto con haber descartado con evidencia la intuición de que la satisfacción declarada explica la recompra, es el aporte más valioso de este trabajo.</a:t>
             </a:r>
           </a:p>
           <a:p>
@@ -1249,19 +1249,19 @@
           <a:p>
             <a:r>
               <a:rPr lang="es-ES" dirty="0"/>
-              <a:t>El lift es la métrica que más le importa a un stakeholder de marketing, más que el PR-AUC: traduce el modelo a 'con el mismo presupuesto, llego a más clientes que sí recompran'.</a:t>
+              <a:t>Esta slide cambia de propósito respecto a una versión anterior: ya no muestra un caso de negocio positivo, muestra la consecuencia práctica y honesta del hallazgo de la slide 13 — un lift de 1.00x significa, literalmente, cero ganancia de focalización.</a:t>
             </a:r>
           </a:p>
           <a:p>
             <a:r>
               <a:rPr lang="es-ES" dirty="0"/>
-              <a:t>2.27x no es espectacular, pero es concreto y medible: si hoy una campaña random logra que recompren 3.3 de cada 100 contactados, dirigida por score logra ~7.5 de cada 100 en el decil superior.</a:t>
+              <a:t>Si hoy una campaña random logra que recompren 3.31 de cada 100 contactados, dirigida por este score logra 3.32 de cada 100: la diferencia no es significativa. No digo que el problema de negocio no tenga solución, digo que este modelo, evaluado correctamente, no la resuelve todavía.</a:t>
             </a:r>
           </a:p>
           <a:p>
             <a:r>
               <a:rPr lang="es-ES" dirty="0"/>
-              <a:t>Importante para la defensa: este lift es retrospectivo (sobre el test set histórico), no viene de una prueba A/B real — lo digo explícitamente como limitación en la sección de conclusiones.</a:t>
+              <a:t>El camino a seguir está en la slide de conclusiones: investigar el desplazamiento temporal detectado antes de prometer valor de negocio con este modelo.</a:t>
             </a:r>
           </a:p>
         </p:txBody>
@@ -1349,7 +1349,7 @@
           <a:p>
             <a:r>
               <a:rPr lang="es-ES" dirty="0"/>
-              <a:t>Voy a insistir en la interpretación en cada sección, no solo en el número: lo que importa para la defensa no es que el PR-AUC sea 0.059, sino qué significa ese número y qué decisión habilita.</a:t>
+              <a:t>Voy a insistir en la interpretación en cada sección, no solo en el número: lo que importa para la defensa no es cuánto vale el PR-AUC final, sino qué significa ese número, qué decisión habilita, y qué aprendimos del proceso de validación en sí.</a:t>
             </a:r>
           </a:p>
         </p:txBody>
@@ -1436,19 +1436,19 @@
           <a:p>
             <a:r>
               <a:rPr lang="es-ES" dirty="0"/>
-              <a:t>Esta slide cierra el círculo con el EDA: el permutation importance se calculó sobre el modelo ya entrenado y tuneado, en una muestra de 5,000 observaciones de test — y confirma, no contradice, lo que ya habíamos visto en la exploración de datos.</a:t>
+              <a:t>Esta slide ya no cierra el círculo con el EDA de forma tan optimista: sigue siendo cierto que review_score no es un driver, pero ahora customer_state_CE sí aparece en el top-15 — una corrección respecto a lo dicho en versiones anteriores de esta defensa.</a:t>
             </a:r>
           </a:p>
           <a:p>
             <a:r>
               <a:rPr lang="es-ES" dirty="0"/>
-              <a:t>El punto de que customer_state no aparece en el top-15 es relevante para una pregunta que puede surgir: '¿por qué no usaron geolocalización?' — la respuesta es que ni siquiera la geografía a nivel estado, que sí está en el modelo, resultó ser una señal relevante.</a:t>
+              <a:t>El punto más importante para esta versión: esta importancia de variables se calculó sobre un modelo que perdió poder discriminativo (slide 13), así que hay que presentarla con cautela — muestra qué mueve las pocas diferencias residuales del score, no una señal de negocio confiable.</a:t>
             </a:r>
           </a:p>
           <a:p>
             <a:r>
               <a:rPr lang="es-ES" dirty="0"/>
-              <a:t>La conclusión de esta slide es la misma que la del EDA, y esa consistencia es intencional: no es una coincidencia, es la forma correcta en que EDA y modelo deberían dialogar entre sí.</a:t>
+              <a:t>Si el tribunal pregunta por qué no se usó geolocalización más fina: la respuesta sigue siendo que ni siquiera el estado, que sí está en el modelo, aporta una señal confiable — y ahora sabemos que el modelo en su conjunto tampoco.</a:t>
             </a:r>
           </a:p>
         </p:txBody>
@@ -2394,19 +2394,19 @@
           <a:p>
             <a:r>
               <a:rPr lang="es-ES" dirty="0"/>
-              <a:t>Quiero ser honesto con el tribunal sobre el empate técnico: en la comparación inicial por CV, la regresión logística (0.0468) superó levemente al ensemble (0.0455). No escondo ese resultado.</a:t>
+              <a:t>Quiero ser honesto con el tribunal: en esta versión de la comparación (partición temporal corregida), el ensemble gana con margen claro en CV dentro de train (0.062 vs. 0.051) — no hay empate técnico esta vez.</a:t>
             </a:r>
           </a:p>
           <a:p>
             <a:r>
               <a:rPr lang="es-ES" dirty="0"/>
-              <a:t>La decisión de seguir con el ensemble no fue 'porque ganó', fue una apuesta metodológica: con una señal tan débil y sin interacciones fuertes evidentes, el margen de mejora por tuning de hiperparámetros era mayor en el modelo no lineal que en el lineal, que ya estaba cerca de su techo.</a:t>
+              <a:t>Adelanto el giro de la historia: ese resultado de CV es engañoso. El HistGradientBoosting tuneado terminó con PR-AUC de test = 0.037, apenas por encima del baseline de 0.033, con un lift de apenas 1.00x — la ventaja de CV no sobrevivió al pasar a datos genuinamente posteriores en el tiempo.</a:t>
             </a:r>
           </a:p>
           <a:p>
             <a:r>
               <a:rPr lang="es-ES" dirty="0"/>
-              <a:t>Esa apuesta se confirmó después: el HistGradientBoosting tuneado terminó en PR-AUC test = 0.059, por encima de donde arrancó en CV — el tuning sí pagó.</a:t>
+              <a:t>Esa brecha entre CV y test es, para mí, el hallazgo más importante de todo el proyecto — más que el desempeño de cualquier modelo candidato.</a:t>
             </a:r>
           </a:p>
         </p:txBody>
@@ -3518,7 +3518,7 @@
                 <a:ea typeface="Arial" pitchFamily="34" charset="-122"/>
                 <a:cs typeface="Arial" pitchFamily="34" charset="-120"/>
               </a:rPr>
-              <a:t>LogisticRegression: interpretable y auditable (PR-AUC CV=0.047); no captura interacciones no lineales.</a:t>
+              <a:t>LogisticRegression: interpretable y auditable (PR-AUC CV=0.051); no captura interacciones no lineales.</a:t>
             </a:r>
           </a:p>
           <a:p>
@@ -3539,7 +3539,7 @@
                 <a:ea typeface="Arial" pitchFamily="34" charset="-122"/>
                 <a:cs typeface="Arial" pitchFamily="34" charset="-120"/>
               </a:rPr>
-              <a:t>HistGradientBoosting: mayor margen de mejora vía tuning; sin tuning empata con la regresión logística (0.046).</a:t>
+              <a:t>HistGradientBoosting: ya sin tuning supera con margen a la regresión logística (CV=0.062 vs. 0.051); no es un empate.</a:t>
             </a:r>
           </a:p>
         </p:txBody>
@@ -3623,7 +3623,7 @@
                 <a:ea typeface="Arial" pitchFamily="34" charset="-122"/>
                 <a:cs typeface="Arial" pitchFamily="34" charset="-120"/>
               </a:rPr>
-              <a:t>Se eligió HistGradientBoostingClassifier optimizado: empató con la regresión logística en la comparación inicial, pero tenía más margen de mejora vía tuning y podía capturar interacciones que un modelo lineal no explota.</a:t>
+              <a:t>Se eligió HistGradientBoostingClassifier optimizado: superó con margen claro a la regresión logística en la comparación inicial (CV). Pero esa ventaja de CV no se sostuvo en test (ver slide 13) — la lección no es qué modelo ganó en CV, sino que ganar en CV dentro de train no garantiza generalizar hacia el futuro.</a:t>
             </a:r>
           </a:p>
         </p:txBody>
@@ -3731,7 +3731,7 @@
                 <a:ea typeface="Arial" pitchFamily="34" charset="-122"/>
                 <a:cs typeface="Arial" pitchFamily="34" charset="-120"/>
               </a:rPr>
-              <a:t>Split: hold-out estratificado 70/15/15, ordenado temporalmente para que el test tenga a los clientes más recientes.</a:t>
+              <a:t>Split: hold-out 70/15/15, particionado por orden temporal dentro de cada clase (no un corte cronológico global, que rompería el balance de clases) — el test queda compuesto, en su mayoría, por los clientes más recientes.</a:t>
             </a:r>
           </a:p>
           <a:p>
@@ -3962,7 +3962,7 @@
                 <a:ea typeface="Arial" pitchFamily="34" charset="-122"/>
                 <a:cs typeface="Arial" pitchFamily="34" charset="-120"/>
               </a:rPr>
-              <a:t>PR-AUC: 0.059 vs. baseline 0.033 (+79%) · ROC-AUC 0.63 · lift 2.27x en decil superior</a:t>
+              <a:t>PR-AUC: 0.037 vs. baseline 0.033 · ROC-AUC test 0.46 (val 0.13) · lift ≈1.00x en decil superior</a:t>
             </a:r>
           </a:p>
         </p:txBody>
@@ -4004,7 +4004,7 @@
                 <a:ea typeface="Arial" pitchFamily="34" charset="-122"/>
                 <a:cs typeface="Arial" pitchFamily="34" charset="-120"/>
               </a:rPr>
-              <a:t>¿Qué significa un PR-AUC de 0.059?</a:t>
+              <a:t>¿Qué significa este resultado?</a:t>
             </a:r>
           </a:p>
         </p:txBody>
@@ -4046,7 +4046,7 @@
                 <a:ea typeface="Arial" pitchFamily="34" charset="-122"/>
                 <a:cs typeface="Arial" pitchFamily="34" charset="-120"/>
               </a:rPr>
-              <a:t>Es una mejora clara y consistente sobre el azar, pero en términos absolutos sigue siendo modesto: confirma que la recompra depende también de factores que el dataset no observa (competencia, necesidad real del producto, campañas externas).</a:t>
+              <a:t>El modelo no logra superar de forma útil un contacto aleatorio al evaluarse sobre clientes estrictamente posteriores en el tiempo — pese a que el mismo modelo lucía claramente superior en validación cruzada dentro de entrenamiento (slide 11). Es la evidencia más clara de que la validación anterior (con un split que no era realmente temporal) ocultaba un problema real de generalización.</a:t>
             </a:r>
           </a:p>
         </p:txBody>
@@ -4130,7 +4130,7 @@
                 <a:ea typeface="Arial" pitchFamily="34" charset="-122"/>
                 <a:cs typeface="Arial" pitchFamily="34" charset="-120"/>
               </a:rPr>
-              <a:t>Contactar al 10% de clientes con mayor score produce una tasa de recompra 2.27 veces superior a un contacto aleatorio — el detalle está en la siguiente slide.</a:t>
+              <a:t>Contactar al 10% de clientes con mayor score produce una tasa de recompra prácticamente igual a un contacto aleatorio (3.32% vs. 3.31%) — el detalle está en la siguiente slide.</a:t>
             </a:r>
           </a:p>
         </p:txBody>
@@ -4164,7 +4164,7 @@
                 </a:solidFill>
                 <a:latin typeface="Arial"/>
               </a:rPr>
-              <a:t>¿ROC-AUC 0.63? El modelo ordena mejor que una moneda: en el 63% de los pares (un cliente que sí recompró vs. uno que no), le da mayor score al que sí volvió a comprar (0.50 = azar).</a:t>
+              <a:t>¿ROC-AUC 0.46 en test y 0.13 en validación? Ambos por debajo de 0.50: en validación, el modelo ordena PEOR que una moneda — en más de 8 de cada 10 comparaciones le da mayor score al cliente que NO recompró.</a:t>
             </a:r>
           </a:p>
           <a:p>
@@ -4175,7 +4175,7 @@
                 </a:solidFill>
                 <a:latin typeface="Arial"/>
               </a:rPr>
-              <a:t>¿Brier score 0.0317? Probabilidades razonablemente calibradas, pero un valor bajo es esperable con solo ~3.3% de recompra — se lee junto al PR-AUC y el lift, no de forma aislada.</a:t>
+              <a:t>¿Brier score 0.0325? Sigue siendo bajo, pero ahora sabemos que eso no certifica nada: con solo ~3.3% de recompra, hasta un modelo sin ninguna capacidad de discriminación real obtiene un Brier score bajo.</a:t>
             </a:r>
           </a:p>
         </p:txBody>
@@ -4444,7 +4444,7 @@
                 <a:ea typeface="Arial" pitchFamily="34" charset="-122"/>
                 <a:cs typeface="Arial" pitchFamily="34" charset="-120"/>
               </a:rPr>
-              <a:t>Lift de 2.27x en el decil superior</a:t>
+              <a:t>Lift ≈1.00x en el decil superior: sin ganancia real</a:t>
             </a:r>
           </a:p>
         </p:txBody>
@@ -4486,7 +4486,7 @@
                 <a:ea typeface="Arial" pitchFamily="34" charset="-122"/>
                 <a:cs typeface="Arial" pitchFamily="34" charset="-120"/>
               </a:rPr>
-              <a:t>El 10% de clientes con mayor score recompra a una tasa 2.27 veces mayor que un contacto aleatorio — con el mismo presupuesto, se llega a más clientes que sí vuelven a comprar.</a:t>
+              <a:t>El 10% de clientes con mayor score recompra a una tasa de 3.32%, prácticamente idéntica al 3.31% de un contacto aleatorio: con el modelo actual, marketing no ganaría nada frente a contactar clientes al azar.</a:t>
             </a:r>
           </a:p>
         </p:txBody>
@@ -4594,7 +4594,7 @@
                 <a:ea typeface="Arial" pitchFamily="34" charset="-122"/>
                 <a:cs typeface="Arial" pitchFamily="34" charset="-120"/>
               </a:rPr>
-              <a:t>Valor y forma de pago del pedido (cuotas máximas, precio por ítem, precio total) son las señales más influyentes — más que cualquier otra dimensión.</a:t>
+              <a:t>Una categoría de producto (muebles/decoración) y el valor/forma de pago del pedido (cuotas máximas, precio por ítem) encabezan la lista de señales más influyentes.</a:t>
             </a:r>
           </a:p>
           <a:p>
@@ -4615,7 +4615,7 @@
                 <a:ea typeface="Arial" pitchFamily="34" charset="-122"/>
                 <a:cs typeface="Arial" pitchFamily="34" charset="-120"/>
               </a:rPr>
-              <a:t>Le siguen flete y tiempos de entrega/aprobación: la experiencia logística del primer pedido sí deja huella en la probabilidad de recompra.</a:t>
+              <a:t>Le siguen el peso del producto, el flete y la cantidad de ítems del pedido.</a:t>
             </a:r>
           </a:p>
           <a:p>
@@ -4636,7 +4636,7 @@
                 <a:ea typeface="Arial" pitchFamily="34" charset="-122"/>
                 <a:cs typeface="Arial" pitchFamily="34" charset="-120"/>
               </a:rPr>
-              <a:t>Algunas categorías de producto (deportes/ocio, muebles/decoración) aportan señal adicional, aunque menor.</a:t>
+              <a:t>Otras categorías (deportes/ocio, cool stuff) y, por primera vez, el estado CE aportan señal adicional, aunque menor.</a:t>
             </a:r>
           </a:p>
           <a:p>
@@ -4657,7 +4657,7 @@
                 <a:ea typeface="Arial" pitchFamily="34" charset="-122"/>
                 <a:cs typeface="Arial" pitchFamily="34" charset="-120"/>
               </a:rPr>
-              <a:t>Ni review_score ni customer_state figuran entre las 15 variables más influyentes — consistente con el EDA: ni la satisfacción declarada ni la geografía son drivers individuales fuertes.</a:t>
+              <a:t>review_score sigue sin figurar entre las 15 variables más influyentes; customer_state sí aparece esta vez (un estado, CE) — pero dado el colapso de desempeño general (slide 13), esta importancia ya no debe leerse como evidencia de una señal de negocio útil.</a:t>
             </a:r>
           </a:p>
           <a:p>
@@ -4678,7 +4678,7 @@
                 <a:ea typeface="Arial" pitchFamily="34" charset="-122"/>
                 <a:cs typeface="Arial" pitchFamily="34" charset="-120"/>
               </a:rPr>
-              <a:t>El modelo aprende de un conjunto amplio de señales débiles combinadas, no de una variable dominante — igual que mostró el EDA.</a:t>
+              <a:t>El modelo sigue sin apoyarse en una variable dominante, pero esto ya no es una fortaleza narrativa: es consistente con que el modelo, en conjunto, dejó de discriminar de forma útil bajo la validación temporal correcta (slide 13).</a:t>
             </a:r>
           </a:p>
         </p:txBody>
@@ -6626,7 +6626,7 @@
                 <a:ea typeface="Arial" pitchFamily="34" charset="-122"/>
                 <a:cs typeface="Arial" pitchFamily="34" charset="-120"/>
               </a:rPr>
-              <a:t>Modelo reproducible y sin fuga de información, con lift de 2.27x en el decil superior.</a:t>
+              <a:t>El hallazgo más importante es metodológico: una validación cruzada dentro de train (o un split aleatorio) puede ocultar por completo la falta de generalización hacia el futuro.</a:t>
             </a:r>
           </a:p>
           <a:p>
@@ -6647,7 +6647,7 @@
                 <a:ea typeface="Arial" pitchFamily="34" charset="-122"/>
                 <a:cs typeface="Arial" pitchFamily="34" charset="-120"/>
               </a:rPr>
-              <a:t>Ningún driver individual —ni review_score— es fuerte por sí solo: el patrón es multi-causal.</a:t>
+              <a:t>Modelo reproducible y sin fuga de información, pero con lift ≈1.00x bajo la validación temporal correcta: no supera a un contacto aleatorio.</a:t>
             </a:r>
           </a:p>
           <a:p>
@@ -6668,6 +6668,27 @@
                 <a:ea typeface="Arial" pitchFamily="34" charset="-122"/>
                 <a:cs typeface="Arial" pitchFamily="34" charset="-120"/>
               </a:rPr>
+              <a:t>Ningún driver individual —ni review_score— es fuerte por sí solo: el patrón es multi-causal.</a:t>
+            </a:r>
+          </a:p>
+          <a:p>
+            <a:pPr marL="342900" indent="-342900">
+              <a:lnSpc>
+                <a:spcPts val="2160"/>
+              </a:lnSpc>
+              <a:buSzPct val="100000"/>
+              <a:buChar char="•"/>
+            </a:pPr>
+            <a:endParaRPr lang="en-US" sz="1200" dirty="0"/>
+            <a:r>
+              <a:rPr lang="en-US" sz="1200" dirty="0">
+                <a:solidFill>
+                  <a:srgbClr val="475569"/>
+                </a:solidFill>
+                <a:latin typeface="Arial" pitchFamily="34" charset="0"/>
+                <a:ea typeface="Arial" pitchFamily="34" charset="-122"/>
+                <a:cs typeface="Arial" pitchFamily="34" charset="-120"/>
+              </a:rPr>
               <a:t>RFM revela un segmento 'en riesgo/bajo valor' (29%): la mayor oportunidad de reactivación.</a:t>
             </a:r>
           </a:p>
@@ -6752,7 +6773,7 @@
                 <a:ea typeface="Arial" pitchFamily="34" charset="-122"/>
                 <a:cs typeface="Arial" pitchFamily="34" charset="-120"/>
               </a:rPr>
-              <a:t>Señal predictiva modesta sobre un dataset estático; el lift reportado es retrospectivo, no A/B.</a:t>
+              <a:t>Bajo validación temporal correcta, el modelo no generaliza hacia el futuro (lift ≈1.00x); la selección de hiperparámetros actual no detecta este problema porque solo usa CV dentro de train.</a:t>
             </a:r>
           </a:p>
         </p:txBody>
@@ -6836,7 +6857,7 @@
                 <a:ea typeface="Arial" pitchFamily="34" charset="-122"/>
                 <a:cs typeface="Arial" pitchFamily="34" charset="-120"/>
               </a:rPr>
-              <a:t>Clickstream/marketing, más modelos, recomendador complementario y validación A/B por segmento.</a:t>
+              <a:t>Prioridad: investigar el desplazamiento temporal y usar validación explícitamente temporal en la selección de modelos. Luego: clickstream/marketing, más modelos, recomendador complementario y validación A/B por segmento.</a:t>
             </a:r>
           </a:p>
         </p:txBody>
